--- a/slides-01-06/Slides-01-06-GIF.pptx
+++ b/slides-01-06/Slides-01-06-GIF.pptx
@@ -115,35 +115,35 @@
   <p:extLst>
     <p:ext uri="{521415D9-36F7-43E2-AB2F-B90AF26B5E84}">
       <p14:sectionLst xmlns:p14="http://schemas.microsoft.com/office/powerpoint/2010/main">
-        <p14:section name="1 · Title" id="{BDEE4B56-C3AB-4070-8CC2-A0DB2BD45A87}">
+        <p14:section name="1 · Response Codes" id="{4EBB7695-56BF-40F7-B875-38637C028F16}">
           <p14:sldIdLst>
             <p14:sldId id="256"/>
           </p14:sldIdLst>
         </p14:section>
-        <p14:section name="2 · Why Single Agents Fail" id="{28A5C257-5D9F-410E-9EBD-6A98768D74A1}">
+        <p14:section name="2 · Why Single Agents Fail" id="{4675FB4A-F305-4581-B576-5B30989241C3}">
           <p14:sldIdLst>
             <p14:sldId id="299"/>
             <p14:sldId id="300"/>
           </p14:sldIdLst>
         </p14:section>
-        <p14:section name="3 · Thinking + Acting + Checking" id="{A6ACD8CE-B9A1-4274-B98D-C090E2A07E03}">
+        <p14:section name="3 · Why Single Agents Fail – Part 2" id="{82F1E7E5-AABC-4C02-B0EE-1496555E4478}">
           <p14:sldIdLst>
             <p14:sldId id="284"/>
             <p14:sldId id="285"/>
           </p14:sldIdLst>
         </p14:section>
-        <p14:section name="4 · Failure Modes" id="{03BD9FCD-7AC0-4B90-B278-BA824C3B51CE}">
+        <p14:section name="4 · Failure Modes" id="{C4D28382-E2C2-4B96-929D-38B201E9CFE2}">
           <p14:sldIdLst>
             <p14:sldId id="288"/>
           </p14:sldIdLst>
         </p14:section>
-        <p14:section name="5 · Root Cause" id="{4B5412C8-6EE0-4FE3-8725-3E256FA84754}">
+        <p14:section name="5 · Root Cause" id="{0FC4997B-D564-4146-B600-45D4F937D91B}">
           <p14:sldIdLst>
             <p14:sldId id="289"/>
             <p14:sldId id="294"/>
           </p14:sldIdLst>
         </p14:section>
-        <p14:section name="6 · Core Idea" id="{7E38564B-4DDC-483F-8D0D-3246D6969B93}">
+        <p14:section name="6 · Core Idea" id="{3F8BE447-128F-474D-A34C-05681F5AF728}">
           <p14:sldIdLst>
             <p14:sldId id="301"/>
           </p14:sldIdLst>
@@ -551,13 +551,19 @@
           <a:lstStyle/>
           <a:p>
             <a:r>
-              <a:t>A multi-agent system is a parent graph that coordinates smaller graphs. Each agent is a subgraph: its own LLM, its own few tools, its own loop and state. The supervisor decides who works, the subgraphs do the work in isolation, and the checker verifies before anything leaves.</a:t>
+              <a:t>Before we talk about multi-agent systems, look at what one agent actually gets back from the model. Every reply ends with a response code: the model's reason for stopping. Here it's finish_reason = "tool_calls". The content is empty, because the model isn't answering yet; it's asking us to run a tool.</a:t>
             </a:r>
           </a:p>
           <a:p/>
           <a:p>
             <a:r>
-              <a:t>Every single-agent loop is steered by one field, finish_reason, and that's where the problems start. The rest of this section explains why we need this architecture, then the later slides walk through six ways to wire it.</a:t>
+              <a:t>There are really four cases: the model finished its answer, it wants a tool, it was cut off by the token limit, or it was blocked. Every provider has them, but the names change. Groq and OpenAI call the field finish_reason and say stop, tool_calls, length. Anthropic calls it stop_reason and says end_turn, tool_use, max_tokens. Gemini says STOP even when it wants a tool, so you have to look inside the content.</a:t>
+            </a:r>
+          </a:p>
+          <a:p/>
+          <a:p>
+            <a:r>
+              <a:t>Close: A single agent's loop runs on this one field: tool_calls means go again, stop means we're done. That works for one task. The next slides show what happens when we give that same loop more work.</a:t>
             </a:r>
           </a:p>
         </p:txBody>
@@ -1376,6 +1382,54 @@
           <a:chExt cx="0" cy="0"/>
         </a:xfrm>
       </p:grpSpPr>
+      <p:sp>
+        <p:nvSpPr>
+          <p:cNvPr id="25" name="Slide Number Placeholder 0"/>
+          <p:cNvSpPr>
+            <a:spLocks noGrp="1"/>
+          </p:cNvSpPr>
+          <p:nvPr>
+            <p:ph type="sldNum" sz="quarter" idx="4294967295"/>
+          </p:nvPr>
+        </p:nvSpPr>
+        <p:spPr>
+          <a:xfrm>
+            <a:off x="5641848" y="6382512"/>
+            <a:ext cx="914400" cy="201168"/>
+          </a:xfrm>
+          <a:prstGeom prst="rect">
+            <a:avLst/>
+          </a:prstGeom>
+          <a:extLst>
+            <a:ext uri="{C572A759-6A51-4108-AA02-DFA0A04FC94B}">
+              <ma14:wrappingTextBoxFlag xmlns:ma14="http://schemas.microsoft.com/office/mac/drawingml/2011/main" val="0"/>
+            </a:ext>
+          </a:extLst>
+        </p:spPr>
+        <p:txBody>
+          <a:bodyPr/>
+          <a:lstStyle>
+            <a:lvl1pPr>
+              <a:defRPr sz="1000">
+                <a:solidFill>
+                  <a:srgbClr val="595959"/>
+                </a:solidFill>
+                <a:latin typeface="Arial"/>
+                <a:ea typeface="Arial"/>
+                <a:cs typeface="Arial"/>
+              </a:defRPr>
+            </a:lvl1pPr>
+          </a:lstStyle>
+          <a:p>
+            <a:pPr algn="ctr"/>
+            <a:fld id="{F7021451-1387-4CA6-816F-3879F97B5CBC}" type="slidenum">
+              <a:rPr b="0" lang="en-US"/>
+              <a:t>1000</a:t>
+            </a:fld>
+            <a:endParaRPr lang="en-US"/>
+          </a:p>
+        </p:txBody>
+      </p:sp>
     </p:spTree>
   </p:cSld>
   <p:clrMapOvr>
@@ -1401,6 +1455,54 @@
           <a:chExt cx="0" cy="0"/>
         </a:xfrm>
       </p:grpSpPr>
+      <p:sp>
+        <p:nvSpPr>
+          <p:cNvPr id="25" name="Slide Number Placeholder 0"/>
+          <p:cNvSpPr>
+            <a:spLocks noGrp="1"/>
+          </p:cNvSpPr>
+          <p:nvPr>
+            <p:ph type="sldNum" sz="quarter" idx="4294967295"/>
+          </p:nvPr>
+        </p:nvSpPr>
+        <p:spPr>
+          <a:xfrm>
+            <a:off x="5641848" y="6382512"/>
+            <a:ext cx="914400" cy="201168"/>
+          </a:xfrm>
+          <a:prstGeom prst="rect">
+            <a:avLst/>
+          </a:prstGeom>
+          <a:extLst>
+            <a:ext uri="{C572A759-6A51-4108-AA02-DFA0A04FC94B}">
+              <ma14:wrappingTextBoxFlag xmlns:ma14="http://schemas.microsoft.com/office/mac/drawingml/2011/main" val="0"/>
+            </a:ext>
+          </a:extLst>
+        </p:spPr>
+        <p:txBody>
+          <a:bodyPr/>
+          <a:lstStyle>
+            <a:lvl1pPr>
+              <a:defRPr sz="1000">
+                <a:solidFill>
+                  <a:srgbClr val="595959"/>
+                </a:solidFill>
+                <a:latin typeface="Arial"/>
+                <a:ea typeface="Arial"/>
+                <a:cs typeface="Arial"/>
+              </a:defRPr>
+            </a:lvl1pPr>
+          </a:lstStyle>
+          <a:p>
+            <a:pPr algn="ctr"/>
+            <a:fld id="{F7021451-1387-4CA6-816F-3879F97B5CBC}" type="slidenum">
+              <a:rPr b="0" lang="en-US"/>
+              <a:t>null</a:t>
+            </a:fld>
+            <a:endParaRPr lang="en-US"/>
+          </a:p>
+        </p:txBody>
+      </p:sp>
     </p:spTree>
   </p:cSld>
   <p:clrMap bg1="lt1" tx1="dk1" bg2="lt2" tx2="dk2" accent1="accent1" accent2="accent2" accent3="accent3" accent4="accent4" accent5="accent5" accent6="accent6" hlink="hlink" folHlink="folHlink"/>
@@ -1687,14 +1789,14 @@
       </p:grpSpPr>
       <p:sp>
         <p:nvSpPr>
-          <p:cNvPr id="2" name="Text 0"/>
+          <p:cNvPr id="2" name="!!title"/>
           <p:cNvSpPr txBox="1"/>
           <p:nvPr/>
         </p:nvSpPr>
         <p:spPr>
           <a:xfrm>
-            <a:off x="548640" y="1371600"/>
-            <a:ext cx="4846320" cy="1828800"/>
+            <a:off x="411480" y="201168"/>
+            <a:ext cx="11338560" cy="530352"/>
           </a:xfrm>
           <a:prstGeom prst="rect">
             <a:avLst/>
@@ -1710,30 +1812,53 @@
               <a:buNone/>
             </a:pPr>
             <a:r>
-              <a:rPr lang="en-US" sz="3600" b="1" dirty="0">
-                <a:solidFill>
-                  <a:srgbClr val="2C2C2A"/>
+              <a:rPr lang="en-US" sz="2600" b="1" dirty="0">
+                <a:solidFill>
+                  <a:srgbClr val="1A1A1A"/>
                 </a:solidFill>
                 <a:latin typeface="Calibri" pitchFamily="34" charset="0"/>
                 <a:ea typeface="Calibri" pitchFamily="34" charset="-122"/>
                 <a:cs typeface="Calibri" pitchFamily="34" charset="-120"/>
               </a:rPr>
-              <a:t>Multi-Agent Systems &amp; Subgraph Architecture</a:t>
-            </a:r>
-            <a:endParaRPr lang="en-US" sz="3600" dirty="0"/>
-          </a:p>
-        </p:txBody>
-      </p:sp>
-      <p:sp>
-        <p:nvSpPr>
-          <p:cNvPr id="3" name="Text 1"/>
+              <a:t>Response Codes: How an Agent Knows What Just Happened</a:t>
+            </a:r>
+            <a:endParaRPr lang="en-US" sz="2600" dirty="0"/>
+          </a:p>
+        </p:txBody>
+      </p:sp>
+      <p:sp>
+        <p:nvSpPr>
+          <p:cNvPr id="3" name="!!rule"/>
+          <p:cNvSpPr/>
+          <p:nvPr/>
+        </p:nvSpPr>
+        <p:spPr>
+          <a:xfrm>
+            <a:off x="411480" y="804672"/>
+            <a:ext cx="11365992" cy="914"/>
+          </a:xfrm>
+          <a:prstGeom prst="line">
+            <a:avLst/>
+          </a:prstGeom>
+          <a:noFill/>
+          <a:ln w="9525">
+            <a:solidFill>
+              <a:srgbClr val="7F7F7F"/>
+            </a:solidFill>
+            <a:prstDash val="solid"/>
+          </a:ln>
+        </p:spPr>
+      </p:sp>
+      <p:sp>
+        <p:nvSpPr>
+          <p:cNvPr id="4" name="!!lead"/>
           <p:cNvSpPr txBox="1"/>
           <p:nvPr/>
         </p:nvSpPr>
         <p:spPr>
           <a:xfrm>
-            <a:off x="548640" y="3383280"/>
-            <a:ext cx="4846320" cy="640080"/>
+            <a:off x="411480" y="886968"/>
+            <a:ext cx="11338560" cy="438912"/>
           </a:xfrm>
           <a:prstGeom prst="rect">
             <a:avLst/>
@@ -1745,38 +1870,2935 @@
           <a:bodyPr wrap="square" lIns="0" tIns="0" rIns="0" bIns="0" rtlCol="0" anchor="t"/>
           <a:lstStyle/>
           <a:p>
+            <a:pPr indent="0" marL="0">
+              <a:buNone/>
+            </a:pPr>
+            <a:r>
+              <a:rPr lang="en-US" sz="1400" dirty="0">
+                <a:solidFill>
+                  <a:srgbClr val="404040"/>
+                </a:solidFill>
+                <a:latin typeface="Arial" pitchFamily="34" charset="0"/>
+                <a:ea typeface="Arial" pitchFamily="34" charset="-122"/>
+                <a:cs typeface="Arial" pitchFamily="34" charset="-120"/>
+              </a:rPr>
+              <a:t>Every LLM reply ends with a response code: the model's reason for stopping. A single agent reads it after every call to decide what to do next, and every provider names it differently.</a:t>
+            </a:r>
+            <a:endParaRPr lang="en-US" sz="1400" dirty="0"/>
+          </a:p>
+        </p:txBody>
+      </p:sp>
+      <p:sp>
+        <p:nvSpPr>
+          <p:cNvPr id="5" name="!!restricted"/>
+          <p:cNvSpPr txBox="1"/>
+          <p:nvPr/>
+        </p:nvSpPr>
+        <p:spPr>
+          <a:xfrm>
+            <a:off x="5184648" y="6556248"/>
+            <a:ext cx="1828800" cy="201168"/>
+          </a:xfrm>
+          <a:prstGeom prst="rect">
+            <a:avLst/>
+          </a:prstGeom>
+          <a:noFill/>
+          <a:ln/>
+        </p:spPr>
+        <p:txBody>
+          <a:bodyPr wrap="square" lIns="0" tIns="0" rIns="0" bIns="0" rtlCol="0" anchor="ctr"/>
+          <a:lstStyle/>
+          <a:p>
+            <a:pPr algn="ctr" indent="0" marL="0">
+              <a:buNone/>
+            </a:pPr>
+            <a:r>
+              <a:rPr lang="en-US" sz="800" dirty="0">
+                <a:solidFill>
+                  <a:srgbClr val="7F7F7F"/>
+                </a:solidFill>
+                <a:latin typeface="Arial" pitchFamily="34" charset="0"/>
+                <a:ea typeface="Arial" pitchFamily="34" charset="-122"/>
+                <a:cs typeface="Arial" pitchFamily="34" charset="-120"/>
+              </a:rPr>
+              <a:t>RESTRICTED</a:t>
+            </a:r>
+            <a:endParaRPr lang="en-US" sz="800" dirty="0"/>
+          </a:p>
+        </p:txBody>
+      </p:sp>
+      <p:sp>
+        <p:nvSpPr>
+          <p:cNvPr id="6" name="Text 4"/>
+          <p:cNvSpPr txBox="1"/>
+          <p:nvPr/>
+        </p:nvSpPr>
+        <p:spPr>
+          <a:xfrm>
+            <a:off x="411480" y="1444752"/>
+            <a:ext cx="5212080" cy="274320"/>
+          </a:xfrm>
+          <a:prstGeom prst="rect">
+            <a:avLst/>
+          </a:prstGeom>
+          <a:noFill/>
+          <a:ln/>
+        </p:spPr>
+        <p:txBody>
+          <a:bodyPr wrap="square" lIns="0" tIns="0" rIns="0" bIns="0" rtlCol="0" anchor="t"/>
+          <a:lstStyle/>
+          <a:p>
             <a:pPr algn="l" indent="0" marL="0">
               <a:buNone/>
             </a:pPr>
             <a:r>
-              <a:rPr lang="en-US" sz="1800" dirty="0">
-                <a:solidFill>
-                  <a:srgbClr val="5F5E5A"/>
+              <a:rPr lang="en-US" sz="1300" b="1" dirty="0">
+                <a:solidFill>
+                  <a:srgbClr val="2C2C2A"/>
                 </a:solidFill>
                 <a:latin typeface="Calibri" pitchFamily="34" charset="0"/>
                 <a:ea typeface="Calibri" pitchFamily="34" charset="-122"/>
                 <a:cs typeface="Calibri" pitchFamily="34" charset="-120"/>
               </a:rPr>
-              <a:t>From one overloaded agent to a team of focused ones.</a:t>
-            </a:r>
-            <a:endParaRPr lang="en-US" sz="1800" dirty="0"/>
-          </a:p>
-        </p:txBody>
-      </p:sp>
-      <p:sp>
-        <p:nvSpPr>
-          <p:cNvPr id="4" name="Text 2"/>
+              <a:t>One reply from a single agent (Groq · OpenAI format)</a:t>
+            </a:r>
+            <a:endParaRPr lang="en-US" sz="1300" dirty="0"/>
+          </a:p>
+        </p:txBody>
+      </p:sp>
+      <p:sp>
+        <p:nvSpPr>
+          <p:cNvPr id="7" name="!!jsonbox"/>
           <p:cNvSpPr/>
           <p:nvPr/>
         </p:nvSpPr>
         <p:spPr>
           <a:xfrm>
-            <a:off x="548640" y="4206240"/>
-            <a:ext cx="4846320" cy="1005840"/>
+            <a:off x="411480" y="1783080"/>
+            <a:ext cx="5257800" cy="3172968"/>
           </a:xfrm>
           <a:prstGeom prst="roundRect">
             <a:avLst>
-              <a:gd name="adj" fmla="val 10909"/>
+              <a:gd name="adj" fmla="val 1441"/>
+            </a:avLst>
+          </a:prstGeom>
+          <a:solidFill>
+            <a:srgbClr val="F7F6F2"/>
+          </a:solidFill>
+          <a:ln w="9525">
+            <a:solidFill>
+              <a:srgbClr val="D3D1C7"/>
+            </a:solidFill>
+            <a:prstDash val="solid"/>
+          </a:ln>
+        </p:spPr>
+        <p:txBody>
+          <a:bodyPr wrap="square" lIns="50800" tIns="50800" rIns="50800" bIns="50800" rtlCol="0" anchor="ctr"/>
+          <a:lstStyle/>
+          <a:p>
+            <a:pPr algn="ctr" indent="0" marL="0">
+              <a:buNone/>
+            </a:pPr>
+            <a:endParaRPr lang="en-US" sz="1200" dirty="0"/>
+          </a:p>
+        </p:txBody>
+      </p:sp>
+      <p:sp>
+        <p:nvSpPr>
+          <p:cNvPr id="8" name="!!jsonhi"/>
+          <p:cNvSpPr/>
+          <p:nvPr/>
+        </p:nvSpPr>
+        <p:spPr>
+          <a:xfrm>
+            <a:off x="502920" y="4142232"/>
+            <a:ext cx="2834640" cy="192024"/>
+          </a:xfrm>
+          <a:prstGeom prst="roundRect">
+            <a:avLst>
+              <a:gd name="adj" fmla="val 14286"/>
+            </a:avLst>
+          </a:prstGeom>
+          <a:solidFill>
+            <a:srgbClr val="FAEEDA"/>
+          </a:solidFill>
+          <a:ln w="9525">
+            <a:solidFill>
+              <a:srgbClr val="854F0B"/>
+            </a:solidFill>
+            <a:prstDash val="solid"/>
+          </a:ln>
+        </p:spPr>
+        <p:txBody>
+          <a:bodyPr wrap="square" lIns="50800" tIns="50800" rIns="50800" bIns="50800" rtlCol="0" anchor="ctr"/>
+          <a:lstStyle/>
+          <a:p>
+            <a:pPr algn="ctr" indent="0" marL="0">
+              <a:buNone/>
+            </a:pPr>
+            <a:endParaRPr lang="en-US" sz="1200" dirty="0"/>
+          </a:p>
+        </p:txBody>
+      </p:sp>
+      <p:sp>
+        <p:nvSpPr>
+          <p:cNvPr id="9" name="!!json0"/>
+          <p:cNvSpPr txBox="1"/>
+          <p:nvPr/>
+        </p:nvSpPr>
+        <p:spPr>
+          <a:xfrm>
+            <a:off x="594360" y="1892808"/>
+            <a:ext cx="5029200" cy="173736"/>
+          </a:xfrm>
+          <a:prstGeom prst="rect">
+            <a:avLst/>
+          </a:prstGeom>
+          <a:noFill/>
+          <a:ln/>
+        </p:spPr>
+        <p:txBody>
+          <a:bodyPr wrap="square" lIns="0" tIns="0" rIns="0" bIns="0" rtlCol="0" anchor="ctr"/>
+          <a:lstStyle/>
+          <a:p>
+            <a:pPr algn="l" indent="0" marL="0">
+              <a:buNone/>
+            </a:pPr>
+            <a:r>
+              <a:rPr lang="en-US" sz="1050" dirty="0">
+                <a:solidFill>
+                  <a:srgbClr val="2C2C2A"/>
+                </a:solidFill>
+                <a:latin typeface="Consolas" pitchFamily="34" charset="0"/>
+                <a:ea typeface="Consolas" pitchFamily="34" charset="-122"/>
+                <a:cs typeface="Consolas" pitchFamily="34" charset="-120"/>
+              </a:rPr>
+              <a:t>{</a:t>
+            </a:r>
+            <a:endParaRPr lang="en-US" sz="1050" dirty="0"/>
+          </a:p>
+        </p:txBody>
+      </p:sp>
+      <p:sp>
+        <p:nvSpPr>
+          <p:cNvPr id="10" name="!!json1"/>
+          <p:cNvSpPr txBox="1"/>
+          <p:nvPr/>
+        </p:nvSpPr>
+        <p:spPr>
+          <a:xfrm>
+            <a:off x="594360" y="2066544"/>
+            <a:ext cx="5029200" cy="173736"/>
+          </a:xfrm>
+          <a:prstGeom prst="rect">
+            <a:avLst/>
+          </a:prstGeom>
+          <a:noFill/>
+          <a:ln/>
+        </p:spPr>
+        <p:txBody>
+          <a:bodyPr wrap="square" lIns="0" tIns="0" rIns="0" bIns="0" rtlCol="0" anchor="ctr"/>
+          <a:lstStyle/>
+          <a:p>
+            <a:pPr algn="l" indent="0" marL="0">
+              <a:buNone/>
+            </a:pPr>
+            <a:r>
+              <a:rPr lang="en-US" sz="1050" dirty="0">
+                <a:solidFill>
+                  <a:srgbClr val="2C2C2A"/>
+                </a:solidFill>
+                <a:latin typeface="Consolas" pitchFamily="34" charset="0"/>
+                <a:ea typeface="Consolas" pitchFamily="34" charset="-122"/>
+                <a:cs typeface="Consolas" pitchFamily="34" charset="-120"/>
+              </a:rPr>
+              <a:t>  "model": "openai/gpt-oss-120b",</a:t>
+            </a:r>
+            <a:endParaRPr lang="en-US" sz="1050" dirty="0"/>
+          </a:p>
+        </p:txBody>
+      </p:sp>
+      <p:sp>
+        <p:nvSpPr>
+          <p:cNvPr id="11" name="!!json2"/>
+          <p:cNvSpPr txBox="1"/>
+          <p:nvPr/>
+        </p:nvSpPr>
+        <p:spPr>
+          <a:xfrm>
+            <a:off x="594360" y="2240280"/>
+            <a:ext cx="5029200" cy="173736"/>
+          </a:xfrm>
+          <a:prstGeom prst="rect">
+            <a:avLst/>
+          </a:prstGeom>
+          <a:noFill/>
+          <a:ln/>
+        </p:spPr>
+        <p:txBody>
+          <a:bodyPr wrap="square" lIns="0" tIns="0" rIns="0" bIns="0" rtlCol="0" anchor="ctr"/>
+          <a:lstStyle/>
+          <a:p>
+            <a:pPr algn="l" indent="0" marL="0">
+              <a:buNone/>
+            </a:pPr>
+            <a:r>
+              <a:rPr lang="en-US" sz="1050" dirty="0">
+                <a:solidFill>
+                  <a:srgbClr val="2C2C2A"/>
+                </a:solidFill>
+                <a:latin typeface="Consolas" pitchFamily="34" charset="0"/>
+                <a:ea typeface="Consolas" pitchFamily="34" charset="-122"/>
+                <a:cs typeface="Consolas" pitchFamily="34" charset="-120"/>
+              </a:rPr>
+              <a:t>  "choices": [{</a:t>
+            </a:r>
+            <a:endParaRPr lang="en-US" sz="1050" dirty="0"/>
+          </a:p>
+        </p:txBody>
+      </p:sp>
+      <p:sp>
+        <p:nvSpPr>
+          <p:cNvPr id="12" name="!!json3"/>
+          <p:cNvSpPr txBox="1"/>
+          <p:nvPr/>
+        </p:nvSpPr>
+        <p:spPr>
+          <a:xfrm>
+            <a:off x="594360" y="2414016"/>
+            <a:ext cx="5029200" cy="173736"/>
+          </a:xfrm>
+          <a:prstGeom prst="rect">
+            <a:avLst/>
+          </a:prstGeom>
+          <a:noFill/>
+          <a:ln/>
+        </p:spPr>
+        <p:txBody>
+          <a:bodyPr wrap="square" lIns="0" tIns="0" rIns="0" bIns="0" rtlCol="0" anchor="ctr"/>
+          <a:lstStyle/>
+          <a:p>
+            <a:pPr algn="l" indent="0" marL="0">
+              <a:buNone/>
+            </a:pPr>
+            <a:r>
+              <a:rPr lang="en-US" sz="1050" dirty="0">
+                <a:solidFill>
+                  <a:srgbClr val="2C2C2A"/>
+                </a:solidFill>
+                <a:latin typeface="Consolas" pitchFamily="34" charset="0"/>
+                <a:ea typeface="Consolas" pitchFamily="34" charset="-122"/>
+                <a:cs typeface="Consolas" pitchFamily="34" charset="-120"/>
+              </a:rPr>
+              <a:t>    "message": {</a:t>
+            </a:r>
+            <a:endParaRPr lang="en-US" sz="1050" dirty="0"/>
+          </a:p>
+        </p:txBody>
+      </p:sp>
+      <p:sp>
+        <p:nvSpPr>
+          <p:cNvPr id="13" name="!!json4"/>
+          <p:cNvSpPr txBox="1"/>
+          <p:nvPr/>
+        </p:nvSpPr>
+        <p:spPr>
+          <a:xfrm>
+            <a:off x="594360" y="2587752"/>
+            <a:ext cx="5029200" cy="173736"/>
+          </a:xfrm>
+          <a:prstGeom prst="rect">
+            <a:avLst/>
+          </a:prstGeom>
+          <a:noFill/>
+          <a:ln/>
+        </p:spPr>
+        <p:txBody>
+          <a:bodyPr wrap="square" lIns="0" tIns="0" rIns="0" bIns="0" rtlCol="0" anchor="ctr"/>
+          <a:lstStyle/>
+          <a:p>
+            <a:pPr algn="l" indent="0" marL="0">
+              <a:buNone/>
+            </a:pPr>
+            <a:r>
+              <a:rPr lang="en-US" sz="1050" dirty="0">
+                <a:solidFill>
+                  <a:srgbClr val="2C2C2A"/>
+                </a:solidFill>
+                <a:latin typeface="Consolas" pitchFamily="34" charset="0"/>
+                <a:ea typeface="Consolas" pitchFamily="34" charset="-122"/>
+                <a:cs typeface="Consolas" pitchFamily="34" charset="-120"/>
+              </a:rPr>
+              <a:t>      "role": "assistant",</a:t>
+            </a:r>
+            <a:endParaRPr lang="en-US" sz="1050" dirty="0"/>
+          </a:p>
+        </p:txBody>
+      </p:sp>
+      <p:sp>
+        <p:nvSpPr>
+          <p:cNvPr id="14" name="!!json5"/>
+          <p:cNvSpPr txBox="1"/>
+          <p:nvPr/>
+        </p:nvSpPr>
+        <p:spPr>
+          <a:xfrm>
+            <a:off x="594360" y="2761488"/>
+            <a:ext cx="5029200" cy="173736"/>
+          </a:xfrm>
+          <a:prstGeom prst="rect">
+            <a:avLst/>
+          </a:prstGeom>
+          <a:noFill/>
+          <a:ln/>
+        </p:spPr>
+        <p:txBody>
+          <a:bodyPr wrap="square" lIns="0" tIns="0" rIns="0" bIns="0" rtlCol="0" anchor="ctr"/>
+          <a:lstStyle/>
+          <a:p>
+            <a:pPr algn="l" indent="0" marL="0">
+              <a:buNone/>
+            </a:pPr>
+            <a:r>
+              <a:rPr lang="en-US" sz="1050" dirty="0">
+                <a:solidFill>
+                  <a:srgbClr val="2C2C2A"/>
+                </a:solidFill>
+                <a:latin typeface="Consolas" pitchFamily="34" charset="0"/>
+                <a:ea typeface="Consolas" pitchFamily="34" charset="-122"/>
+                <a:cs typeface="Consolas" pitchFamily="34" charset="-120"/>
+              </a:rPr>
+              <a:t>      "content": null,</a:t>
+            </a:r>
+            <a:endParaRPr lang="en-US" sz="1050" dirty="0"/>
+          </a:p>
+        </p:txBody>
+      </p:sp>
+      <p:sp>
+        <p:nvSpPr>
+          <p:cNvPr id="15" name="!!json6"/>
+          <p:cNvSpPr txBox="1"/>
+          <p:nvPr/>
+        </p:nvSpPr>
+        <p:spPr>
+          <a:xfrm>
+            <a:off x="594360" y="2935224"/>
+            <a:ext cx="5029200" cy="173736"/>
+          </a:xfrm>
+          <a:prstGeom prst="rect">
+            <a:avLst/>
+          </a:prstGeom>
+          <a:noFill/>
+          <a:ln/>
+        </p:spPr>
+        <p:txBody>
+          <a:bodyPr wrap="square" lIns="0" tIns="0" rIns="0" bIns="0" rtlCol="0" anchor="ctr"/>
+          <a:lstStyle/>
+          <a:p>
+            <a:pPr algn="l" indent="0" marL="0">
+              <a:buNone/>
+            </a:pPr>
+            <a:r>
+              <a:rPr lang="en-US" sz="1050" dirty="0">
+                <a:solidFill>
+                  <a:srgbClr val="2C2C2A"/>
+                </a:solidFill>
+                <a:latin typeface="Consolas" pitchFamily="34" charset="0"/>
+                <a:ea typeface="Consolas" pitchFamily="34" charset="-122"/>
+                <a:cs typeface="Consolas" pitchFamily="34" charset="-120"/>
+              </a:rPr>
+              <a:t>      "tool_calls": [{</a:t>
+            </a:r>
+            <a:endParaRPr lang="en-US" sz="1050" dirty="0"/>
+          </a:p>
+        </p:txBody>
+      </p:sp>
+      <p:sp>
+        <p:nvSpPr>
+          <p:cNvPr id="16" name="!!json7"/>
+          <p:cNvSpPr txBox="1"/>
+          <p:nvPr/>
+        </p:nvSpPr>
+        <p:spPr>
+          <a:xfrm>
+            <a:off x="594360" y="3108960"/>
+            <a:ext cx="5029200" cy="173736"/>
+          </a:xfrm>
+          <a:prstGeom prst="rect">
+            <a:avLst/>
+          </a:prstGeom>
+          <a:noFill/>
+          <a:ln/>
+        </p:spPr>
+        <p:txBody>
+          <a:bodyPr wrap="square" lIns="0" tIns="0" rIns="0" bIns="0" rtlCol="0" anchor="ctr"/>
+          <a:lstStyle/>
+          <a:p>
+            <a:pPr algn="l" indent="0" marL="0">
+              <a:buNone/>
+            </a:pPr>
+            <a:r>
+              <a:rPr lang="en-US" sz="1050" dirty="0">
+                <a:solidFill>
+                  <a:srgbClr val="2C2C2A"/>
+                </a:solidFill>
+                <a:latin typeface="Consolas" pitchFamily="34" charset="0"/>
+                <a:ea typeface="Consolas" pitchFamily="34" charset="-122"/>
+                <a:cs typeface="Consolas" pitchFamily="34" charset="-120"/>
+              </a:rPr>
+              <a:t>        "function": {</a:t>
+            </a:r>
+            <a:endParaRPr lang="en-US" sz="1050" dirty="0"/>
+          </a:p>
+        </p:txBody>
+      </p:sp>
+      <p:sp>
+        <p:nvSpPr>
+          <p:cNvPr id="17" name="!!json8"/>
+          <p:cNvSpPr txBox="1"/>
+          <p:nvPr/>
+        </p:nvSpPr>
+        <p:spPr>
+          <a:xfrm>
+            <a:off x="594360" y="3282696"/>
+            <a:ext cx="5029200" cy="173736"/>
+          </a:xfrm>
+          <a:prstGeom prst="rect">
+            <a:avLst/>
+          </a:prstGeom>
+          <a:noFill/>
+          <a:ln/>
+        </p:spPr>
+        <p:txBody>
+          <a:bodyPr wrap="square" lIns="0" tIns="0" rIns="0" bIns="0" rtlCol="0" anchor="ctr"/>
+          <a:lstStyle/>
+          <a:p>
+            <a:pPr algn="l" indent="0" marL="0">
+              <a:buNone/>
+            </a:pPr>
+            <a:r>
+              <a:rPr lang="en-US" sz="1050" dirty="0">
+                <a:solidFill>
+                  <a:srgbClr val="2C2C2A"/>
+                </a:solidFill>
+                <a:latin typeface="Consolas" pitchFamily="34" charset="0"/>
+                <a:ea typeface="Consolas" pitchFamily="34" charset="-122"/>
+                <a:cs typeface="Consolas" pitchFamily="34" charset="-120"/>
+              </a:rPr>
+              <a:t>          "name": "run_sql",</a:t>
+            </a:r>
+            <a:endParaRPr lang="en-US" sz="1050" dirty="0"/>
+          </a:p>
+        </p:txBody>
+      </p:sp>
+      <p:sp>
+        <p:nvSpPr>
+          <p:cNvPr id="18" name="!!json9"/>
+          <p:cNvSpPr txBox="1"/>
+          <p:nvPr/>
+        </p:nvSpPr>
+        <p:spPr>
+          <a:xfrm>
+            <a:off x="594360" y="3456432"/>
+            <a:ext cx="5029200" cy="173736"/>
+          </a:xfrm>
+          <a:prstGeom prst="rect">
+            <a:avLst/>
+          </a:prstGeom>
+          <a:noFill/>
+          <a:ln/>
+        </p:spPr>
+        <p:txBody>
+          <a:bodyPr wrap="square" lIns="0" tIns="0" rIns="0" bIns="0" rtlCol="0" anchor="ctr"/>
+          <a:lstStyle/>
+          <a:p>
+            <a:pPr algn="l" indent="0" marL="0">
+              <a:buNone/>
+            </a:pPr>
+            <a:r>
+              <a:rPr lang="en-US" sz="1050" dirty="0">
+                <a:solidFill>
+                  <a:srgbClr val="2C2C2A"/>
+                </a:solidFill>
+                <a:latin typeface="Consolas" pitchFamily="34" charset="0"/>
+                <a:ea typeface="Consolas" pitchFamily="34" charset="-122"/>
+                <a:cs typeface="Consolas" pitchFamily="34" charset="-120"/>
+              </a:rPr>
+              <a:t>          "arguments": "{\"ticket\": \"4521\"}"</a:t>
+            </a:r>
+            <a:endParaRPr lang="en-US" sz="1050" dirty="0"/>
+          </a:p>
+        </p:txBody>
+      </p:sp>
+      <p:sp>
+        <p:nvSpPr>
+          <p:cNvPr id="19" name="!!json10"/>
+          <p:cNvSpPr txBox="1"/>
+          <p:nvPr/>
+        </p:nvSpPr>
+        <p:spPr>
+          <a:xfrm>
+            <a:off x="594360" y="3630168"/>
+            <a:ext cx="5029200" cy="173736"/>
+          </a:xfrm>
+          <a:prstGeom prst="rect">
+            <a:avLst/>
+          </a:prstGeom>
+          <a:noFill/>
+          <a:ln/>
+        </p:spPr>
+        <p:txBody>
+          <a:bodyPr wrap="square" lIns="0" tIns="0" rIns="0" bIns="0" rtlCol="0" anchor="ctr"/>
+          <a:lstStyle/>
+          <a:p>
+            <a:pPr algn="l" indent="0" marL="0">
+              <a:buNone/>
+            </a:pPr>
+            <a:r>
+              <a:rPr lang="en-US" sz="1050" dirty="0">
+                <a:solidFill>
+                  <a:srgbClr val="2C2C2A"/>
+                </a:solidFill>
+                <a:latin typeface="Consolas" pitchFamily="34" charset="0"/>
+                <a:ea typeface="Consolas" pitchFamily="34" charset="-122"/>
+                <a:cs typeface="Consolas" pitchFamily="34" charset="-120"/>
+              </a:rPr>
+              <a:t>        }</a:t>
+            </a:r>
+            <a:endParaRPr lang="en-US" sz="1050" dirty="0"/>
+          </a:p>
+        </p:txBody>
+      </p:sp>
+      <p:sp>
+        <p:nvSpPr>
+          <p:cNvPr id="20" name="!!json11"/>
+          <p:cNvSpPr txBox="1"/>
+          <p:nvPr/>
+        </p:nvSpPr>
+        <p:spPr>
+          <a:xfrm>
+            <a:off x="594360" y="3803904"/>
+            <a:ext cx="5029200" cy="173736"/>
+          </a:xfrm>
+          <a:prstGeom prst="rect">
+            <a:avLst/>
+          </a:prstGeom>
+          <a:noFill/>
+          <a:ln/>
+        </p:spPr>
+        <p:txBody>
+          <a:bodyPr wrap="square" lIns="0" tIns="0" rIns="0" bIns="0" rtlCol="0" anchor="ctr"/>
+          <a:lstStyle/>
+          <a:p>
+            <a:pPr algn="l" indent="0" marL="0">
+              <a:buNone/>
+            </a:pPr>
+            <a:r>
+              <a:rPr lang="en-US" sz="1050" dirty="0">
+                <a:solidFill>
+                  <a:srgbClr val="2C2C2A"/>
+                </a:solidFill>
+                <a:latin typeface="Consolas" pitchFamily="34" charset="0"/>
+                <a:ea typeface="Consolas" pitchFamily="34" charset="-122"/>
+                <a:cs typeface="Consolas" pitchFamily="34" charset="-120"/>
+              </a:rPr>
+              <a:t>      }]</a:t>
+            </a:r>
+            <a:endParaRPr lang="en-US" sz="1050" dirty="0"/>
+          </a:p>
+        </p:txBody>
+      </p:sp>
+      <p:sp>
+        <p:nvSpPr>
+          <p:cNvPr id="21" name="!!json12"/>
+          <p:cNvSpPr txBox="1"/>
+          <p:nvPr/>
+        </p:nvSpPr>
+        <p:spPr>
+          <a:xfrm>
+            <a:off x="594360" y="3977640"/>
+            <a:ext cx="5029200" cy="173736"/>
+          </a:xfrm>
+          <a:prstGeom prst="rect">
+            <a:avLst/>
+          </a:prstGeom>
+          <a:noFill/>
+          <a:ln/>
+        </p:spPr>
+        <p:txBody>
+          <a:bodyPr wrap="square" lIns="0" tIns="0" rIns="0" bIns="0" rtlCol="0" anchor="ctr"/>
+          <a:lstStyle/>
+          <a:p>
+            <a:pPr algn="l" indent="0" marL="0">
+              <a:buNone/>
+            </a:pPr>
+            <a:r>
+              <a:rPr lang="en-US" sz="1050" dirty="0">
+                <a:solidFill>
+                  <a:srgbClr val="2C2C2A"/>
+                </a:solidFill>
+                <a:latin typeface="Consolas" pitchFamily="34" charset="0"/>
+                <a:ea typeface="Consolas" pitchFamily="34" charset="-122"/>
+                <a:cs typeface="Consolas" pitchFamily="34" charset="-120"/>
+              </a:rPr>
+              <a:t>    },</a:t>
+            </a:r>
+            <a:endParaRPr lang="en-US" sz="1050" dirty="0"/>
+          </a:p>
+        </p:txBody>
+      </p:sp>
+      <p:sp>
+        <p:nvSpPr>
+          <p:cNvPr id="22" name="!!json13"/>
+          <p:cNvSpPr txBox="1"/>
+          <p:nvPr/>
+        </p:nvSpPr>
+        <p:spPr>
+          <a:xfrm>
+            <a:off x="594360" y="4151376"/>
+            <a:ext cx="5029200" cy="173736"/>
+          </a:xfrm>
+          <a:prstGeom prst="rect">
+            <a:avLst/>
+          </a:prstGeom>
+          <a:noFill/>
+          <a:ln/>
+        </p:spPr>
+        <p:txBody>
+          <a:bodyPr wrap="square" lIns="0" tIns="0" rIns="0" bIns="0" rtlCol="0" anchor="ctr"/>
+          <a:lstStyle/>
+          <a:p>
+            <a:pPr algn="l" indent="0" marL="0">
+              <a:buNone/>
+            </a:pPr>
+            <a:r>
+              <a:rPr lang="en-US" sz="1050" b="1" dirty="0">
+                <a:solidFill>
+                  <a:srgbClr val="633806"/>
+                </a:solidFill>
+                <a:latin typeface="Consolas" pitchFamily="34" charset="0"/>
+                <a:ea typeface="Consolas" pitchFamily="34" charset="-122"/>
+                <a:cs typeface="Consolas" pitchFamily="34" charset="-120"/>
+              </a:rPr>
+              <a:t>    "finish_reason": "tool_calls"</a:t>
+            </a:r>
+            <a:endParaRPr lang="en-US" sz="1050" dirty="0"/>
+          </a:p>
+        </p:txBody>
+      </p:sp>
+      <p:sp>
+        <p:nvSpPr>
+          <p:cNvPr id="23" name="!!json14"/>
+          <p:cNvSpPr txBox="1"/>
+          <p:nvPr/>
+        </p:nvSpPr>
+        <p:spPr>
+          <a:xfrm>
+            <a:off x="594360" y="4325112"/>
+            <a:ext cx="5029200" cy="173736"/>
+          </a:xfrm>
+          <a:prstGeom prst="rect">
+            <a:avLst/>
+          </a:prstGeom>
+          <a:noFill/>
+          <a:ln/>
+        </p:spPr>
+        <p:txBody>
+          <a:bodyPr wrap="square" lIns="0" tIns="0" rIns="0" bIns="0" rtlCol="0" anchor="ctr"/>
+          <a:lstStyle/>
+          <a:p>
+            <a:pPr algn="l" indent="0" marL="0">
+              <a:buNone/>
+            </a:pPr>
+            <a:r>
+              <a:rPr lang="en-US" sz="1050" dirty="0">
+                <a:solidFill>
+                  <a:srgbClr val="2C2C2A"/>
+                </a:solidFill>
+                <a:latin typeface="Consolas" pitchFamily="34" charset="0"/>
+                <a:ea typeface="Consolas" pitchFamily="34" charset="-122"/>
+                <a:cs typeface="Consolas" pitchFamily="34" charset="-120"/>
+              </a:rPr>
+              <a:t>  }],</a:t>
+            </a:r>
+            <a:endParaRPr lang="en-US" sz="1050" dirty="0"/>
+          </a:p>
+        </p:txBody>
+      </p:sp>
+      <p:sp>
+        <p:nvSpPr>
+          <p:cNvPr id="24" name="!!json15"/>
+          <p:cNvSpPr txBox="1"/>
+          <p:nvPr/>
+        </p:nvSpPr>
+        <p:spPr>
+          <a:xfrm>
+            <a:off x="594360" y="4498848"/>
+            <a:ext cx="5029200" cy="173736"/>
+          </a:xfrm>
+          <a:prstGeom prst="rect">
+            <a:avLst/>
+          </a:prstGeom>
+          <a:noFill/>
+          <a:ln/>
+        </p:spPr>
+        <p:txBody>
+          <a:bodyPr wrap="square" lIns="0" tIns="0" rIns="0" bIns="0" rtlCol="0" anchor="ctr"/>
+          <a:lstStyle/>
+          <a:p>
+            <a:pPr algn="l" indent="0" marL="0">
+              <a:buNone/>
+            </a:pPr>
+            <a:r>
+              <a:rPr lang="en-US" sz="1050" dirty="0">
+                <a:solidFill>
+                  <a:srgbClr val="2C2C2A"/>
+                </a:solidFill>
+                <a:latin typeface="Consolas" pitchFamily="34" charset="0"/>
+                <a:ea typeface="Consolas" pitchFamily="34" charset="-122"/>
+                <a:cs typeface="Consolas" pitchFamily="34" charset="-120"/>
+              </a:rPr>
+              <a:t>  "usage": {"prompt_tokens": 812, "completion_tokens": 41}</a:t>
+            </a:r>
+            <a:endParaRPr lang="en-US" sz="1050" dirty="0"/>
+          </a:p>
+        </p:txBody>
+      </p:sp>
+      <p:sp>
+        <p:nvSpPr>
+          <p:cNvPr id="25" name="!!json16"/>
+          <p:cNvSpPr txBox="1"/>
+          <p:nvPr/>
+        </p:nvSpPr>
+        <p:spPr>
+          <a:xfrm>
+            <a:off x="594360" y="4672584"/>
+            <a:ext cx="5029200" cy="173736"/>
+          </a:xfrm>
+          <a:prstGeom prst="rect">
+            <a:avLst/>
+          </a:prstGeom>
+          <a:noFill/>
+          <a:ln/>
+        </p:spPr>
+        <p:txBody>
+          <a:bodyPr wrap="square" lIns="0" tIns="0" rIns="0" bIns="0" rtlCol="0" anchor="ctr"/>
+          <a:lstStyle/>
+          <a:p>
+            <a:pPr algn="l" indent="0" marL="0">
+              <a:buNone/>
+            </a:pPr>
+            <a:r>
+              <a:rPr lang="en-US" sz="1050" dirty="0">
+                <a:solidFill>
+                  <a:srgbClr val="2C2C2A"/>
+                </a:solidFill>
+                <a:latin typeface="Consolas" pitchFamily="34" charset="0"/>
+                <a:ea typeface="Consolas" pitchFamily="34" charset="-122"/>
+                <a:cs typeface="Consolas" pitchFamily="34" charset="-120"/>
+              </a:rPr>
+              <a:t>}</a:t>
+            </a:r>
+            <a:endParaRPr lang="en-US" sz="1050" dirty="0"/>
+          </a:p>
+        </p:txBody>
+      </p:sp>
+      <p:sp>
+        <p:nvSpPr>
+          <p:cNvPr id="26" name="!!jsonlbl"/>
+          <p:cNvSpPr/>
+          <p:nvPr/>
+        </p:nvSpPr>
+        <p:spPr>
+          <a:xfrm>
+            <a:off x="3520440" y="4133088"/>
+            <a:ext cx="1325880" cy="210312"/>
+          </a:xfrm>
+          <a:prstGeom prst="roundRect">
+            <a:avLst>
+              <a:gd name="adj" fmla="val 43478"/>
+            </a:avLst>
+          </a:prstGeom>
+          <a:solidFill>
+            <a:srgbClr val="FAEEDA"/>
+          </a:solidFill>
+          <a:ln w="12700">
+            <a:solidFill>
+              <a:srgbClr val="854F0B"/>
+            </a:solidFill>
+            <a:prstDash val="solid"/>
+          </a:ln>
+        </p:spPr>
+        <p:txBody>
+          <a:bodyPr wrap="square" lIns="0" tIns="0" rIns="0" bIns="0" rtlCol="0" anchor="ctr"/>
+          <a:lstStyle/>
+          <a:p>
+            <a:pPr algn="ctr" indent="0" marL="0">
+              <a:buNone/>
+            </a:pPr>
+            <a:r>
+              <a:rPr lang="en-US" sz="1000" b="1" dirty="0">
+                <a:solidFill>
+                  <a:srgbClr val="633806"/>
+                </a:solidFill>
+                <a:latin typeface="Calibri" pitchFamily="34" charset="0"/>
+                <a:ea typeface="Calibri" pitchFamily="34" charset="-122"/>
+                <a:cs typeface="Calibri" pitchFamily="34" charset="-120"/>
+              </a:rPr>
+              <a:t>← response code</a:t>
+            </a:r>
+            <a:endParaRPr lang="en-US" sz="1000" dirty="0"/>
+          </a:p>
+        </p:txBody>
+      </p:sp>
+      <p:sp>
+        <p:nvSpPr>
+          <p:cNvPr id="27" name="!!jsoncap"/>
+          <p:cNvSpPr txBox="1"/>
+          <p:nvPr/>
+        </p:nvSpPr>
+        <p:spPr>
+          <a:xfrm>
+            <a:off x="411480" y="5065776"/>
+            <a:ext cx="5257800" cy="457200"/>
+          </a:xfrm>
+          <a:prstGeom prst="rect">
+            <a:avLst/>
+          </a:prstGeom>
+          <a:noFill/>
+          <a:ln/>
+        </p:spPr>
+        <p:txBody>
+          <a:bodyPr wrap="square" lIns="0" tIns="0" rIns="0" bIns="0" rtlCol="0" anchor="t"/>
+          <a:lstStyle/>
+          <a:p>
+            <a:pPr algn="l" indent="0" marL="0">
+              <a:buNone/>
+            </a:pPr>
+            <a:r>
+              <a:rPr lang="en-US" sz="1200" dirty="0">
+                <a:solidFill>
+                  <a:srgbClr val="5F5E5A"/>
+                </a:solidFill>
+                <a:latin typeface="Consolas" pitchFamily="34" charset="0"/>
+                <a:ea typeface="Consolas" pitchFamily="34" charset="-122"/>
+                <a:cs typeface="Consolas" pitchFamily="34" charset="-120"/>
+              </a:rPr>
+              <a:t>content</a:t>
+            </a:r>
+            <a:pPr algn="l" indent="0" marL="0">
+              <a:buNone/>
+            </a:pPr>
+            <a:r>
+              <a:rPr lang="en-US" sz="1200" dirty="0">
+                <a:solidFill>
+                  <a:srgbClr val="5F5E5A"/>
+                </a:solidFill>
+                <a:latin typeface="Calibri" pitchFamily="34" charset="0"/>
+                <a:ea typeface="Calibri" pitchFamily="34" charset="-122"/>
+                <a:cs typeface="Calibri" pitchFamily="34" charset="-120"/>
+              </a:rPr>
+              <a:t> is empty because the model wants a tool. The response code tells the loop what to do next.</a:t>
+            </a:r>
+            <a:endParaRPr lang="en-US" sz="1200" dirty="0"/>
+          </a:p>
+        </p:txBody>
+      </p:sp>
+      <p:sp>
+        <p:nvSpPr>
+          <p:cNvPr id="28" name="Text 26"/>
+          <p:cNvSpPr txBox="1"/>
+          <p:nvPr/>
+        </p:nvSpPr>
+        <p:spPr>
+          <a:xfrm>
+            <a:off x="5989320" y="1444752"/>
+            <a:ext cx="5788152" cy="274320"/>
+          </a:xfrm>
+          <a:prstGeom prst="rect">
+            <a:avLst/>
+          </a:prstGeom>
+          <a:noFill/>
+          <a:ln/>
+        </p:spPr>
+        <p:txBody>
+          <a:bodyPr wrap="square" lIns="0" tIns="0" rIns="0" bIns="0" rtlCol="0" anchor="t"/>
+          <a:lstStyle/>
+          <a:p>
+            <a:pPr algn="l" indent="0" marL="0">
+              <a:buNone/>
+            </a:pPr>
+            <a:r>
+              <a:rPr lang="en-US" sz="1300" b="1" dirty="0">
+                <a:solidFill>
+                  <a:srgbClr val="2C2C2A"/>
+                </a:solidFill>
+                <a:latin typeface="Calibri" pitchFamily="34" charset="0"/>
+                <a:ea typeface="Calibri" pitchFamily="34" charset="-122"/>
+                <a:cs typeface="Calibri" pitchFamily="34" charset="-120"/>
+              </a:rPr>
+              <a:t>Same idea, different names</a:t>
+            </a:r>
+            <a:endParaRPr lang="en-US" sz="1300" dirty="0"/>
+          </a:p>
+        </p:txBody>
+      </p:sp>
+      <p:graphicFrame>
+        <p:nvGraphicFramePr>
+          <p:cNvPr id="2" name="!!codes"/>
+          <p:cNvGraphicFramePr>
+            <a:graphicFrameLocks noGrp="1"/>
+          </p:cNvGraphicFramePr>
+          <p:nvPr>
+            <p:extLst>
+              <p:ext uri="{D42A27DB-BD31-4B8C-83A1-F6EECF244321}">
+                <p14:modId xmlns:p14="http://schemas.microsoft.com/office/powerpoint/2010/main" val="1579011935"/>
+              </p:ext>
+            </p:extLst>
+          </p:nvPr>
+        </p:nvGraphicFramePr>
+        <p:xfrm>
+          <a:off x="5989320" y="1783080"/>
+          <a:ext cx="5788152" cy="914400"/>
+        </p:xfrm>
+        <a:graphic>
+          <a:graphicData uri="http://schemas.openxmlformats.org/drawingml/2006/table">
+            <a:tbl>
+              <a:tblPr/>
+              <a:tblGrid>
+                <a:gridCol w="1783080"/>
+                <a:gridCol w="1417320"/>
+                <a:gridCol w="1307592"/>
+                <a:gridCol w="1280160"/>
+              </a:tblGrid>
+              <a:tr h="347472">
+                <a:tc>
+                  <a:txBody>
+                    <a:bodyPr/>
+                    <a:lstStyle/>
+                    <a:p>
+                      <a:pPr indent="0" marL="0">
+                        <a:buNone/>
+                      </a:pPr>
+                      <a:r>
+                        <a:rPr lang="en-US" sz="1150" b="1" dirty="0">
+                          <a:solidFill>
+                            <a:srgbClr val="2C2C2A"/>
+                          </a:solidFill>
+                          <a:latin typeface="Calibri" pitchFamily="34" charset="0"/>
+                          <a:ea typeface="Calibri" pitchFamily="34" charset="-122"/>
+                          <a:cs typeface="Calibri" pitchFamily="34" charset="-120"/>
+                        </a:rPr>
+                        <a:t>What happened</a:t>
+                      </a:r>
+                      <a:endParaRPr lang="en-US" sz="1150" dirty="0">
+                        <a:latin typeface="Calibri" charset="0"/>
+                        <a:ea typeface="Calibri" charset="0"/>
+                        <a:cs typeface="Calibri" charset="0"/>
+                      </a:endParaRPr>
+                    </a:p>
+                  </a:txBody>
+                  <a:tcPr marL="76200" marR="76200" marT="25400" marB="25400" anchor="ctr">
+                    <a:lnL w="9525" cap="flat" cmpd="sng" algn="ctr">
+                      <a:solidFill>
+                        <a:srgbClr val="D3D1C7"/>
+                      </a:solidFill>
+                      <a:prstDash val="solid"/>
+                      <a:round/>
+                      <a:headEnd type="none" w="med" len="med"/>
+                      <a:tailEnd type="none" w="med" len="med"/>
+                    </a:lnL>
+                    <a:lnR w="9525" cap="flat" cmpd="sng" algn="ctr">
+                      <a:solidFill>
+                        <a:srgbClr val="D3D1C7"/>
+                      </a:solidFill>
+                      <a:prstDash val="solid"/>
+                      <a:round/>
+                      <a:headEnd type="none" w="med" len="med"/>
+                      <a:tailEnd type="none" w="med" len="med"/>
+                    </a:lnR>
+                    <a:lnT w="9525" cap="flat" cmpd="sng" algn="ctr">
+                      <a:solidFill>
+                        <a:srgbClr val="D3D1C7"/>
+                      </a:solidFill>
+                      <a:prstDash val="solid"/>
+                      <a:round/>
+                      <a:headEnd type="none" w="med" len="med"/>
+                      <a:tailEnd type="none" w="med" len="med"/>
+                    </a:lnT>
+                    <a:lnB w="9525" cap="flat" cmpd="sng" algn="ctr">
+                      <a:solidFill>
+                        <a:srgbClr val="D3D1C7"/>
+                      </a:solidFill>
+                      <a:prstDash val="solid"/>
+                      <a:round/>
+                      <a:headEnd type="none" w="med" len="med"/>
+                      <a:tailEnd type="none" w="med" len="med"/>
+                    </a:lnB>
+                    <a:solidFill>
+                      <a:srgbClr val="F1EFE8"/>
+                    </a:solidFill>
+                  </a:tcPr>
+                </a:tc>
+                <a:tc>
+                  <a:txBody>
+                    <a:bodyPr/>
+                    <a:lstStyle/>
+                    <a:p>
+                      <a:pPr indent="0" marL="0">
+                        <a:buNone/>
+                      </a:pPr>
+                      <a:r>
+                        <a:rPr lang="en-US" sz="1150" b="1" dirty="0">
+                          <a:solidFill>
+                            <a:srgbClr val="085041"/>
+                          </a:solidFill>
+                          <a:latin typeface="Calibri" pitchFamily="34" charset="0"/>
+                          <a:ea typeface="Calibri" pitchFamily="34" charset="-122"/>
+                          <a:cs typeface="Calibri" pitchFamily="34" charset="-120"/>
+                        </a:rPr>
+                        <a:t>Groq · OpenAI</a:t>
+                      </a:r>
+                      <a:endParaRPr lang="en-US" sz="1150" dirty="0">
+                        <a:latin typeface="Calibri" charset="0"/>
+                        <a:ea typeface="Calibri" charset="0"/>
+                        <a:cs typeface="Calibri" charset="0"/>
+                      </a:endParaRPr>
+                    </a:p>
+                  </a:txBody>
+                  <a:tcPr marL="76200" marR="76200" marT="25400" marB="25400" anchor="ctr">
+                    <a:lnL w="9525" cap="flat" cmpd="sng" algn="ctr">
+                      <a:solidFill>
+                        <a:srgbClr val="D3D1C7"/>
+                      </a:solidFill>
+                      <a:prstDash val="solid"/>
+                      <a:round/>
+                      <a:headEnd type="none" w="med" len="med"/>
+                      <a:tailEnd type="none" w="med" len="med"/>
+                    </a:lnL>
+                    <a:lnR w="9525" cap="flat" cmpd="sng" algn="ctr">
+                      <a:solidFill>
+                        <a:srgbClr val="D3D1C7"/>
+                      </a:solidFill>
+                      <a:prstDash val="solid"/>
+                      <a:round/>
+                      <a:headEnd type="none" w="med" len="med"/>
+                      <a:tailEnd type="none" w="med" len="med"/>
+                    </a:lnR>
+                    <a:lnT w="9525" cap="flat" cmpd="sng" algn="ctr">
+                      <a:solidFill>
+                        <a:srgbClr val="D3D1C7"/>
+                      </a:solidFill>
+                      <a:prstDash val="solid"/>
+                      <a:round/>
+                      <a:headEnd type="none" w="med" len="med"/>
+                      <a:tailEnd type="none" w="med" len="med"/>
+                    </a:lnT>
+                    <a:lnB w="9525" cap="flat" cmpd="sng" algn="ctr">
+                      <a:solidFill>
+                        <a:srgbClr val="D3D1C7"/>
+                      </a:solidFill>
+                      <a:prstDash val="solid"/>
+                      <a:round/>
+                      <a:headEnd type="none" w="med" len="med"/>
+                      <a:tailEnd type="none" w="med" len="med"/>
+                    </a:lnB>
+                    <a:solidFill>
+                      <a:srgbClr val="E1F5EE"/>
+                    </a:solidFill>
+                  </a:tcPr>
+                </a:tc>
+                <a:tc>
+                  <a:txBody>
+                    <a:bodyPr/>
+                    <a:lstStyle/>
+                    <a:p>
+                      <a:pPr indent="0" marL="0">
+                        <a:buNone/>
+                      </a:pPr>
+                      <a:r>
+                        <a:rPr lang="en-US" sz="1150" b="1" dirty="0">
+                          <a:solidFill>
+                            <a:srgbClr val="712B13"/>
+                          </a:solidFill>
+                          <a:latin typeface="Calibri" pitchFamily="34" charset="0"/>
+                          <a:ea typeface="Calibri" pitchFamily="34" charset="-122"/>
+                          <a:cs typeface="Calibri" pitchFamily="34" charset="-120"/>
+                        </a:rPr>
+                        <a:t>Anthropic</a:t>
+                      </a:r>
+                      <a:endParaRPr lang="en-US" sz="1150" dirty="0">
+                        <a:latin typeface="Calibri" charset="0"/>
+                        <a:ea typeface="Calibri" charset="0"/>
+                        <a:cs typeface="Calibri" charset="0"/>
+                      </a:endParaRPr>
+                    </a:p>
+                  </a:txBody>
+                  <a:tcPr marL="76200" marR="76200" marT="25400" marB="25400" anchor="ctr">
+                    <a:lnL w="9525" cap="flat" cmpd="sng" algn="ctr">
+                      <a:solidFill>
+                        <a:srgbClr val="D3D1C7"/>
+                      </a:solidFill>
+                      <a:prstDash val="solid"/>
+                      <a:round/>
+                      <a:headEnd type="none" w="med" len="med"/>
+                      <a:tailEnd type="none" w="med" len="med"/>
+                    </a:lnL>
+                    <a:lnR w="9525" cap="flat" cmpd="sng" algn="ctr">
+                      <a:solidFill>
+                        <a:srgbClr val="D3D1C7"/>
+                      </a:solidFill>
+                      <a:prstDash val="solid"/>
+                      <a:round/>
+                      <a:headEnd type="none" w="med" len="med"/>
+                      <a:tailEnd type="none" w="med" len="med"/>
+                    </a:lnR>
+                    <a:lnT w="9525" cap="flat" cmpd="sng" algn="ctr">
+                      <a:solidFill>
+                        <a:srgbClr val="D3D1C7"/>
+                      </a:solidFill>
+                      <a:prstDash val="solid"/>
+                      <a:round/>
+                      <a:headEnd type="none" w="med" len="med"/>
+                      <a:tailEnd type="none" w="med" len="med"/>
+                    </a:lnT>
+                    <a:lnB w="9525" cap="flat" cmpd="sng" algn="ctr">
+                      <a:solidFill>
+                        <a:srgbClr val="D3D1C7"/>
+                      </a:solidFill>
+                      <a:prstDash val="solid"/>
+                      <a:round/>
+                      <a:headEnd type="none" w="med" len="med"/>
+                      <a:tailEnd type="none" w="med" len="med"/>
+                    </a:lnB>
+                    <a:solidFill>
+                      <a:srgbClr val="FAECE7"/>
+                    </a:solidFill>
+                  </a:tcPr>
+                </a:tc>
+                <a:tc>
+                  <a:txBody>
+                    <a:bodyPr/>
+                    <a:lstStyle/>
+                    <a:p>
+                      <a:pPr indent="0" marL="0">
+                        <a:buNone/>
+                      </a:pPr>
+                      <a:r>
+                        <a:rPr lang="en-US" sz="1150" b="1" dirty="0">
+                          <a:solidFill>
+                            <a:srgbClr val="3C3489"/>
+                          </a:solidFill>
+                          <a:latin typeface="Calibri" pitchFamily="34" charset="0"/>
+                          <a:ea typeface="Calibri" pitchFamily="34" charset="-122"/>
+                          <a:cs typeface="Calibri" pitchFamily="34" charset="-120"/>
+                        </a:rPr>
+                        <a:t>Gemini</a:t>
+                      </a:r>
+                      <a:endParaRPr lang="en-US" sz="1150" dirty="0">
+                        <a:latin typeface="Calibri" charset="0"/>
+                        <a:ea typeface="Calibri" charset="0"/>
+                        <a:cs typeface="Calibri" charset="0"/>
+                      </a:endParaRPr>
+                    </a:p>
+                  </a:txBody>
+                  <a:tcPr marL="76200" marR="76200" marT="25400" marB="25400" anchor="ctr">
+                    <a:lnL w="9525" cap="flat" cmpd="sng" algn="ctr">
+                      <a:solidFill>
+                        <a:srgbClr val="D3D1C7"/>
+                      </a:solidFill>
+                      <a:prstDash val="solid"/>
+                      <a:round/>
+                      <a:headEnd type="none" w="med" len="med"/>
+                      <a:tailEnd type="none" w="med" len="med"/>
+                    </a:lnL>
+                    <a:lnR w="9525" cap="flat" cmpd="sng" algn="ctr">
+                      <a:solidFill>
+                        <a:srgbClr val="D3D1C7"/>
+                      </a:solidFill>
+                      <a:prstDash val="solid"/>
+                      <a:round/>
+                      <a:headEnd type="none" w="med" len="med"/>
+                      <a:tailEnd type="none" w="med" len="med"/>
+                    </a:lnR>
+                    <a:lnT w="9525" cap="flat" cmpd="sng" algn="ctr">
+                      <a:solidFill>
+                        <a:srgbClr val="D3D1C7"/>
+                      </a:solidFill>
+                      <a:prstDash val="solid"/>
+                      <a:round/>
+                      <a:headEnd type="none" w="med" len="med"/>
+                      <a:tailEnd type="none" w="med" len="med"/>
+                    </a:lnT>
+                    <a:lnB w="9525" cap="flat" cmpd="sng" algn="ctr">
+                      <a:solidFill>
+                        <a:srgbClr val="D3D1C7"/>
+                      </a:solidFill>
+                      <a:prstDash val="solid"/>
+                      <a:round/>
+                      <a:headEnd type="none" w="med" len="med"/>
+                      <a:tailEnd type="none" w="med" len="med"/>
+                    </a:lnB>
+                    <a:solidFill>
+                      <a:srgbClr val="EEEDFE"/>
+                    </a:solidFill>
+                  </a:tcPr>
+                </a:tc>
+              </a:tr>
+              <a:tr h="347472">
+                <a:tc>
+                  <a:txBody>
+                    <a:bodyPr/>
+                    <a:lstStyle/>
+                    <a:p>
+                      <a:pPr indent="0" marL="0">
+                        <a:buNone/>
+                      </a:pPr>
+                      <a:r>
+                        <a:rPr lang="en-US" sz="1150" b="1" dirty="0">
+                          <a:solidFill>
+                            <a:srgbClr val="2C2C2A"/>
+                          </a:solidFill>
+                          <a:latin typeface="Calibri" pitchFamily="34" charset="0"/>
+                          <a:ea typeface="Calibri" pitchFamily="34" charset="-122"/>
+                          <a:cs typeface="Calibri" pitchFamily="34" charset="-120"/>
+                        </a:rPr>
+                        <a:t>Field name</a:t>
+                      </a:r>
+                      <a:endParaRPr lang="en-US" sz="1150" dirty="0">
+                        <a:latin typeface="Calibri" charset="0"/>
+                        <a:ea typeface="Calibri" charset="0"/>
+                        <a:cs typeface="Calibri" charset="0"/>
+                      </a:endParaRPr>
+                    </a:p>
+                  </a:txBody>
+                  <a:tcPr marL="76200" marR="76200" marT="25400" marB="25400" anchor="ctr">
+                    <a:lnL w="9525" cap="flat" cmpd="sng" algn="ctr">
+                      <a:solidFill>
+                        <a:srgbClr val="D3D1C7"/>
+                      </a:solidFill>
+                      <a:prstDash val="solid"/>
+                      <a:round/>
+                      <a:headEnd type="none" w="med" len="med"/>
+                      <a:tailEnd type="none" w="med" len="med"/>
+                    </a:lnL>
+                    <a:lnR w="9525" cap="flat" cmpd="sng" algn="ctr">
+                      <a:solidFill>
+                        <a:srgbClr val="D3D1C7"/>
+                      </a:solidFill>
+                      <a:prstDash val="solid"/>
+                      <a:round/>
+                      <a:headEnd type="none" w="med" len="med"/>
+                      <a:tailEnd type="none" w="med" len="med"/>
+                    </a:lnR>
+                    <a:lnT w="9525" cap="flat" cmpd="sng" algn="ctr">
+                      <a:solidFill>
+                        <a:srgbClr val="D3D1C7"/>
+                      </a:solidFill>
+                      <a:prstDash val="solid"/>
+                      <a:round/>
+                      <a:headEnd type="none" w="med" len="med"/>
+                      <a:tailEnd type="none" w="med" len="med"/>
+                    </a:lnT>
+                    <a:lnB w="9525" cap="flat" cmpd="sng" algn="ctr">
+                      <a:solidFill>
+                        <a:srgbClr val="D3D1C7"/>
+                      </a:solidFill>
+                      <a:prstDash val="solid"/>
+                      <a:round/>
+                      <a:headEnd type="none" w="med" len="med"/>
+                      <a:tailEnd type="none" w="med" len="med"/>
+                    </a:lnB>
+                  </a:tcPr>
+                </a:tc>
+                <a:tc>
+                  <a:txBody>
+                    <a:bodyPr/>
+                    <a:lstStyle/>
+                    <a:p>
+                      <a:pPr indent="0" marL="0">
+                        <a:buNone/>
+                      </a:pPr>
+                      <a:r>
+                        <a:rPr lang="en-US" sz="1100" dirty="0">
+                          <a:solidFill>
+                            <a:srgbClr val="085041"/>
+                          </a:solidFill>
+                          <a:latin typeface="Consolas" pitchFamily="34" charset="0"/>
+                          <a:ea typeface="Consolas" pitchFamily="34" charset="-122"/>
+                          <a:cs typeface="Consolas" pitchFamily="34" charset="-120"/>
+                        </a:rPr>
+                        <a:t>finish_reason</a:t>
+                      </a:r>
+                      <a:endParaRPr lang="en-US" sz="1100" dirty="0">
+                        <a:latin typeface="Consolas" charset="0"/>
+                        <a:ea typeface="Consolas" charset="0"/>
+                        <a:cs typeface="Consolas" charset="0"/>
+                      </a:endParaRPr>
+                    </a:p>
+                  </a:txBody>
+                  <a:tcPr marL="76200" marR="76200" marT="25400" marB="25400" anchor="ctr">
+                    <a:lnL w="9525" cap="flat" cmpd="sng" algn="ctr">
+                      <a:solidFill>
+                        <a:srgbClr val="D3D1C7"/>
+                      </a:solidFill>
+                      <a:prstDash val="solid"/>
+                      <a:round/>
+                      <a:headEnd type="none" w="med" len="med"/>
+                      <a:tailEnd type="none" w="med" len="med"/>
+                    </a:lnL>
+                    <a:lnR w="9525" cap="flat" cmpd="sng" algn="ctr">
+                      <a:solidFill>
+                        <a:srgbClr val="D3D1C7"/>
+                      </a:solidFill>
+                      <a:prstDash val="solid"/>
+                      <a:round/>
+                      <a:headEnd type="none" w="med" len="med"/>
+                      <a:tailEnd type="none" w="med" len="med"/>
+                    </a:lnR>
+                    <a:lnT w="9525" cap="flat" cmpd="sng" algn="ctr">
+                      <a:solidFill>
+                        <a:srgbClr val="D3D1C7"/>
+                      </a:solidFill>
+                      <a:prstDash val="solid"/>
+                      <a:round/>
+                      <a:headEnd type="none" w="med" len="med"/>
+                      <a:tailEnd type="none" w="med" len="med"/>
+                    </a:lnT>
+                    <a:lnB w="9525" cap="flat" cmpd="sng" algn="ctr">
+                      <a:solidFill>
+                        <a:srgbClr val="D3D1C7"/>
+                      </a:solidFill>
+                      <a:prstDash val="solid"/>
+                      <a:round/>
+                      <a:headEnd type="none" w="med" len="med"/>
+                      <a:tailEnd type="none" w="med" len="med"/>
+                    </a:lnB>
+                  </a:tcPr>
+                </a:tc>
+                <a:tc>
+                  <a:txBody>
+                    <a:bodyPr/>
+                    <a:lstStyle/>
+                    <a:p>
+                      <a:pPr indent="0" marL="0">
+                        <a:buNone/>
+                      </a:pPr>
+                      <a:r>
+                        <a:rPr lang="en-US" sz="1100" dirty="0">
+                          <a:solidFill>
+                            <a:srgbClr val="712B13"/>
+                          </a:solidFill>
+                          <a:latin typeface="Consolas" pitchFamily="34" charset="0"/>
+                          <a:ea typeface="Consolas" pitchFamily="34" charset="-122"/>
+                          <a:cs typeface="Consolas" pitchFamily="34" charset="-120"/>
+                        </a:rPr>
+                        <a:t>stop_reason</a:t>
+                      </a:r>
+                      <a:endParaRPr lang="en-US" sz="1100" dirty="0">
+                        <a:latin typeface="Consolas" charset="0"/>
+                        <a:ea typeface="Consolas" charset="0"/>
+                        <a:cs typeface="Consolas" charset="0"/>
+                      </a:endParaRPr>
+                    </a:p>
+                  </a:txBody>
+                  <a:tcPr marL="76200" marR="76200" marT="25400" marB="25400" anchor="ctr">
+                    <a:lnL w="9525" cap="flat" cmpd="sng" algn="ctr">
+                      <a:solidFill>
+                        <a:srgbClr val="D3D1C7"/>
+                      </a:solidFill>
+                      <a:prstDash val="solid"/>
+                      <a:round/>
+                      <a:headEnd type="none" w="med" len="med"/>
+                      <a:tailEnd type="none" w="med" len="med"/>
+                    </a:lnL>
+                    <a:lnR w="9525" cap="flat" cmpd="sng" algn="ctr">
+                      <a:solidFill>
+                        <a:srgbClr val="D3D1C7"/>
+                      </a:solidFill>
+                      <a:prstDash val="solid"/>
+                      <a:round/>
+                      <a:headEnd type="none" w="med" len="med"/>
+                      <a:tailEnd type="none" w="med" len="med"/>
+                    </a:lnR>
+                    <a:lnT w="9525" cap="flat" cmpd="sng" algn="ctr">
+                      <a:solidFill>
+                        <a:srgbClr val="D3D1C7"/>
+                      </a:solidFill>
+                      <a:prstDash val="solid"/>
+                      <a:round/>
+                      <a:headEnd type="none" w="med" len="med"/>
+                      <a:tailEnd type="none" w="med" len="med"/>
+                    </a:lnT>
+                    <a:lnB w="9525" cap="flat" cmpd="sng" algn="ctr">
+                      <a:solidFill>
+                        <a:srgbClr val="D3D1C7"/>
+                      </a:solidFill>
+                      <a:prstDash val="solid"/>
+                      <a:round/>
+                      <a:headEnd type="none" w="med" len="med"/>
+                      <a:tailEnd type="none" w="med" len="med"/>
+                    </a:lnB>
+                  </a:tcPr>
+                </a:tc>
+                <a:tc>
+                  <a:txBody>
+                    <a:bodyPr/>
+                    <a:lstStyle/>
+                    <a:p>
+                      <a:pPr indent="0" marL="0">
+                        <a:buNone/>
+                      </a:pPr>
+                      <a:r>
+                        <a:rPr lang="en-US" sz="1100" dirty="0">
+                          <a:solidFill>
+                            <a:srgbClr val="3C3489"/>
+                          </a:solidFill>
+                          <a:latin typeface="Consolas" pitchFamily="34" charset="0"/>
+                          <a:ea typeface="Consolas" pitchFamily="34" charset="-122"/>
+                          <a:cs typeface="Consolas" pitchFamily="34" charset="-120"/>
+                        </a:rPr>
+                        <a:t>finishReason</a:t>
+                      </a:r>
+                      <a:endParaRPr lang="en-US" sz="1100" dirty="0">
+                        <a:latin typeface="Consolas" charset="0"/>
+                        <a:ea typeface="Consolas" charset="0"/>
+                        <a:cs typeface="Consolas" charset="0"/>
+                      </a:endParaRPr>
+                    </a:p>
+                  </a:txBody>
+                  <a:tcPr marL="76200" marR="76200" marT="25400" marB="25400" anchor="ctr">
+                    <a:lnL w="9525" cap="flat" cmpd="sng" algn="ctr">
+                      <a:solidFill>
+                        <a:srgbClr val="D3D1C7"/>
+                      </a:solidFill>
+                      <a:prstDash val="solid"/>
+                      <a:round/>
+                      <a:headEnd type="none" w="med" len="med"/>
+                      <a:tailEnd type="none" w="med" len="med"/>
+                    </a:lnL>
+                    <a:lnR w="9525" cap="flat" cmpd="sng" algn="ctr">
+                      <a:solidFill>
+                        <a:srgbClr val="D3D1C7"/>
+                      </a:solidFill>
+                      <a:prstDash val="solid"/>
+                      <a:round/>
+                      <a:headEnd type="none" w="med" len="med"/>
+                      <a:tailEnd type="none" w="med" len="med"/>
+                    </a:lnR>
+                    <a:lnT w="9525" cap="flat" cmpd="sng" algn="ctr">
+                      <a:solidFill>
+                        <a:srgbClr val="D3D1C7"/>
+                      </a:solidFill>
+                      <a:prstDash val="solid"/>
+                      <a:round/>
+                      <a:headEnd type="none" w="med" len="med"/>
+                      <a:tailEnd type="none" w="med" len="med"/>
+                    </a:lnT>
+                    <a:lnB w="9525" cap="flat" cmpd="sng" algn="ctr">
+                      <a:solidFill>
+                        <a:srgbClr val="D3D1C7"/>
+                      </a:solidFill>
+                      <a:prstDash val="solid"/>
+                      <a:round/>
+                      <a:headEnd type="none" w="med" len="med"/>
+                      <a:tailEnd type="none" w="med" len="med"/>
+                    </a:lnB>
+                  </a:tcPr>
+                </a:tc>
+              </a:tr>
+              <a:tr h="347472">
+                <a:tc>
+                  <a:txBody>
+                    <a:bodyPr/>
+                    <a:lstStyle/>
+                    <a:p>
+                      <a:pPr indent="0" marL="0">
+                        <a:buNone/>
+                      </a:pPr>
+                      <a:r>
+                        <a:rPr lang="en-US" sz="1150" dirty="0">
+                          <a:solidFill>
+                            <a:srgbClr val="2C2C2A"/>
+                          </a:solidFill>
+                          <a:latin typeface="Calibri" pitchFamily="34" charset="0"/>
+                          <a:ea typeface="Calibri" pitchFamily="34" charset="-122"/>
+                          <a:cs typeface="Calibri" pitchFamily="34" charset="-120"/>
+                        </a:rPr>
+                        <a:t>Finished the answer</a:t>
+                      </a:r>
+                      <a:endParaRPr lang="en-US" sz="1150" dirty="0">
+                        <a:latin typeface="Calibri" charset="0"/>
+                        <a:ea typeface="Calibri" charset="0"/>
+                        <a:cs typeface="Calibri" charset="0"/>
+                      </a:endParaRPr>
+                    </a:p>
+                  </a:txBody>
+                  <a:tcPr marL="76200" marR="76200" marT="25400" marB="25400" anchor="ctr">
+                    <a:lnL w="9525" cap="flat" cmpd="sng" algn="ctr">
+                      <a:solidFill>
+                        <a:srgbClr val="D3D1C7"/>
+                      </a:solidFill>
+                      <a:prstDash val="solid"/>
+                      <a:round/>
+                      <a:headEnd type="none" w="med" len="med"/>
+                      <a:tailEnd type="none" w="med" len="med"/>
+                    </a:lnL>
+                    <a:lnR w="9525" cap="flat" cmpd="sng" algn="ctr">
+                      <a:solidFill>
+                        <a:srgbClr val="D3D1C7"/>
+                      </a:solidFill>
+                      <a:prstDash val="solid"/>
+                      <a:round/>
+                      <a:headEnd type="none" w="med" len="med"/>
+                      <a:tailEnd type="none" w="med" len="med"/>
+                    </a:lnR>
+                    <a:lnT w="9525" cap="flat" cmpd="sng" algn="ctr">
+                      <a:solidFill>
+                        <a:srgbClr val="D3D1C7"/>
+                      </a:solidFill>
+                      <a:prstDash val="solid"/>
+                      <a:round/>
+                      <a:headEnd type="none" w="med" len="med"/>
+                      <a:tailEnd type="none" w="med" len="med"/>
+                    </a:lnT>
+                    <a:lnB w="9525" cap="flat" cmpd="sng" algn="ctr">
+                      <a:solidFill>
+                        <a:srgbClr val="D3D1C7"/>
+                      </a:solidFill>
+                      <a:prstDash val="solid"/>
+                      <a:round/>
+                      <a:headEnd type="none" w="med" len="med"/>
+                      <a:tailEnd type="none" w="med" len="med"/>
+                    </a:lnB>
+                  </a:tcPr>
+                </a:tc>
+                <a:tc>
+                  <a:txBody>
+                    <a:bodyPr/>
+                    <a:lstStyle/>
+                    <a:p>
+                      <a:pPr indent="0" marL="0">
+                        <a:buNone/>
+                      </a:pPr>
+                      <a:r>
+                        <a:rPr lang="en-US" sz="1100" dirty="0">
+                          <a:solidFill>
+                            <a:srgbClr val="2C2C2A"/>
+                          </a:solidFill>
+                          <a:latin typeface="Consolas" pitchFamily="34" charset="0"/>
+                          <a:ea typeface="Consolas" pitchFamily="34" charset="-122"/>
+                          <a:cs typeface="Consolas" pitchFamily="34" charset="-120"/>
+                        </a:rPr>
+                        <a:t>stop</a:t>
+                      </a:r>
+                      <a:endParaRPr lang="en-US" sz="1100" dirty="0">
+                        <a:latin typeface="Consolas" charset="0"/>
+                        <a:ea typeface="Consolas" charset="0"/>
+                        <a:cs typeface="Consolas" charset="0"/>
+                      </a:endParaRPr>
+                    </a:p>
+                  </a:txBody>
+                  <a:tcPr marL="76200" marR="76200" marT="25400" marB="25400" anchor="ctr">
+                    <a:lnL w="9525" cap="flat" cmpd="sng" algn="ctr">
+                      <a:solidFill>
+                        <a:srgbClr val="D3D1C7"/>
+                      </a:solidFill>
+                      <a:prstDash val="solid"/>
+                      <a:round/>
+                      <a:headEnd type="none" w="med" len="med"/>
+                      <a:tailEnd type="none" w="med" len="med"/>
+                    </a:lnL>
+                    <a:lnR w="9525" cap="flat" cmpd="sng" algn="ctr">
+                      <a:solidFill>
+                        <a:srgbClr val="D3D1C7"/>
+                      </a:solidFill>
+                      <a:prstDash val="solid"/>
+                      <a:round/>
+                      <a:headEnd type="none" w="med" len="med"/>
+                      <a:tailEnd type="none" w="med" len="med"/>
+                    </a:lnR>
+                    <a:lnT w="9525" cap="flat" cmpd="sng" algn="ctr">
+                      <a:solidFill>
+                        <a:srgbClr val="D3D1C7"/>
+                      </a:solidFill>
+                      <a:prstDash val="solid"/>
+                      <a:round/>
+                      <a:headEnd type="none" w="med" len="med"/>
+                      <a:tailEnd type="none" w="med" len="med"/>
+                    </a:lnT>
+                    <a:lnB w="9525" cap="flat" cmpd="sng" algn="ctr">
+                      <a:solidFill>
+                        <a:srgbClr val="D3D1C7"/>
+                      </a:solidFill>
+                      <a:prstDash val="solid"/>
+                      <a:round/>
+                      <a:headEnd type="none" w="med" len="med"/>
+                      <a:tailEnd type="none" w="med" len="med"/>
+                    </a:lnB>
+                  </a:tcPr>
+                </a:tc>
+                <a:tc>
+                  <a:txBody>
+                    <a:bodyPr/>
+                    <a:lstStyle/>
+                    <a:p>
+                      <a:pPr indent="0" marL="0">
+                        <a:buNone/>
+                      </a:pPr>
+                      <a:r>
+                        <a:rPr lang="en-US" sz="1100" dirty="0">
+                          <a:solidFill>
+                            <a:srgbClr val="2C2C2A"/>
+                          </a:solidFill>
+                          <a:latin typeface="Consolas" pitchFamily="34" charset="0"/>
+                          <a:ea typeface="Consolas" pitchFamily="34" charset="-122"/>
+                          <a:cs typeface="Consolas" pitchFamily="34" charset="-120"/>
+                        </a:rPr>
+                        <a:t>end_turn</a:t>
+                      </a:r>
+                      <a:endParaRPr lang="en-US" sz="1100" dirty="0">
+                        <a:latin typeface="Consolas" charset="0"/>
+                        <a:ea typeface="Consolas" charset="0"/>
+                        <a:cs typeface="Consolas" charset="0"/>
+                      </a:endParaRPr>
+                    </a:p>
+                  </a:txBody>
+                  <a:tcPr marL="76200" marR="76200" marT="25400" marB="25400" anchor="ctr">
+                    <a:lnL w="9525" cap="flat" cmpd="sng" algn="ctr">
+                      <a:solidFill>
+                        <a:srgbClr val="D3D1C7"/>
+                      </a:solidFill>
+                      <a:prstDash val="solid"/>
+                      <a:round/>
+                      <a:headEnd type="none" w="med" len="med"/>
+                      <a:tailEnd type="none" w="med" len="med"/>
+                    </a:lnL>
+                    <a:lnR w="9525" cap="flat" cmpd="sng" algn="ctr">
+                      <a:solidFill>
+                        <a:srgbClr val="D3D1C7"/>
+                      </a:solidFill>
+                      <a:prstDash val="solid"/>
+                      <a:round/>
+                      <a:headEnd type="none" w="med" len="med"/>
+                      <a:tailEnd type="none" w="med" len="med"/>
+                    </a:lnR>
+                    <a:lnT w="9525" cap="flat" cmpd="sng" algn="ctr">
+                      <a:solidFill>
+                        <a:srgbClr val="D3D1C7"/>
+                      </a:solidFill>
+                      <a:prstDash val="solid"/>
+                      <a:round/>
+                      <a:headEnd type="none" w="med" len="med"/>
+                      <a:tailEnd type="none" w="med" len="med"/>
+                    </a:lnT>
+                    <a:lnB w="9525" cap="flat" cmpd="sng" algn="ctr">
+                      <a:solidFill>
+                        <a:srgbClr val="D3D1C7"/>
+                      </a:solidFill>
+                      <a:prstDash val="solid"/>
+                      <a:round/>
+                      <a:headEnd type="none" w="med" len="med"/>
+                      <a:tailEnd type="none" w="med" len="med"/>
+                    </a:lnB>
+                  </a:tcPr>
+                </a:tc>
+                <a:tc>
+                  <a:txBody>
+                    <a:bodyPr/>
+                    <a:lstStyle/>
+                    <a:p>
+                      <a:pPr indent="0" marL="0">
+                        <a:buNone/>
+                      </a:pPr>
+                      <a:r>
+                        <a:rPr lang="en-US" sz="1100" dirty="0">
+                          <a:solidFill>
+                            <a:srgbClr val="2C2C2A"/>
+                          </a:solidFill>
+                          <a:latin typeface="Consolas" pitchFamily="34" charset="0"/>
+                          <a:ea typeface="Consolas" pitchFamily="34" charset="-122"/>
+                          <a:cs typeface="Consolas" pitchFamily="34" charset="-120"/>
+                        </a:rPr>
+                        <a:t>STOP</a:t>
+                      </a:r>
+                      <a:endParaRPr lang="en-US" sz="1100" dirty="0">
+                        <a:latin typeface="Consolas" charset="0"/>
+                        <a:ea typeface="Consolas" charset="0"/>
+                        <a:cs typeface="Consolas" charset="0"/>
+                      </a:endParaRPr>
+                    </a:p>
+                  </a:txBody>
+                  <a:tcPr marL="76200" marR="76200" marT="25400" marB="25400" anchor="ctr">
+                    <a:lnL w="9525" cap="flat" cmpd="sng" algn="ctr">
+                      <a:solidFill>
+                        <a:srgbClr val="D3D1C7"/>
+                      </a:solidFill>
+                      <a:prstDash val="solid"/>
+                      <a:round/>
+                      <a:headEnd type="none" w="med" len="med"/>
+                      <a:tailEnd type="none" w="med" len="med"/>
+                    </a:lnL>
+                    <a:lnR w="9525" cap="flat" cmpd="sng" algn="ctr">
+                      <a:solidFill>
+                        <a:srgbClr val="D3D1C7"/>
+                      </a:solidFill>
+                      <a:prstDash val="solid"/>
+                      <a:round/>
+                      <a:headEnd type="none" w="med" len="med"/>
+                      <a:tailEnd type="none" w="med" len="med"/>
+                    </a:lnR>
+                    <a:lnT w="9525" cap="flat" cmpd="sng" algn="ctr">
+                      <a:solidFill>
+                        <a:srgbClr val="D3D1C7"/>
+                      </a:solidFill>
+                      <a:prstDash val="solid"/>
+                      <a:round/>
+                      <a:headEnd type="none" w="med" len="med"/>
+                      <a:tailEnd type="none" w="med" len="med"/>
+                    </a:lnT>
+                    <a:lnB w="9525" cap="flat" cmpd="sng" algn="ctr">
+                      <a:solidFill>
+                        <a:srgbClr val="D3D1C7"/>
+                      </a:solidFill>
+                      <a:prstDash val="solid"/>
+                      <a:round/>
+                      <a:headEnd type="none" w="med" len="med"/>
+                      <a:tailEnd type="none" w="med" len="med"/>
+                    </a:lnB>
+                  </a:tcPr>
+                </a:tc>
+              </a:tr>
+              <a:tr h="347472">
+                <a:tc>
+                  <a:txBody>
+                    <a:bodyPr/>
+                    <a:lstStyle/>
+                    <a:p>
+                      <a:pPr indent="0" marL="0">
+                        <a:buNone/>
+                      </a:pPr>
+                      <a:r>
+                        <a:rPr lang="en-US" sz="1150" dirty="0">
+                          <a:solidFill>
+                            <a:srgbClr val="2C2C2A"/>
+                          </a:solidFill>
+                          <a:latin typeface="Calibri" pitchFamily="34" charset="0"/>
+                          <a:ea typeface="Calibri" pitchFamily="34" charset="-122"/>
+                          <a:cs typeface="Calibri" pitchFamily="34" charset="-120"/>
+                        </a:rPr>
+                        <a:t>Wants a tool</a:t>
+                      </a:r>
+                      <a:endParaRPr lang="en-US" sz="1150" dirty="0">
+                        <a:latin typeface="Calibri" charset="0"/>
+                        <a:ea typeface="Calibri" charset="0"/>
+                        <a:cs typeface="Calibri" charset="0"/>
+                      </a:endParaRPr>
+                    </a:p>
+                  </a:txBody>
+                  <a:tcPr marL="76200" marR="76200" marT="25400" marB="25400" anchor="ctr">
+                    <a:lnL w="9525" cap="flat" cmpd="sng" algn="ctr">
+                      <a:solidFill>
+                        <a:srgbClr val="D3D1C7"/>
+                      </a:solidFill>
+                      <a:prstDash val="solid"/>
+                      <a:round/>
+                      <a:headEnd type="none" w="med" len="med"/>
+                      <a:tailEnd type="none" w="med" len="med"/>
+                    </a:lnL>
+                    <a:lnR w="9525" cap="flat" cmpd="sng" algn="ctr">
+                      <a:solidFill>
+                        <a:srgbClr val="D3D1C7"/>
+                      </a:solidFill>
+                      <a:prstDash val="solid"/>
+                      <a:round/>
+                      <a:headEnd type="none" w="med" len="med"/>
+                      <a:tailEnd type="none" w="med" len="med"/>
+                    </a:lnR>
+                    <a:lnT w="9525" cap="flat" cmpd="sng" algn="ctr">
+                      <a:solidFill>
+                        <a:srgbClr val="D3D1C7"/>
+                      </a:solidFill>
+                      <a:prstDash val="solid"/>
+                      <a:round/>
+                      <a:headEnd type="none" w="med" len="med"/>
+                      <a:tailEnd type="none" w="med" len="med"/>
+                    </a:lnT>
+                    <a:lnB w="9525" cap="flat" cmpd="sng" algn="ctr">
+                      <a:solidFill>
+                        <a:srgbClr val="D3D1C7"/>
+                      </a:solidFill>
+                      <a:prstDash val="solid"/>
+                      <a:round/>
+                      <a:headEnd type="none" w="med" len="med"/>
+                      <a:tailEnd type="none" w="med" len="med"/>
+                    </a:lnB>
+                  </a:tcPr>
+                </a:tc>
+                <a:tc>
+                  <a:txBody>
+                    <a:bodyPr/>
+                    <a:lstStyle/>
+                    <a:p>
+                      <a:pPr indent="0" marL="0">
+                        <a:buNone/>
+                      </a:pPr>
+                      <a:r>
+                        <a:rPr lang="en-US" sz="1100" dirty="0">
+                          <a:solidFill>
+                            <a:srgbClr val="2C2C2A"/>
+                          </a:solidFill>
+                          <a:latin typeface="Consolas" pitchFamily="34" charset="0"/>
+                          <a:ea typeface="Consolas" pitchFamily="34" charset="-122"/>
+                          <a:cs typeface="Consolas" pitchFamily="34" charset="-120"/>
+                        </a:rPr>
+                        <a:t>tool_calls</a:t>
+                      </a:r>
+                      <a:endParaRPr lang="en-US" sz="1100" dirty="0">
+                        <a:latin typeface="Consolas" charset="0"/>
+                        <a:ea typeface="Consolas" charset="0"/>
+                        <a:cs typeface="Consolas" charset="0"/>
+                      </a:endParaRPr>
+                    </a:p>
+                  </a:txBody>
+                  <a:tcPr marL="76200" marR="76200" marT="25400" marB="25400" anchor="ctr">
+                    <a:lnL w="9525" cap="flat" cmpd="sng" algn="ctr">
+                      <a:solidFill>
+                        <a:srgbClr val="D3D1C7"/>
+                      </a:solidFill>
+                      <a:prstDash val="solid"/>
+                      <a:round/>
+                      <a:headEnd type="none" w="med" len="med"/>
+                      <a:tailEnd type="none" w="med" len="med"/>
+                    </a:lnL>
+                    <a:lnR w="9525" cap="flat" cmpd="sng" algn="ctr">
+                      <a:solidFill>
+                        <a:srgbClr val="D3D1C7"/>
+                      </a:solidFill>
+                      <a:prstDash val="solid"/>
+                      <a:round/>
+                      <a:headEnd type="none" w="med" len="med"/>
+                      <a:tailEnd type="none" w="med" len="med"/>
+                    </a:lnR>
+                    <a:lnT w="9525" cap="flat" cmpd="sng" algn="ctr">
+                      <a:solidFill>
+                        <a:srgbClr val="D3D1C7"/>
+                      </a:solidFill>
+                      <a:prstDash val="solid"/>
+                      <a:round/>
+                      <a:headEnd type="none" w="med" len="med"/>
+                      <a:tailEnd type="none" w="med" len="med"/>
+                    </a:lnT>
+                    <a:lnB w="9525" cap="flat" cmpd="sng" algn="ctr">
+                      <a:solidFill>
+                        <a:srgbClr val="D3D1C7"/>
+                      </a:solidFill>
+                      <a:prstDash val="solid"/>
+                      <a:round/>
+                      <a:headEnd type="none" w="med" len="med"/>
+                      <a:tailEnd type="none" w="med" len="med"/>
+                    </a:lnB>
+                  </a:tcPr>
+                </a:tc>
+                <a:tc>
+                  <a:txBody>
+                    <a:bodyPr/>
+                    <a:lstStyle/>
+                    <a:p>
+                      <a:pPr indent="0" marL="0">
+                        <a:buNone/>
+                      </a:pPr>
+                      <a:r>
+                        <a:rPr lang="en-US" sz="1100" dirty="0">
+                          <a:solidFill>
+                            <a:srgbClr val="2C2C2A"/>
+                          </a:solidFill>
+                          <a:latin typeface="Consolas" pitchFamily="34" charset="0"/>
+                          <a:ea typeface="Consolas" pitchFamily="34" charset="-122"/>
+                          <a:cs typeface="Consolas" pitchFamily="34" charset="-120"/>
+                        </a:rPr>
+                        <a:t>tool_use</a:t>
+                      </a:r>
+                      <a:endParaRPr lang="en-US" sz="1100" dirty="0">
+                        <a:latin typeface="Consolas" charset="0"/>
+                        <a:ea typeface="Consolas" charset="0"/>
+                        <a:cs typeface="Consolas" charset="0"/>
+                      </a:endParaRPr>
+                    </a:p>
+                  </a:txBody>
+                  <a:tcPr marL="76200" marR="76200" marT="25400" marB="25400" anchor="ctr">
+                    <a:lnL w="9525" cap="flat" cmpd="sng" algn="ctr">
+                      <a:solidFill>
+                        <a:srgbClr val="D3D1C7"/>
+                      </a:solidFill>
+                      <a:prstDash val="solid"/>
+                      <a:round/>
+                      <a:headEnd type="none" w="med" len="med"/>
+                      <a:tailEnd type="none" w="med" len="med"/>
+                    </a:lnL>
+                    <a:lnR w="9525" cap="flat" cmpd="sng" algn="ctr">
+                      <a:solidFill>
+                        <a:srgbClr val="D3D1C7"/>
+                      </a:solidFill>
+                      <a:prstDash val="solid"/>
+                      <a:round/>
+                      <a:headEnd type="none" w="med" len="med"/>
+                      <a:tailEnd type="none" w="med" len="med"/>
+                    </a:lnR>
+                    <a:lnT w="9525" cap="flat" cmpd="sng" algn="ctr">
+                      <a:solidFill>
+                        <a:srgbClr val="D3D1C7"/>
+                      </a:solidFill>
+                      <a:prstDash val="solid"/>
+                      <a:round/>
+                      <a:headEnd type="none" w="med" len="med"/>
+                      <a:tailEnd type="none" w="med" len="med"/>
+                    </a:lnT>
+                    <a:lnB w="9525" cap="flat" cmpd="sng" algn="ctr">
+                      <a:solidFill>
+                        <a:srgbClr val="D3D1C7"/>
+                      </a:solidFill>
+                      <a:prstDash val="solid"/>
+                      <a:round/>
+                      <a:headEnd type="none" w="med" len="med"/>
+                      <a:tailEnd type="none" w="med" len="med"/>
+                    </a:lnB>
+                  </a:tcPr>
+                </a:tc>
+                <a:tc>
+                  <a:txBody>
+                    <a:bodyPr/>
+                    <a:lstStyle/>
+                    <a:p>
+                      <a:pPr indent="0" marL="0">
+                        <a:buNone/>
+                      </a:pPr>
+                      <a:r>
+                        <a:rPr lang="en-US" sz="1100" dirty="0">
+                          <a:solidFill>
+                            <a:srgbClr val="2C2C2A"/>
+                          </a:solidFill>
+                          <a:latin typeface="Consolas" pitchFamily="34" charset="0"/>
+                          <a:ea typeface="Consolas" pitchFamily="34" charset="-122"/>
+                          <a:cs typeface="Consolas" pitchFamily="34" charset="-120"/>
+                        </a:rPr>
+                        <a:t>STOP *</a:t>
+                      </a:r>
+                      <a:endParaRPr lang="en-US" sz="1100" dirty="0">
+                        <a:latin typeface="Consolas" charset="0"/>
+                        <a:ea typeface="Consolas" charset="0"/>
+                        <a:cs typeface="Consolas" charset="0"/>
+                      </a:endParaRPr>
+                    </a:p>
+                  </a:txBody>
+                  <a:tcPr marL="76200" marR="76200" marT="25400" marB="25400" anchor="ctr">
+                    <a:lnL w="9525" cap="flat" cmpd="sng" algn="ctr">
+                      <a:solidFill>
+                        <a:srgbClr val="D3D1C7"/>
+                      </a:solidFill>
+                      <a:prstDash val="solid"/>
+                      <a:round/>
+                      <a:headEnd type="none" w="med" len="med"/>
+                      <a:tailEnd type="none" w="med" len="med"/>
+                    </a:lnL>
+                    <a:lnR w="9525" cap="flat" cmpd="sng" algn="ctr">
+                      <a:solidFill>
+                        <a:srgbClr val="D3D1C7"/>
+                      </a:solidFill>
+                      <a:prstDash val="solid"/>
+                      <a:round/>
+                      <a:headEnd type="none" w="med" len="med"/>
+                      <a:tailEnd type="none" w="med" len="med"/>
+                    </a:lnR>
+                    <a:lnT w="9525" cap="flat" cmpd="sng" algn="ctr">
+                      <a:solidFill>
+                        <a:srgbClr val="D3D1C7"/>
+                      </a:solidFill>
+                      <a:prstDash val="solid"/>
+                      <a:round/>
+                      <a:headEnd type="none" w="med" len="med"/>
+                      <a:tailEnd type="none" w="med" len="med"/>
+                    </a:lnT>
+                    <a:lnB w="9525" cap="flat" cmpd="sng" algn="ctr">
+                      <a:solidFill>
+                        <a:srgbClr val="D3D1C7"/>
+                      </a:solidFill>
+                      <a:prstDash val="solid"/>
+                      <a:round/>
+                      <a:headEnd type="none" w="med" len="med"/>
+                      <a:tailEnd type="none" w="med" len="med"/>
+                    </a:lnB>
+                  </a:tcPr>
+                </a:tc>
+              </a:tr>
+              <a:tr h="347472">
+                <a:tc>
+                  <a:txBody>
+                    <a:bodyPr/>
+                    <a:lstStyle/>
+                    <a:p>
+                      <a:pPr indent="0" marL="0">
+                        <a:buNone/>
+                      </a:pPr>
+                      <a:r>
+                        <a:rPr lang="en-US" sz="1150" dirty="0">
+                          <a:solidFill>
+                            <a:srgbClr val="2C2C2A"/>
+                          </a:solidFill>
+                          <a:latin typeface="Calibri" pitchFamily="34" charset="0"/>
+                          <a:ea typeface="Calibri" pitchFamily="34" charset="-122"/>
+                          <a:cs typeface="Calibri" pitchFamily="34" charset="-120"/>
+                        </a:rPr>
+                        <a:t>Cut off (token limit)</a:t>
+                      </a:r>
+                      <a:endParaRPr lang="en-US" sz="1150" dirty="0">
+                        <a:latin typeface="Calibri" charset="0"/>
+                        <a:ea typeface="Calibri" charset="0"/>
+                        <a:cs typeface="Calibri" charset="0"/>
+                      </a:endParaRPr>
+                    </a:p>
+                  </a:txBody>
+                  <a:tcPr marL="76200" marR="76200" marT="25400" marB="25400" anchor="ctr">
+                    <a:lnL w="9525" cap="flat" cmpd="sng" algn="ctr">
+                      <a:solidFill>
+                        <a:srgbClr val="D3D1C7"/>
+                      </a:solidFill>
+                      <a:prstDash val="solid"/>
+                      <a:round/>
+                      <a:headEnd type="none" w="med" len="med"/>
+                      <a:tailEnd type="none" w="med" len="med"/>
+                    </a:lnL>
+                    <a:lnR w="9525" cap="flat" cmpd="sng" algn="ctr">
+                      <a:solidFill>
+                        <a:srgbClr val="D3D1C7"/>
+                      </a:solidFill>
+                      <a:prstDash val="solid"/>
+                      <a:round/>
+                      <a:headEnd type="none" w="med" len="med"/>
+                      <a:tailEnd type="none" w="med" len="med"/>
+                    </a:lnR>
+                    <a:lnT w="9525" cap="flat" cmpd="sng" algn="ctr">
+                      <a:solidFill>
+                        <a:srgbClr val="D3D1C7"/>
+                      </a:solidFill>
+                      <a:prstDash val="solid"/>
+                      <a:round/>
+                      <a:headEnd type="none" w="med" len="med"/>
+                      <a:tailEnd type="none" w="med" len="med"/>
+                    </a:lnT>
+                    <a:lnB w="9525" cap="flat" cmpd="sng" algn="ctr">
+                      <a:solidFill>
+                        <a:srgbClr val="D3D1C7"/>
+                      </a:solidFill>
+                      <a:prstDash val="solid"/>
+                      <a:round/>
+                      <a:headEnd type="none" w="med" len="med"/>
+                      <a:tailEnd type="none" w="med" len="med"/>
+                    </a:lnB>
+                  </a:tcPr>
+                </a:tc>
+                <a:tc>
+                  <a:txBody>
+                    <a:bodyPr/>
+                    <a:lstStyle/>
+                    <a:p>
+                      <a:pPr indent="0" marL="0">
+                        <a:buNone/>
+                      </a:pPr>
+                      <a:r>
+                        <a:rPr lang="en-US" sz="1100" dirty="0">
+                          <a:solidFill>
+                            <a:srgbClr val="2C2C2A"/>
+                          </a:solidFill>
+                          <a:latin typeface="Consolas" pitchFamily="34" charset="0"/>
+                          <a:ea typeface="Consolas" pitchFamily="34" charset="-122"/>
+                          <a:cs typeface="Consolas" pitchFamily="34" charset="-120"/>
+                        </a:rPr>
+                        <a:t>length</a:t>
+                      </a:r>
+                      <a:endParaRPr lang="en-US" sz="1100" dirty="0">
+                        <a:latin typeface="Consolas" charset="0"/>
+                        <a:ea typeface="Consolas" charset="0"/>
+                        <a:cs typeface="Consolas" charset="0"/>
+                      </a:endParaRPr>
+                    </a:p>
+                  </a:txBody>
+                  <a:tcPr marL="76200" marR="76200" marT="25400" marB="25400" anchor="ctr">
+                    <a:lnL w="9525" cap="flat" cmpd="sng" algn="ctr">
+                      <a:solidFill>
+                        <a:srgbClr val="D3D1C7"/>
+                      </a:solidFill>
+                      <a:prstDash val="solid"/>
+                      <a:round/>
+                      <a:headEnd type="none" w="med" len="med"/>
+                      <a:tailEnd type="none" w="med" len="med"/>
+                    </a:lnL>
+                    <a:lnR w="9525" cap="flat" cmpd="sng" algn="ctr">
+                      <a:solidFill>
+                        <a:srgbClr val="D3D1C7"/>
+                      </a:solidFill>
+                      <a:prstDash val="solid"/>
+                      <a:round/>
+                      <a:headEnd type="none" w="med" len="med"/>
+                      <a:tailEnd type="none" w="med" len="med"/>
+                    </a:lnR>
+                    <a:lnT w="9525" cap="flat" cmpd="sng" algn="ctr">
+                      <a:solidFill>
+                        <a:srgbClr val="D3D1C7"/>
+                      </a:solidFill>
+                      <a:prstDash val="solid"/>
+                      <a:round/>
+                      <a:headEnd type="none" w="med" len="med"/>
+                      <a:tailEnd type="none" w="med" len="med"/>
+                    </a:lnT>
+                    <a:lnB w="9525" cap="flat" cmpd="sng" algn="ctr">
+                      <a:solidFill>
+                        <a:srgbClr val="D3D1C7"/>
+                      </a:solidFill>
+                      <a:prstDash val="solid"/>
+                      <a:round/>
+                      <a:headEnd type="none" w="med" len="med"/>
+                      <a:tailEnd type="none" w="med" len="med"/>
+                    </a:lnB>
+                  </a:tcPr>
+                </a:tc>
+                <a:tc>
+                  <a:txBody>
+                    <a:bodyPr/>
+                    <a:lstStyle/>
+                    <a:p>
+                      <a:pPr indent="0" marL="0">
+                        <a:buNone/>
+                      </a:pPr>
+                      <a:r>
+                        <a:rPr lang="en-US" sz="1100" dirty="0">
+                          <a:solidFill>
+                            <a:srgbClr val="2C2C2A"/>
+                          </a:solidFill>
+                          <a:latin typeface="Consolas" pitchFamily="34" charset="0"/>
+                          <a:ea typeface="Consolas" pitchFamily="34" charset="-122"/>
+                          <a:cs typeface="Consolas" pitchFamily="34" charset="-120"/>
+                        </a:rPr>
+                        <a:t>max_tokens</a:t>
+                      </a:r>
+                      <a:endParaRPr lang="en-US" sz="1100" dirty="0">
+                        <a:latin typeface="Consolas" charset="0"/>
+                        <a:ea typeface="Consolas" charset="0"/>
+                        <a:cs typeface="Consolas" charset="0"/>
+                      </a:endParaRPr>
+                    </a:p>
+                  </a:txBody>
+                  <a:tcPr marL="76200" marR="76200" marT="25400" marB="25400" anchor="ctr">
+                    <a:lnL w="9525" cap="flat" cmpd="sng" algn="ctr">
+                      <a:solidFill>
+                        <a:srgbClr val="D3D1C7"/>
+                      </a:solidFill>
+                      <a:prstDash val="solid"/>
+                      <a:round/>
+                      <a:headEnd type="none" w="med" len="med"/>
+                      <a:tailEnd type="none" w="med" len="med"/>
+                    </a:lnL>
+                    <a:lnR w="9525" cap="flat" cmpd="sng" algn="ctr">
+                      <a:solidFill>
+                        <a:srgbClr val="D3D1C7"/>
+                      </a:solidFill>
+                      <a:prstDash val="solid"/>
+                      <a:round/>
+                      <a:headEnd type="none" w="med" len="med"/>
+                      <a:tailEnd type="none" w="med" len="med"/>
+                    </a:lnR>
+                    <a:lnT w="9525" cap="flat" cmpd="sng" algn="ctr">
+                      <a:solidFill>
+                        <a:srgbClr val="D3D1C7"/>
+                      </a:solidFill>
+                      <a:prstDash val="solid"/>
+                      <a:round/>
+                      <a:headEnd type="none" w="med" len="med"/>
+                      <a:tailEnd type="none" w="med" len="med"/>
+                    </a:lnT>
+                    <a:lnB w="9525" cap="flat" cmpd="sng" algn="ctr">
+                      <a:solidFill>
+                        <a:srgbClr val="D3D1C7"/>
+                      </a:solidFill>
+                      <a:prstDash val="solid"/>
+                      <a:round/>
+                      <a:headEnd type="none" w="med" len="med"/>
+                      <a:tailEnd type="none" w="med" len="med"/>
+                    </a:lnB>
+                  </a:tcPr>
+                </a:tc>
+                <a:tc>
+                  <a:txBody>
+                    <a:bodyPr/>
+                    <a:lstStyle/>
+                    <a:p>
+                      <a:pPr indent="0" marL="0">
+                        <a:buNone/>
+                      </a:pPr>
+                      <a:r>
+                        <a:rPr lang="en-US" sz="1100" dirty="0">
+                          <a:solidFill>
+                            <a:srgbClr val="2C2C2A"/>
+                          </a:solidFill>
+                          <a:latin typeface="Consolas" pitchFamily="34" charset="0"/>
+                          <a:ea typeface="Consolas" pitchFamily="34" charset="-122"/>
+                          <a:cs typeface="Consolas" pitchFamily="34" charset="-120"/>
+                        </a:rPr>
+                        <a:t>MAX_TOKENS</a:t>
+                      </a:r>
+                      <a:endParaRPr lang="en-US" sz="1100" dirty="0">
+                        <a:latin typeface="Consolas" charset="0"/>
+                        <a:ea typeface="Consolas" charset="0"/>
+                        <a:cs typeface="Consolas" charset="0"/>
+                      </a:endParaRPr>
+                    </a:p>
+                  </a:txBody>
+                  <a:tcPr marL="76200" marR="76200" marT="25400" marB="25400" anchor="ctr">
+                    <a:lnL w="9525" cap="flat" cmpd="sng" algn="ctr">
+                      <a:solidFill>
+                        <a:srgbClr val="D3D1C7"/>
+                      </a:solidFill>
+                      <a:prstDash val="solid"/>
+                      <a:round/>
+                      <a:headEnd type="none" w="med" len="med"/>
+                      <a:tailEnd type="none" w="med" len="med"/>
+                    </a:lnL>
+                    <a:lnR w="9525" cap="flat" cmpd="sng" algn="ctr">
+                      <a:solidFill>
+                        <a:srgbClr val="D3D1C7"/>
+                      </a:solidFill>
+                      <a:prstDash val="solid"/>
+                      <a:round/>
+                      <a:headEnd type="none" w="med" len="med"/>
+                      <a:tailEnd type="none" w="med" len="med"/>
+                    </a:lnR>
+                    <a:lnT w="9525" cap="flat" cmpd="sng" algn="ctr">
+                      <a:solidFill>
+                        <a:srgbClr val="D3D1C7"/>
+                      </a:solidFill>
+                      <a:prstDash val="solid"/>
+                      <a:round/>
+                      <a:headEnd type="none" w="med" len="med"/>
+                      <a:tailEnd type="none" w="med" len="med"/>
+                    </a:lnT>
+                    <a:lnB w="9525" cap="flat" cmpd="sng" algn="ctr">
+                      <a:solidFill>
+                        <a:srgbClr val="D3D1C7"/>
+                      </a:solidFill>
+                      <a:prstDash val="solid"/>
+                      <a:round/>
+                      <a:headEnd type="none" w="med" len="med"/>
+                      <a:tailEnd type="none" w="med" len="med"/>
+                    </a:lnB>
+                  </a:tcPr>
+                </a:tc>
+              </a:tr>
+              <a:tr h="347472">
+                <a:tc>
+                  <a:txBody>
+                    <a:bodyPr/>
+                    <a:lstStyle/>
+                    <a:p>
+                      <a:pPr indent="0" marL="0">
+                        <a:buNone/>
+                      </a:pPr>
+                      <a:r>
+                        <a:rPr lang="en-US" sz="1150" dirty="0">
+                          <a:solidFill>
+                            <a:srgbClr val="2C2C2A"/>
+                          </a:solidFill>
+                          <a:latin typeface="Calibri" pitchFamily="34" charset="0"/>
+                          <a:ea typeface="Calibri" pitchFamily="34" charset="-122"/>
+                          <a:cs typeface="Calibri" pitchFamily="34" charset="-120"/>
+                        </a:rPr>
+                        <a:t>Blocked or refused</a:t>
+                      </a:r>
+                      <a:endParaRPr lang="en-US" sz="1150" dirty="0">
+                        <a:latin typeface="Calibri" charset="0"/>
+                        <a:ea typeface="Calibri" charset="0"/>
+                        <a:cs typeface="Calibri" charset="0"/>
+                      </a:endParaRPr>
+                    </a:p>
+                  </a:txBody>
+                  <a:tcPr marL="76200" marR="76200" marT="25400" marB="25400" anchor="ctr">
+                    <a:lnL w="9525" cap="flat" cmpd="sng" algn="ctr">
+                      <a:solidFill>
+                        <a:srgbClr val="D3D1C7"/>
+                      </a:solidFill>
+                      <a:prstDash val="solid"/>
+                      <a:round/>
+                      <a:headEnd type="none" w="med" len="med"/>
+                      <a:tailEnd type="none" w="med" len="med"/>
+                    </a:lnL>
+                    <a:lnR w="9525" cap="flat" cmpd="sng" algn="ctr">
+                      <a:solidFill>
+                        <a:srgbClr val="D3D1C7"/>
+                      </a:solidFill>
+                      <a:prstDash val="solid"/>
+                      <a:round/>
+                      <a:headEnd type="none" w="med" len="med"/>
+                      <a:tailEnd type="none" w="med" len="med"/>
+                    </a:lnR>
+                    <a:lnT w="9525" cap="flat" cmpd="sng" algn="ctr">
+                      <a:solidFill>
+                        <a:srgbClr val="D3D1C7"/>
+                      </a:solidFill>
+                      <a:prstDash val="solid"/>
+                      <a:round/>
+                      <a:headEnd type="none" w="med" len="med"/>
+                      <a:tailEnd type="none" w="med" len="med"/>
+                    </a:lnT>
+                    <a:lnB w="9525" cap="flat" cmpd="sng" algn="ctr">
+                      <a:solidFill>
+                        <a:srgbClr val="D3D1C7"/>
+                      </a:solidFill>
+                      <a:prstDash val="solid"/>
+                      <a:round/>
+                      <a:headEnd type="none" w="med" len="med"/>
+                      <a:tailEnd type="none" w="med" len="med"/>
+                    </a:lnB>
+                  </a:tcPr>
+                </a:tc>
+                <a:tc>
+                  <a:txBody>
+                    <a:bodyPr/>
+                    <a:lstStyle/>
+                    <a:p>
+                      <a:pPr indent="0" marL="0">
+                        <a:buNone/>
+                      </a:pPr>
+                      <a:r>
+                        <a:rPr lang="en-US" sz="1100" dirty="0">
+                          <a:solidFill>
+                            <a:srgbClr val="2C2C2A"/>
+                          </a:solidFill>
+                          <a:latin typeface="Consolas" pitchFamily="34" charset="0"/>
+                          <a:ea typeface="Consolas" pitchFamily="34" charset="-122"/>
+                          <a:cs typeface="Consolas" pitchFamily="34" charset="-120"/>
+                        </a:rPr>
+                        <a:t>content_filter</a:t>
+                      </a:r>
+                      <a:endParaRPr lang="en-US" sz="1100" dirty="0">
+                        <a:latin typeface="Consolas" charset="0"/>
+                        <a:ea typeface="Consolas" charset="0"/>
+                        <a:cs typeface="Consolas" charset="0"/>
+                      </a:endParaRPr>
+                    </a:p>
+                  </a:txBody>
+                  <a:tcPr marL="76200" marR="76200" marT="25400" marB="25400" anchor="ctr">
+                    <a:lnL w="9525" cap="flat" cmpd="sng" algn="ctr">
+                      <a:solidFill>
+                        <a:srgbClr val="D3D1C7"/>
+                      </a:solidFill>
+                      <a:prstDash val="solid"/>
+                      <a:round/>
+                      <a:headEnd type="none" w="med" len="med"/>
+                      <a:tailEnd type="none" w="med" len="med"/>
+                    </a:lnL>
+                    <a:lnR w="9525" cap="flat" cmpd="sng" algn="ctr">
+                      <a:solidFill>
+                        <a:srgbClr val="D3D1C7"/>
+                      </a:solidFill>
+                      <a:prstDash val="solid"/>
+                      <a:round/>
+                      <a:headEnd type="none" w="med" len="med"/>
+                      <a:tailEnd type="none" w="med" len="med"/>
+                    </a:lnR>
+                    <a:lnT w="9525" cap="flat" cmpd="sng" algn="ctr">
+                      <a:solidFill>
+                        <a:srgbClr val="D3D1C7"/>
+                      </a:solidFill>
+                      <a:prstDash val="solid"/>
+                      <a:round/>
+                      <a:headEnd type="none" w="med" len="med"/>
+                      <a:tailEnd type="none" w="med" len="med"/>
+                    </a:lnT>
+                    <a:lnB w="9525" cap="flat" cmpd="sng" algn="ctr">
+                      <a:solidFill>
+                        <a:srgbClr val="D3D1C7"/>
+                      </a:solidFill>
+                      <a:prstDash val="solid"/>
+                      <a:round/>
+                      <a:headEnd type="none" w="med" len="med"/>
+                      <a:tailEnd type="none" w="med" len="med"/>
+                    </a:lnB>
+                  </a:tcPr>
+                </a:tc>
+                <a:tc>
+                  <a:txBody>
+                    <a:bodyPr/>
+                    <a:lstStyle/>
+                    <a:p>
+                      <a:pPr indent="0" marL="0">
+                        <a:buNone/>
+                      </a:pPr>
+                      <a:r>
+                        <a:rPr lang="en-US" sz="1100" dirty="0">
+                          <a:solidFill>
+                            <a:srgbClr val="2C2C2A"/>
+                          </a:solidFill>
+                          <a:latin typeface="Consolas" pitchFamily="34" charset="0"/>
+                          <a:ea typeface="Consolas" pitchFamily="34" charset="-122"/>
+                          <a:cs typeface="Consolas" pitchFamily="34" charset="-120"/>
+                        </a:rPr>
+                        <a:t>refusal</a:t>
+                      </a:r>
+                      <a:endParaRPr lang="en-US" sz="1100" dirty="0">
+                        <a:latin typeface="Consolas" charset="0"/>
+                        <a:ea typeface="Consolas" charset="0"/>
+                        <a:cs typeface="Consolas" charset="0"/>
+                      </a:endParaRPr>
+                    </a:p>
+                  </a:txBody>
+                  <a:tcPr marL="76200" marR="76200" marT="25400" marB="25400" anchor="ctr">
+                    <a:lnL w="9525" cap="flat" cmpd="sng" algn="ctr">
+                      <a:solidFill>
+                        <a:srgbClr val="D3D1C7"/>
+                      </a:solidFill>
+                      <a:prstDash val="solid"/>
+                      <a:round/>
+                      <a:headEnd type="none" w="med" len="med"/>
+                      <a:tailEnd type="none" w="med" len="med"/>
+                    </a:lnL>
+                    <a:lnR w="9525" cap="flat" cmpd="sng" algn="ctr">
+                      <a:solidFill>
+                        <a:srgbClr val="D3D1C7"/>
+                      </a:solidFill>
+                      <a:prstDash val="solid"/>
+                      <a:round/>
+                      <a:headEnd type="none" w="med" len="med"/>
+                      <a:tailEnd type="none" w="med" len="med"/>
+                    </a:lnR>
+                    <a:lnT w="9525" cap="flat" cmpd="sng" algn="ctr">
+                      <a:solidFill>
+                        <a:srgbClr val="D3D1C7"/>
+                      </a:solidFill>
+                      <a:prstDash val="solid"/>
+                      <a:round/>
+                      <a:headEnd type="none" w="med" len="med"/>
+                      <a:tailEnd type="none" w="med" len="med"/>
+                    </a:lnT>
+                    <a:lnB w="9525" cap="flat" cmpd="sng" algn="ctr">
+                      <a:solidFill>
+                        <a:srgbClr val="D3D1C7"/>
+                      </a:solidFill>
+                      <a:prstDash val="solid"/>
+                      <a:round/>
+                      <a:headEnd type="none" w="med" len="med"/>
+                      <a:tailEnd type="none" w="med" len="med"/>
+                    </a:lnB>
+                  </a:tcPr>
+                </a:tc>
+                <a:tc>
+                  <a:txBody>
+                    <a:bodyPr/>
+                    <a:lstStyle/>
+                    <a:p>
+                      <a:pPr indent="0" marL="0">
+                        <a:buNone/>
+                      </a:pPr>
+                      <a:r>
+                        <a:rPr lang="en-US" sz="1100" dirty="0">
+                          <a:solidFill>
+                            <a:srgbClr val="2C2C2A"/>
+                          </a:solidFill>
+                          <a:latin typeface="Consolas" pitchFamily="34" charset="0"/>
+                          <a:ea typeface="Consolas" pitchFamily="34" charset="-122"/>
+                          <a:cs typeface="Consolas" pitchFamily="34" charset="-120"/>
+                        </a:rPr>
+                        <a:t>SAFETY</a:t>
+                      </a:r>
+                      <a:endParaRPr lang="en-US" sz="1100" dirty="0">
+                        <a:latin typeface="Consolas" charset="0"/>
+                        <a:ea typeface="Consolas" charset="0"/>
+                        <a:cs typeface="Consolas" charset="0"/>
+                      </a:endParaRPr>
+                    </a:p>
+                  </a:txBody>
+                  <a:tcPr marL="76200" marR="76200" marT="25400" marB="25400" anchor="ctr">
+                    <a:lnL w="9525" cap="flat" cmpd="sng" algn="ctr">
+                      <a:solidFill>
+                        <a:srgbClr val="D3D1C7"/>
+                      </a:solidFill>
+                      <a:prstDash val="solid"/>
+                      <a:round/>
+                      <a:headEnd type="none" w="med" len="med"/>
+                      <a:tailEnd type="none" w="med" len="med"/>
+                    </a:lnL>
+                    <a:lnR w="9525" cap="flat" cmpd="sng" algn="ctr">
+                      <a:solidFill>
+                        <a:srgbClr val="D3D1C7"/>
+                      </a:solidFill>
+                      <a:prstDash val="solid"/>
+                      <a:round/>
+                      <a:headEnd type="none" w="med" len="med"/>
+                      <a:tailEnd type="none" w="med" len="med"/>
+                    </a:lnR>
+                    <a:lnT w="9525" cap="flat" cmpd="sng" algn="ctr">
+                      <a:solidFill>
+                        <a:srgbClr val="D3D1C7"/>
+                      </a:solidFill>
+                      <a:prstDash val="solid"/>
+                      <a:round/>
+                      <a:headEnd type="none" w="med" len="med"/>
+                      <a:tailEnd type="none" w="med" len="med"/>
+                    </a:lnT>
+                    <a:lnB w="9525" cap="flat" cmpd="sng" algn="ctr">
+                      <a:solidFill>
+                        <a:srgbClr val="D3D1C7"/>
+                      </a:solidFill>
+                      <a:prstDash val="solid"/>
+                      <a:round/>
+                      <a:headEnd type="none" w="med" len="med"/>
+                      <a:tailEnd type="none" w="med" len="med"/>
+                    </a:lnB>
+                  </a:tcPr>
+                </a:tc>
+              </a:tr>
+            </a:tbl>
+          </a:graphicData>
+        </a:graphic>
+      </p:graphicFrame>
+      <p:sp>
+        <p:nvSpPr>
+          <p:cNvPr id="30" name="!!gemnote"/>
+          <p:cNvSpPr txBox="1"/>
+          <p:nvPr/>
+        </p:nvSpPr>
+        <p:spPr>
+          <a:xfrm>
+            <a:off x="5989320" y="3931920"/>
+            <a:ext cx="5788152" cy="228600"/>
+          </a:xfrm>
+          <a:prstGeom prst="rect">
+            <a:avLst/>
+          </a:prstGeom>
+          <a:noFill/>
+          <a:ln/>
+        </p:spPr>
+        <p:txBody>
+          <a:bodyPr wrap="square" lIns="0" tIns="0" rIns="0" bIns="0" rtlCol="0" anchor="t"/>
+          <a:lstStyle/>
+          <a:p>
+            <a:pPr algn="l" indent="0" marL="0">
+              <a:buNone/>
+            </a:pPr>
+            <a:r>
+              <a:rPr lang="en-US" sz="1000" i="1" dirty="0">
+                <a:solidFill>
+                  <a:srgbClr val="5F5E5A"/>
+                </a:solidFill>
+                <a:latin typeface="Calibri" pitchFamily="34" charset="0"/>
+                <a:ea typeface="Calibri" pitchFamily="34" charset="-122"/>
+                <a:cs typeface="Calibri" pitchFamily="34" charset="-120"/>
+              </a:rPr>
+              <a:t>* Gemini says STOP even when it wants a tool; the function call sits in the reply's content.</a:t>
+            </a:r>
+            <a:endParaRPr lang="en-US" sz="1000" dirty="0"/>
+          </a:p>
+        </p:txBody>
+      </p:sp>
+      <p:sp>
+        <p:nvSpPr>
+          <p:cNvPr id="31" name="Text 28"/>
+          <p:cNvSpPr txBox="1"/>
+          <p:nvPr/>
+        </p:nvSpPr>
+        <p:spPr>
+          <a:xfrm>
+            <a:off x="5989320" y="4261104"/>
+            <a:ext cx="5788152" cy="274320"/>
+          </a:xfrm>
+          <a:prstGeom prst="rect">
+            <a:avLst/>
+          </a:prstGeom>
+          <a:noFill/>
+          <a:ln/>
+        </p:spPr>
+        <p:txBody>
+          <a:bodyPr wrap="square" lIns="0" tIns="0" rIns="0" bIns="0" rtlCol="0" anchor="t"/>
+          <a:lstStyle/>
+          <a:p>
+            <a:pPr algn="l" indent="0" marL="0">
+              <a:buNone/>
+            </a:pPr>
+            <a:r>
+              <a:rPr lang="en-US" sz="1300" b="1" dirty="0">
+                <a:solidFill>
+                  <a:srgbClr val="2C2C2A"/>
+                </a:solidFill>
+                <a:latin typeface="Calibri" pitchFamily="34" charset="0"/>
+                <a:ea typeface="Calibri" pitchFamily="34" charset="-122"/>
+                <a:cs typeface="Calibri" pitchFamily="34" charset="-120"/>
+              </a:rPr>
+              <a:t>What the loop does next</a:t>
+            </a:r>
+            <a:endParaRPr lang="en-US" sz="1300" dirty="0"/>
+          </a:p>
+        </p:txBody>
+      </p:sp>
+      <p:sp>
+        <p:nvSpPr>
+          <p:cNvPr id="32" name="!!act0"/>
+          <p:cNvSpPr/>
+          <p:nvPr/>
+        </p:nvSpPr>
+        <p:spPr>
+          <a:xfrm>
+            <a:off x="5989320" y="4590288"/>
+            <a:ext cx="2848356" cy="384048"/>
+          </a:xfrm>
+          <a:prstGeom prst="roundRect">
+            <a:avLst>
+              <a:gd name="adj" fmla="val 14286"/>
+            </a:avLst>
+          </a:prstGeom>
+          <a:solidFill>
+            <a:srgbClr val="E1F5EE"/>
+          </a:solidFill>
+          <a:ln w="9525">
+            <a:solidFill>
+              <a:srgbClr val="0F6E56"/>
+            </a:solidFill>
+            <a:prstDash val="solid"/>
+          </a:ln>
+        </p:spPr>
+        <p:txBody>
+          <a:bodyPr wrap="square" lIns="76200" tIns="76200" rIns="76200" bIns="76200" rtlCol="0" anchor="ctr"/>
+          <a:lstStyle/>
+          <a:p>
+            <a:pPr algn="l" indent="0" marL="0">
+              <a:buNone/>
+            </a:pPr>
+            <a:r>
+              <a:rPr lang="en-US" sz="1050" b="1" dirty="0">
+                <a:solidFill>
+                  <a:srgbClr val="085041"/>
+                </a:solidFill>
+                <a:latin typeface="Consolas" pitchFamily="34" charset="0"/>
+                <a:ea typeface="Consolas" pitchFamily="34" charset="-122"/>
+                <a:cs typeface="Consolas" pitchFamily="34" charset="-120"/>
+              </a:rPr>
+              <a:t>tool_calls  →  </a:t>
+            </a:r>
+            <a:pPr algn="l" indent="0" marL="0">
+              <a:buNone/>
+            </a:pPr>
+            <a:r>
+              <a:rPr lang="en-US" sz="1100" dirty="0">
+                <a:solidFill>
+                  <a:srgbClr val="085041"/>
+                </a:solidFill>
+                <a:latin typeface="Calibri" pitchFamily="34" charset="0"/>
+                <a:ea typeface="Calibri" pitchFamily="34" charset="-122"/>
+                <a:cs typeface="Calibri" pitchFamily="34" charset="-120"/>
+              </a:rPr>
+              <a:t>run the tool, call again ↻</a:t>
+            </a:r>
+            <a:endParaRPr lang="en-US" sz="1200" dirty="0"/>
+          </a:p>
+        </p:txBody>
+      </p:sp>
+      <p:sp>
+        <p:nvSpPr>
+          <p:cNvPr id="33" name="!!act1"/>
+          <p:cNvSpPr/>
+          <p:nvPr/>
+        </p:nvSpPr>
+        <p:spPr>
+          <a:xfrm>
+            <a:off x="8929116" y="4590288"/>
+            <a:ext cx="2848356" cy="384048"/>
+          </a:xfrm>
+          <a:prstGeom prst="roundRect">
+            <a:avLst>
+              <a:gd name="adj" fmla="val 14286"/>
+            </a:avLst>
+          </a:prstGeom>
+          <a:solidFill>
+            <a:srgbClr val="F1EFE8"/>
+          </a:solidFill>
+          <a:ln w="9525">
+            <a:solidFill>
+              <a:srgbClr val="888780"/>
+            </a:solidFill>
+            <a:prstDash val="solid"/>
+          </a:ln>
+        </p:spPr>
+        <p:txBody>
+          <a:bodyPr wrap="square" lIns="76200" tIns="76200" rIns="76200" bIns="76200" rtlCol="0" anchor="ctr"/>
+          <a:lstStyle/>
+          <a:p>
+            <a:pPr algn="l" indent="0" marL="0">
+              <a:buNone/>
+            </a:pPr>
+            <a:r>
+              <a:rPr lang="en-US" sz="1050" b="1" dirty="0">
+                <a:solidFill>
+                  <a:srgbClr val="2C2C2A"/>
+                </a:solidFill>
+                <a:latin typeface="Consolas" pitchFamily="34" charset="0"/>
+                <a:ea typeface="Consolas" pitchFamily="34" charset="-122"/>
+                <a:cs typeface="Consolas" pitchFamily="34" charset="-120"/>
+              </a:rPr>
+              <a:t>stop  →  </a:t>
+            </a:r>
+            <a:pPr algn="l" indent="0" marL="0">
+              <a:buNone/>
+            </a:pPr>
+            <a:r>
+              <a:rPr lang="en-US" sz="1100" dirty="0">
+                <a:solidFill>
+                  <a:srgbClr val="2C2C2A"/>
+                </a:solidFill>
+                <a:latin typeface="Calibri" pitchFamily="34" charset="0"/>
+                <a:ea typeface="Calibri" pitchFamily="34" charset="-122"/>
+                <a:cs typeface="Calibri" pitchFamily="34" charset="-120"/>
+              </a:rPr>
+              <a:t>return the answer, done</a:t>
+            </a:r>
+            <a:endParaRPr lang="en-US" sz="1200" dirty="0"/>
+          </a:p>
+        </p:txBody>
+      </p:sp>
+      <p:sp>
+        <p:nvSpPr>
+          <p:cNvPr id="34" name="!!act2"/>
+          <p:cNvSpPr/>
+          <p:nvPr/>
+        </p:nvSpPr>
+        <p:spPr>
+          <a:xfrm>
+            <a:off x="5989320" y="5047488"/>
+            <a:ext cx="2848356" cy="384048"/>
+          </a:xfrm>
+          <a:prstGeom prst="roundRect">
+            <a:avLst>
+              <a:gd name="adj" fmla="val 14286"/>
+            </a:avLst>
+          </a:prstGeom>
+          <a:solidFill>
+            <a:srgbClr val="FAEEDA"/>
+          </a:solidFill>
+          <a:ln w="9525">
+            <a:solidFill>
+              <a:srgbClr val="854F0B"/>
+            </a:solidFill>
+            <a:prstDash val="solid"/>
+          </a:ln>
+        </p:spPr>
+        <p:txBody>
+          <a:bodyPr wrap="square" lIns="76200" tIns="76200" rIns="76200" bIns="76200" rtlCol="0" anchor="ctr"/>
+          <a:lstStyle/>
+          <a:p>
+            <a:pPr algn="l" indent="0" marL="0">
+              <a:buNone/>
+            </a:pPr>
+            <a:r>
+              <a:rPr lang="en-US" sz="1050" b="1" dirty="0">
+                <a:solidFill>
+                  <a:srgbClr val="633806"/>
+                </a:solidFill>
+                <a:latin typeface="Consolas" pitchFamily="34" charset="0"/>
+                <a:ea typeface="Consolas" pitchFamily="34" charset="-122"/>
+                <a:cs typeface="Consolas" pitchFamily="34" charset="-120"/>
+              </a:rPr>
+              <a:t>length  →  </a:t>
+            </a:r>
+            <a:pPr algn="l" indent="0" marL="0">
+              <a:buNone/>
+            </a:pPr>
+            <a:r>
+              <a:rPr lang="en-US" sz="1100" dirty="0">
+                <a:solidFill>
+                  <a:srgbClr val="633806"/>
+                </a:solidFill>
+                <a:latin typeface="Calibri" pitchFamily="34" charset="0"/>
+                <a:ea typeface="Calibri" pitchFamily="34" charset="-122"/>
+                <a:cs typeface="Calibri" pitchFamily="34" charset="-120"/>
+              </a:rPr>
+              <a:t>raise the limit or continue</a:t>
+            </a:r>
+            <a:endParaRPr lang="en-US" sz="1200" dirty="0"/>
+          </a:p>
+        </p:txBody>
+      </p:sp>
+      <p:sp>
+        <p:nvSpPr>
+          <p:cNvPr id="35" name="!!act3"/>
+          <p:cNvSpPr/>
+          <p:nvPr/>
+        </p:nvSpPr>
+        <p:spPr>
+          <a:xfrm>
+            <a:off x="8929116" y="5047488"/>
+            <a:ext cx="2848356" cy="384048"/>
+          </a:xfrm>
+          <a:prstGeom prst="roundRect">
+            <a:avLst>
+              <a:gd name="adj" fmla="val 14286"/>
+            </a:avLst>
+          </a:prstGeom>
+          <a:solidFill>
+            <a:srgbClr val="FAECE7"/>
+          </a:solidFill>
+          <a:ln w="9525">
+            <a:solidFill>
+              <a:srgbClr val="993C1D"/>
+            </a:solidFill>
+            <a:prstDash val="solid"/>
+          </a:ln>
+        </p:spPr>
+        <p:txBody>
+          <a:bodyPr wrap="square" lIns="76200" tIns="76200" rIns="76200" bIns="76200" rtlCol="0" anchor="ctr"/>
+          <a:lstStyle/>
+          <a:p>
+            <a:pPr algn="l" indent="0" marL="0">
+              <a:buNone/>
+            </a:pPr>
+            <a:r>
+              <a:rPr lang="en-US" sz="1050" b="1" dirty="0">
+                <a:solidFill>
+                  <a:srgbClr val="712B13"/>
+                </a:solidFill>
+                <a:latin typeface="Consolas" pitchFamily="34" charset="0"/>
+                <a:ea typeface="Consolas" pitchFamily="34" charset="-122"/>
+                <a:cs typeface="Consolas" pitchFamily="34" charset="-120"/>
+              </a:rPr>
+              <a:t>content_filter  →  </a:t>
+            </a:r>
+            <a:pPr algn="l" indent="0" marL="0">
+              <a:buNone/>
+            </a:pPr>
+            <a:r>
+              <a:rPr lang="en-US" sz="1100" dirty="0">
+                <a:solidFill>
+                  <a:srgbClr val="712B13"/>
+                </a:solidFill>
+                <a:latin typeface="Calibri" pitchFamily="34" charset="0"/>
+                <a:ea typeface="Calibri" pitchFamily="34" charset="-122"/>
+                <a:cs typeface="Calibri" pitchFamily="34" charset="-120"/>
+              </a:rPr>
+              <a:t>stop and escalate</a:t>
+            </a:r>
+            <a:endParaRPr lang="en-US" sz="1200" dirty="0"/>
+          </a:p>
+        </p:txBody>
+      </p:sp>
+      <p:sp>
+        <p:nvSpPr>
+          <p:cNvPr id="36" name="!!bridge1"/>
+          <p:cNvSpPr/>
+          <p:nvPr/>
+        </p:nvSpPr>
+        <p:spPr>
+          <a:xfrm>
+            <a:off x="411480" y="5623560"/>
+            <a:ext cx="11365992" cy="502920"/>
+          </a:xfrm>
+          <a:prstGeom prst="roundRect">
+            <a:avLst>
+              <a:gd name="adj" fmla="val 18182"/>
             </a:avLst>
           </a:prstGeom>
           <a:solidFill>
@@ -1797,7 +4819,7 @@
               <a:buNone/>
             </a:pPr>
             <a:r>
-              <a:rPr lang="en-US" sz="1500" dirty="0">
+              <a:rPr lang="en-US" sz="1400" b="1" dirty="0">
                 <a:solidFill>
                   <a:srgbClr val="3C3489"/>
                 </a:solidFill>
@@ -1805,27 +4827,13 @@
                 <a:ea typeface="Calibri" pitchFamily="34" charset="-122"/>
                 <a:cs typeface="Calibri" pitchFamily="34" charset="-120"/>
               </a:rPr>
-              <a:t>Every single-agent loop is steered by one field, </a:t>
+              <a:t>One field steers the whole loop. </a:t>
             </a:r>
             <a:pPr algn="l" indent="0" marL="0">
               <a:buNone/>
             </a:pPr>
             <a:r>
-              <a:rPr lang="en-US" sz="1500" b="1" dirty="0">
-                <a:solidFill>
-                  <a:srgbClr val="3C3489"/>
-                </a:solidFill>
-                <a:latin typeface="Consolas" pitchFamily="34" charset="0"/>
-                <a:ea typeface="Consolas" pitchFamily="34" charset="-122"/>
-                <a:cs typeface="Consolas" pitchFamily="34" charset="-120"/>
-              </a:rPr>
-              <a:t>finish_reason</a:t>
-            </a:r>
-            <a:pPr algn="l" indent="0" marL="0">
-              <a:buNone/>
-            </a:pPr>
-            <a:r>
-              <a:rPr lang="en-US" sz="1500" dirty="0">
+              <a:rPr lang="en-US" sz="1400" dirty="0">
                 <a:solidFill>
                   <a:srgbClr val="3C3489"/>
                 </a:solidFill>
@@ -1833,1231 +4841,57 @@
                 <a:ea typeface="Calibri" pitchFamily="34" charset="-122"/>
                 <a:cs typeface="Calibri" pitchFamily="34" charset="-120"/>
               </a:rPr>
-              <a:t>, and that's where the problems start.</a:t>
-            </a:r>
-            <a:endParaRPr lang="en-US" sz="1500" dirty="0"/>
-          </a:p>
-        </p:txBody>
-      </p:sp>
-      <p:sp>
-        <p:nvSpPr>
-          <p:cNvPr id="5" name="Text 3"/>
-          <p:cNvSpPr/>
-          <p:nvPr/>
-        </p:nvSpPr>
-        <p:spPr>
-          <a:xfrm>
-            <a:off x="5892394" y="910742"/>
-            <a:ext cx="5555894" cy="3405226"/>
-          </a:xfrm>
-          <a:prstGeom prst="roundRect">
-            <a:avLst>
-              <a:gd name="adj" fmla="val 5371"/>
-            </a:avLst>
-          </a:prstGeom>
-          <a:solidFill>
-            <a:srgbClr val="FFFFFF">
-              <a:alpha val="0"/>
-            </a:srgbClr>
-          </a:solidFill>
-          <a:ln w="9525">
-            <a:solidFill>
-              <a:srgbClr val="5F5E5A"/>
-            </a:solidFill>
-            <a:prstDash val="dash"/>
-          </a:ln>
-        </p:spPr>
-        <p:txBody>
-          <a:bodyPr wrap="square" lIns="50800" tIns="50800" rIns="50800" bIns="50800" rtlCol="0" anchor="ctr"/>
-          <a:lstStyle/>
-          <a:p>
-            <a:pPr algn="ctr" indent="0" marL="0">
-              <a:buNone/>
-            </a:pPr>
-            <a:endParaRPr lang="en-US" sz="1200" dirty="0"/>
-          </a:p>
-        </p:txBody>
-      </p:sp>
-      <p:sp>
-        <p:nvSpPr>
-          <p:cNvPr id="6" name="Text 4"/>
-          <p:cNvSpPr txBox="1"/>
-          <p:nvPr/>
-        </p:nvSpPr>
-        <p:spPr>
-          <a:xfrm>
-            <a:off x="6071616" y="1018276"/>
-            <a:ext cx="1371600" cy="228600"/>
-          </a:xfrm>
-          <a:prstGeom prst="rect">
-            <a:avLst/>
-          </a:prstGeom>
-          <a:noFill/>
-          <a:ln/>
-        </p:spPr>
-        <p:txBody>
-          <a:bodyPr wrap="square" lIns="0" tIns="0" rIns="0" bIns="0" rtlCol="0" anchor="t"/>
-          <a:lstStyle/>
-          <a:p>
-            <a:pPr algn="l" indent="0" marL="0">
-              <a:buNone/>
-            </a:pPr>
-            <a:r>
-              <a:rPr lang="en-US" sz="1100" b="1" dirty="0">
-                <a:solidFill>
-                  <a:srgbClr val="2C2C2A"/>
-                </a:solidFill>
-                <a:latin typeface="Calibri" pitchFamily="34" charset="0"/>
-                <a:ea typeface="Calibri" pitchFamily="34" charset="-122"/>
-                <a:cs typeface="Calibri" pitchFamily="34" charset="-120"/>
-              </a:rPr>
-              <a:t>Parent graph</a:t>
-            </a:r>
-            <a:endParaRPr lang="en-US" sz="1100" dirty="0"/>
-          </a:p>
-        </p:txBody>
-      </p:sp>
-      <p:sp>
-        <p:nvSpPr>
-          <p:cNvPr id="7" name="Text 5"/>
-          <p:cNvSpPr/>
-          <p:nvPr/>
-        </p:nvSpPr>
-        <p:spPr>
-          <a:xfrm>
-            <a:off x="7684618" y="1287109"/>
-            <a:ext cx="1971446" cy="483900"/>
-          </a:xfrm>
-          <a:prstGeom prst="roundRect">
-            <a:avLst>
-              <a:gd name="adj" fmla="val 15117"/>
-            </a:avLst>
-          </a:prstGeom>
-          <a:solidFill>
-            <a:srgbClr val="EEEDFE"/>
-          </a:solidFill>
-          <a:ln w="12700">
-            <a:solidFill>
-              <a:srgbClr val="534AB7"/>
-            </a:solidFill>
-            <a:prstDash val="solid"/>
-          </a:ln>
-        </p:spPr>
-        <p:txBody>
-          <a:bodyPr wrap="square" lIns="50800" tIns="50800" rIns="50800" bIns="50800" rtlCol="0" anchor="ctr"/>
-          <a:lstStyle/>
-          <a:p>
-            <a:pPr algn="ctr" indent="0" marL="0">
-              <a:buNone/>
-            </a:pPr>
-            <a:r>
-              <a:rPr lang="en-US" sz="1100" b="1" dirty="0">
-                <a:solidFill>
-                  <a:srgbClr val="3C3489"/>
-                </a:solidFill>
-                <a:latin typeface="Calibri" pitchFamily="34" charset="0"/>
-                <a:ea typeface="Calibri" pitchFamily="34" charset="-122"/>
-                <a:cs typeface="Calibri" pitchFamily="34" charset="-120"/>
-              </a:rPr>
-              <a:t>Supervisor</a:t>
-            </a:r>
-            <a:endParaRPr lang="en-US" sz="1200" dirty="0"/>
-          </a:p>
-          <a:p>
-            <a:pPr algn="ctr" indent="0" marL="0">
-              <a:buNone/>
-            </a:pPr>
-            <a:r>
-              <a:rPr lang="en-US" sz="1000" dirty="0">
-                <a:solidFill>
-                  <a:srgbClr val="534AB7"/>
-                </a:solidFill>
-                <a:latin typeface="Calibri" pitchFamily="34" charset="0"/>
-                <a:ea typeface="Calibri" pitchFamily="34" charset="-122"/>
-                <a:cs typeface="Calibri" pitchFamily="34" charset="-120"/>
-              </a:rPr>
-              <a:t>Routes the task</a:t>
-            </a:r>
-            <a:endParaRPr lang="en-US" sz="1200" dirty="0"/>
-          </a:p>
-        </p:txBody>
-      </p:sp>
-      <p:sp>
-        <p:nvSpPr>
-          <p:cNvPr id="8" name="Shape 6"/>
-          <p:cNvSpPr/>
-          <p:nvPr/>
-        </p:nvSpPr>
-        <p:spPr>
-          <a:xfrm flipH="1">
-            <a:off x="7057339" y="1771010"/>
-            <a:ext cx="1209751" cy="286756"/>
-          </a:xfrm>
-          <a:prstGeom prst="line">
-            <a:avLst/>
-          </a:prstGeom>
-          <a:noFill/>
-          <a:ln w="15875">
-            <a:solidFill>
-              <a:srgbClr val="5F5E5A"/>
-            </a:solidFill>
-            <a:prstDash val="solid"/>
-            <a:tailEnd type="triangle"/>
-          </a:ln>
-        </p:spPr>
-      </p:sp>
-      <p:sp>
-        <p:nvSpPr>
-          <p:cNvPr id="9" name="Shape 7"/>
-          <p:cNvSpPr/>
-          <p:nvPr/>
-        </p:nvSpPr>
-        <p:spPr>
-          <a:xfrm>
-            <a:off x="8670341" y="1771010"/>
-            <a:ext cx="914" cy="286756"/>
-          </a:xfrm>
-          <a:prstGeom prst="line">
-            <a:avLst/>
-          </a:prstGeom>
-          <a:noFill/>
-          <a:ln w="15875">
-            <a:solidFill>
-              <a:srgbClr val="5F5E5A"/>
-            </a:solidFill>
-            <a:prstDash val="solid"/>
-            <a:tailEnd type="triangle"/>
-          </a:ln>
-        </p:spPr>
-      </p:sp>
-      <p:sp>
-        <p:nvSpPr>
-          <p:cNvPr id="10" name="Shape 8"/>
-          <p:cNvSpPr/>
-          <p:nvPr/>
-        </p:nvSpPr>
-        <p:spPr>
-          <a:xfrm>
-            <a:off x="9073591" y="1771010"/>
-            <a:ext cx="1209751" cy="286756"/>
-          </a:xfrm>
-          <a:prstGeom prst="line">
-            <a:avLst/>
-          </a:prstGeom>
-          <a:noFill/>
-          <a:ln w="15875">
-            <a:solidFill>
-              <a:srgbClr val="5F5E5A"/>
-            </a:solidFill>
-            <a:prstDash val="solid"/>
-            <a:tailEnd type="triangle"/>
-          </a:ln>
-        </p:spPr>
-      </p:sp>
-      <p:sp>
-        <p:nvSpPr>
-          <p:cNvPr id="11" name="Text 9"/>
-          <p:cNvSpPr/>
-          <p:nvPr/>
-        </p:nvSpPr>
-        <p:spPr>
-          <a:xfrm>
-            <a:off x="6116422" y="2075688"/>
-            <a:ext cx="1613002" cy="1344168"/>
-          </a:xfrm>
-          <a:prstGeom prst="roundRect">
-            <a:avLst>
-              <a:gd name="adj" fmla="val 8163"/>
-            </a:avLst>
-          </a:prstGeom>
-          <a:solidFill>
-            <a:srgbClr val="E1F5EE"/>
-          </a:solidFill>
-          <a:ln w="12700">
-            <a:solidFill>
-              <a:srgbClr val="0F6E56"/>
-            </a:solidFill>
-            <a:prstDash val="dash"/>
-          </a:ln>
-        </p:spPr>
-        <p:txBody>
-          <a:bodyPr wrap="square" lIns="50800" tIns="50800" rIns="50800" bIns="50800" rtlCol="0" anchor="ctr"/>
-          <a:lstStyle/>
-          <a:p>
-            <a:pPr algn="ctr" indent="0" marL="0">
-              <a:buNone/>
-            </a:pPr>
-            <a:endParaRPr lang="en-US" sz="1200" dirty="0"/>
-          </a:p>
-        </p:txBody>
-      </p:sp>
-      <p:sp>
-        <p:nvSpPr>
-          <p:cNvPr id="12" name="Text 10"/>
-          <p:cNvSpPr txBox="1"/>
-          <p:nvPr/>
-        </p:nvSpPr>
-        <p:spPr>
-          <a:xfrm>
-            <a:off x="6116422" y="2147377"/>
-            <a:ext cx="1613002" cy="358445"/>
-          </a:xfrm>
-          <a:prstGeom prst="rect">
-            <a:avLst/>
-          </a:prstGeom>
-          <a:noFill/>
-          <a:ln/>
-        </p:spPr>
-        <p:txBody>
-          <a:bodyPr wrap="square" lIns="0" tIns="0" rIns="0" bIns="0" rtlCol="0" anchor="t"/>
-          <a:lstStyle/>
-          <a:p>
-            <a:pPr algn="ctr" indent="0" marL="0">
-              <a:buNone/>
-            </a:pPr>
-            <a:r>
-              <a:rPr lang="en-US" sz="1100" b="1" dirty="0">
-                <a:solidFill>
-                  <a:srgbClr val="085041"/>
-                </a:solidFill>
-                <a:latin typeface="Calibri" pitchFamily="34" charset="0"/>
-                <a:ea typeface="Calibri" pitchFamily="34" charset="-122"/>
-                <a:cs typeface="Calibri" pitchFamily="34" charset="-120"/>
-              </a:rPr>
-              <a:t>Research</a:t>
+              <a:t>Fine for one task, fragile at scale: and that's exactly where single agents start to fail →</a:t>
             </a:r>
             <a:endParaRPr lang="en-US" sz="1400" dirty="0"/>
           </a:p>
-          <a:p>
-            <a:pPr algn="ctr" indent="0" marL="0">
-              <a:buNone/>
-            </a:pPr>
-            <a:r>
-              <a:rPr lang="en-US" sz="1000" dirty="0">
-                <a:solidFill>
-                  <a:srgbClr val="0F6E56"/>
-                </a:solidFill>
-                <a:latin typeface="Calibri" pitchFamily="34" charset="0"/>
-                <a:ea typeface="Calibri" pitchFamily="34" charset="-122"/>
-                <a:cs typeface="Calibri" pitchFamily="34" charset="-120"/>
-              </a:rPr>
-              <a:t>subgraph</a:t>
-            </a:r>
-            <a:endParaRPr lang="en-US" sz="1400" dirty="0"/>
-          </a:p>
-        </p:txBody>
-      </p:sp>
-      <p:sp>
-        <p:nvSpPr>
-          <p:cNvPr id="13" name="Text 11"/>
-          <p:cNvSpPr/>
-          <p:nvPr/>
-        </p:nvSpPr>
-        <p:spPr>
-          <a:xfrm>
-            <a:off x="6250838" y="2577511"/>
-            <a:ext cx="591434" cy="358445"/>
-          </a:xfrm>
-          <a:prstGeom prst="roundRect">
-            <a:avLst>
-              <a:gd name="adj" fmla="val 20408"/>
-            </a:avLst>
-          </a:prstGeom>
-          <a:solidFill>
-            <a:srgbClr val="F1EFE8"/>
-          </a:solidFill>
-          <a:ln w="12700">
-            <a:solidFill>
-              <a:srgbClr val="888780"/>
-            </a:solidFill>
-            <a:prstDash val="solid"/>
-          </a:ln>
-        </p:spPr>
-        <p:txBody>
-          <a:bodyPr wrap="square" lIns="50800" tIns="50800" rIns="50800" bIns="50800" rtlCol="0" anchor="ctr"/>
-          <a:lstStyle/>
-          <a:p>
-            <a:pPr algn="ctr" indent="0" marL="0">
-              <a:buNone/>
-            </a:pPr>
-            <a:r>
-              <a:rPr lang="en-US" sz="1000" dirty="0">
-                <a:solidFill>
-                  <a:srgbClr val="2C2C2A"/>
-                </a:solidFill>
-                <a:latin typeface="Calibri" pitchFamily="34" charset="0"/>
-                <a:ea typeface="Calibri" pitchFamily="34" charset="-122"/>
-                <a:cs typeface="Calibri" pitchFamily="34" charset="-120"/>
-              </a:rPr>
-              <a:t>LLM</a:t>
-            </a:r>
-            <a:endParaRPr lang="en-US" sz="1000" dirty="0"/>
-          </a:p>
-        </p:txBody>
-      </p:sp>
-      <p:sp>
-        <p:nvSpPr>
-          <p:cNvPr id="14" name="Text 12"/>
-          <p:cNvSpPr/>
-          <p:nvPr/>
-        </p:nvSpPr>
-        <p:spPr>
-          <a:xfrm>
-            <a:off x="7003572" y="2577511"/>
-            <a:ext cx="591434" cy="358445"/>
-          </a:xfrm>
-          <a:prstGeom prst="roundRect">
-            <a:avLst>
-              <a:gd name="adj" fmla="val 20408"/>
-            </a:avLst>
-          </a:prstGeom>
-          <a:solidFill>
-            <a:srgbClr val="F1EFE8"/>
-          </a:solidFill>
-          <a:ln w="12700">
-            <a:solidFill>
-              <a:srgbClr val="888780"/>
-            </a:solidFill>
-            <a:prstDash val="solid"/>
-          </a:ln>
-        </p:spPr>
-        <p:txBody>
-          <a:bodyPr wrap="square" lIns="50800" tIns="50800" rIns="50800" bIns="50800" rtlCol="0" anchor="ctr"/>
-          <a:lstStyle/>
-          <a:p>
-            <a:pPr algn="ctr" indent="0" marL="0">
-              <a:buNone/>
-            </a:pPr>
-            <a:r>
-              <a:rPr lang="en-US" sz="1000" dirty="0">
-                <a:solidFill>
-                  <a:srgbClr val="2C2C2A"/>
-                </a:solidFill>
-                <a:latin typeface="Calibri" pitchFamily="34" charset="0"/>
-                <a:ea typeface="Calibri" pitchFamily="34" charset="-122"/>
-                <a:cs typeface="Calibri" pitchFamily="34" charset="-120"/>
-              </a:rPr>
-              <a:t>Tools</a:t>
-            </a:r>
-            <a:endParaRPr lang="en-US" sz="1000" dirty="0"/>
-          </a:p>
-        </p:txBody>
-      </p:sp>
-      <p:sp>
-        <p:nvSpPr>
-          <p:cNvPr id="15" name="Shape 13"/>
-          <p:cNvSpPr/>
-          <p:nvPr/>
-        </p:nvSpPr>
-        <p:spPr>
-          <a:xfrm>
-            <a:off x="6851233" y="2756733"/>
-            <a:ext cx="143378" cy="914"/>
-          </a:xfrm>
-          <a:prstGeom prst="line">
-            <a:avLst/>
-          </a:prstGeom>
-          <a:noFill/>
-          <a:ln w="12700">
-            <a:solidFill>
-              <a:srgbClr val="5F5E5A"/>
-            </a:solidFill>
-            <a:prstDash val="solid"/>
-            <a:headEnd type="triangle"/>
-            <a:tailEnd type="triangle"/>
-          </a:ln>
-        </p:spPr>
-      </p:sp>
-      <p:sp>
-        <p:nvSpPr>
-          <p:cNvPr id="16" name="Text 14"/>
-          <p:cNvSpPr txBox="1"/>
-          <p:nvPr/>
-        </p:nvSpPr>
-        <p:spPr>
-          <a:xfrm>
-            <a:off x="6116422" y="3097256"/>
-            <a:ext cx="1613002" cy="201168"/>
-          </a:xfrm>
-          <a:prstGeom prst="rect">
-            <a:avLst/>
-          </a:prstGeom>
-          <a:noFill/>
-          <a:ln/>
-        </p:spPr>
-        <p:txBody>
-          <a:bodyPr wrap="square" lIns="0" tIns="0" rIns="0" bIns="0" rtlCol="0" anchor="t"/>
-          <a:lstStyle/>
-          <a:p>
-            <a:pPr algn="ctr" indent="0" marL="0">
-              <a:buNone/>
-            </a:pPr>
-            <a:r>
-              <a:rPr lang="en-US" sz="1000" dirty="0">
-                <a:solidFill>
-                  <a:srgbClr val="0F6E56"/>
-                </a:solidFill>
-                <a:latin typeface="Calibri" pitchFamily="34" charset="0"/>
-                <a:ea typeface="Calibri" pitchFamily="34" charset="-122"/>
-                <a:cs typeface="Calibri" pitchFamily="34" charset="-120"/>
-              </a:rPr>
-              <a:t>Own loop + state</a:t>
-            </a:r>
-            <a:endParaRPr lang="en-US" sz="1000" dirty="0"/>
-          </a:p>
-        </p:txBody>
-      </p:sp>
-      <p:sp>
-        <p:nvSpPr>
-          <p:cNvPr id="17" name="Text 15"/>
-          <p:cNvSpPr/>
-          <p:nvPr/>
-        </p:nvSpPr>
-        <p:spPr>
-          <a:xfrm>
-            <a:off x="7863840" y="2075688"/>
-            <a:ext cx="1613002" cy="1344168"/>
-          </a:xfrm>
-          <a:prstGeom prst="roundRect">
-            <a:avLst>
-              <a:gd name="adj" fmla="val 8163"/>
-            </a:avLst>
-          </a:prstGeom>
-          <a:solidFill>
-            <a:srgbClr val="E1F5EE"/>
-          </a:solidFill>
-          <a:ln w="12700">
-            <a:solidFill>
-              <a:srgbClr val="0F6E56"/>
-            </a:solidFill>
-            <a:prstDash val="dash"/>
-          </a:ln>
-        </p:spPr>
-        <p:txBody>
-          <a:bodyPr wrap="square" lIns="50800" tIns="50800" rIns="50800" bIns="50800" rtlCol="0" anchor="ctr"/>
-          <a:lstStyle/>
-          <a:p>
-            <a:pPr algn="ctr" indent="0" marL="0">
-              <a:buNone/>
-            </a:pPr>
-            <a:endParaRPr lang="en-US" sz="1200" dirty="0"/>
-          </a:p>
-        </p:txBody>
-      </p:sp>
-      <p:sp>
-        <p:nvSpPr>
-          <p:cNvPr id="18" name="Text 16"/>
-          <p:cNvSpPr txBox="1"/>
-          <p:nvPr/>
-        </p:nvSpPr>
-        <p:spPr>
-          <a:xfrm>
-            <a:off x="7863840" y="2147377"/>
-            <a:ext cx="1613002" cy="358445"/>
-          </a:xfrm>
-          <a:prstGeom prst="rect">
-            <a:avLst/>
-          </a:prstGeom>
-          <a:noFill/>
-          <a:ln/>
-        </p:spPr>
-        <p:txBody>
-          <a:bodyPr wrap="square" lIns="0" tIns="0" rIns="0" bIns="0" rtlCol="0" anchor="t"/>
-          <a:lstStyle/>
-          <a:p>
-            <a:pPr algn="ctr" indent="0" marL="0">
-              <a:buNone/>
-            </a:pPr>
-            <a:r>
-              <a:rPr lang="en-US" sz="1100" b="1" dirty="0">
-                <a:solidFill>
-                  <a:srgbClr val="085041"/>
-                </a:solidFill>
-                <a:latin typeface="Calibri" pitchFamily="34" charset="0"/>
-                <a:ea typeface="Calibri" pitchFamily="34" charset="-122"/>
-                <a:cs typeface="Calibri" pitchFamily="34" charset="-120"/>
-              </a:rPr>
-              <a:t>Data</a:t>
-            </a:r>
-            <a:endParaRPr lang="en-US" sz="1400" dirty="0"/>
-          </a:p>
-          <a:p>
-            <a:pPr algn="ctr" indent="0" marL="0">
-              <a:buNone/>
-            </a:pPr>
-            <a:r>
-              <a:rPr lang="en-US" sz="1000" dirty="0">
-                <a:solidFill>
-                  <a:srgbClr val="0F6E56"/>
-                </a:solidFill>
-                <a:latin typeface="Calibri" pitchFamily="34" charset="0"/>
-                <a:ea typeface="Calibri" pitchFamily="34" charset="-122"/>
-                <a:cs typeface="Calibri" pitchFamily="34" charset="-120"/>
-              </a:rPr>
-              <a:t>subgraph</a:t>
-            </a:r>
-            <a:endParaRPr lang="en-US" sz="1400" dirty="0"/>
-          </a:p>
-        </p:txBody>
-      </p:sp>
-      <p:sp>
-        <p:nvSpPr>
-          <p:cNvPr id="19" name="Text 17"/>
-          <p:cNvSpPr/>
-          <p:nvPr/>
-        </p:nvSpPr>
-        <p:spPr>
-          <a:xfrm>
-            <a:off x="7998257" y="2577511"/>
-            <a:ext cx="591434" cy="358445"/>
-          </a:xfrm>
-          <a:prstGeom prst="roundRect">
-            <a:avLst>
-              <a:gd name="adj" fmla="val 20408"/>
-            </a:avLst>
-          </a:prstGeom>
-          <a:solidFill>
-            <a:srgbClr val="F1EFE8"/>
-          </a:solidFill>
-          <a:ln w="12700">
-            <a:solidFill>
-              <a:srgbClr val="888780"/>
-            </a:solidFill>
-            <a:prstDash val="solid"/>
-          </a:ln>
-        </p:spPr>
-        <p:txBody>
-          <a:bodyPr wrap="square" lIns="50800" tIns="50800" rIns="50800" bIns="50800" rtlCol="0" anchor="ctr"/>
-          <a:lstStyle/>
-          <a:p>
-            <a:pPr algn="ctr" indent="0" marL="0">
-              <a:buNone/>
-            </a:pPr>
-            <a:r>
-              <a:rPr lang="en-US" sz="1000" dirty="0">
-                <a:solidFill>
-                  <a:srgbClr val="2C2C2A"/>
-                </a:solidFill>
-                <a:latin typeface="Calibri" pitchFamily="34" charset="0"/>
-                <a:ea typeface="Calibri" pitchFamily="34" charset="-122"/>
-                <a:cs typeface="Calibri" pitchFamily="34" charset="-120"/>
-              </a:rPr>
-              <a:t>LLM</a:t>
-            </a:r>
-            <a:endParaRPr lang="en-US" sz="1000" dirty="0"/>
-          </a:p>
-        </p:txBody>
-      </p:sp>
-      <p:sp>
-        <p:nvSpPr>
-          <p:cNvPr id="20" name="Text 18"/>
-          <p:cNvSpPr/>
-          <p:nvPr/>
-        </p:nvSpPr>
-        <p:spPr>
-          <a:xfrm>
-            <a:off x="8750991" y="2577511"/>
-            <a:ext cx="591434" cy="358445"/>
-          </a:xfrm>
-          <a:prstGeom prst="roundRect">
-            <a:avLst>
-              <a:gd name="adj" fmla="val 20408"/>
-            </a:avLst>
-          </a:prstGeom>
-          <a:solidFill>
-            <a:srgbClr val="F1EFE8"/>
-          </a:solidFill>
-          <a:ln w="12700">
-            <a:solidFill>
-              <a:srgbClr val="888780"/>
-            </a:solidFill>
-            <a:prstDash val="solid"/>
-          </a:ln>
-        </p:spPr>
-        <p:txBody>
-          <a:bodyPr wrap="square" lIns="50800" tIns="50800" rIns="50800" bIns="50800" rtlCol="0" anchor="ctr"/>
-          <a:lstStyle/>
-          <a:p>
-            <a:pPr algn="ctr" indent="0" marL="0">
-              <a:buNone/>
-            </a:pPr>
-            <a:r>
-              <a:rPr lang="en-US" sz="1000" dirty="0">
-                <a:solidFill>
-                  <a:srgbClr val="2C2C2A"/>
-                </a:solidFill>
-                <a:latin typeface="Calibri" pitchFamily="34" charset="0"/>
-                <a:ea typeface="Calibri" pitchFamily="34" charset="-122"/>
-                <a:cs typeface="Calibri" pitchFamily="34" charset="-120"/>
-              </a:rPr>
-              <a:t>Tools</a:t>
-            </a:r>
-            <a:endParaRPr lang="en-US" sz="1000" dirty="0"/>
-          </a:p>
-        </p:txBody>
-      </p:sp>
-      <p:sp>
-        <p:nvSpPr>
-          <p:cNvPr id="21" name="Shape 19"/>
-          <p:cNvSpPr/>
-          <p:nvPr/>
-        </p:nvSpPr>
-        <p:spPr>
-          <a:xfrm>
-            <a:off x="8598652" y="2756733"/>
-            <a:ext cx="143378" cy="914"/>
-          </a:xfrm>
-          <a:prstGeom prst="line">
-            <a:avLst/>
-          </a:prstGeom>
-          <a:noFill/>
-          <a:ln w="12700">
-            <a:solidFill>
-              <a:srgbClr val="5F5E5A"/>
-            </a:solidFill>
-            <a:prstDash val="solid"/>
-            <a:headEnd type="triangle"/>
-            <a:tailEnd type="triangle"/>
-          </a:ln>
-        </p:spPr>
-      </p:sp>
-      <p:sp>
-        <p:nvSpPr>
-          <p:cNvPr id="22" name="Text 20"/>
-          <p:cNvSpPr txBox="1"/>
-          <p:nvPr/>
-        </p:nvSpPr>
-        <p:spPr>
-          <a:xfrm>
-            <a:off x="7863840" y="3097256"/>
-            <a:ext cx="1613002" cy="201168"/>
-          </a:xfrm>
-          <a:prstGeom prst="rect">
-            <a:avLst/>
-          </a:prstGeom>
-          <a:noFill/>
-          <a:ln/>
-        </p:spPr>
-        <p:txBody>
-          <a:bodyPr wrap="square" lIns="0" tIns="0" rIns="0" bIns="0" rtlCol="0" anchor="t"/>
-          <a:lstStyle/>
-          <a:p>
-            <a:pPr algn="ctr" indent="0" marL="0">
-              <a:buNone/>
-            </a:pPr>
-            <a:r>
-              <a:rPr lang="en-US" sz="1000" dirty="0">
-                <a:solidFill>
-                  <a:srgbClr val="0F6E56"/>
-                </a:solidFill>
-                <a:latin typeface="Calibri" pitchFamily="34" charset="0"/>
-                <a:ea typeface="Calibri" pitchFamily="34" charset="-122"/>
-                <a:cs typeface="Calibri" pitchFamily="34" charset="-120"/>
-              </a:rPr>
-              <a:t>Own loop + state</a:t>
-            </a:r>
-            <a:endParaRPr lang="en-US" sz="1000" dirty="0"/>
-          </a:p>
-        </p:txBody>
-      </p:sp>
-      <p:sp>
-        <p:nvSpPr>
-          <p:cNvPr id="23" name="Text 21"/>
-          <p:cNvSpPr/>
-          <p:nvPr/>
-        </p:nvSpPr>
-        <p:spPr>
-          <a:xfrm>
-            <a:off x="9611258" y="2075688"/>
-            <a:ext cx="1613002" cy="1344168"/>
-          </a:xfrm>
-          <a:prstGeom prst="roundRect">
-            <a:avLst>
-              <a:gd name="adj" fmla="val 8163"/>
-            </a:avLst>
-          </a:prstGeom>
-          <a:solidFill>
-            <a:srgbClr val="E1F5EE"/>
-          </a:solidFill>
-          <a:ln w="12700">
-            <a:solidFill>
-              <a:srgbClr val="0F6E56"/>
-            </a:solidFill>
-            <a:prstDash val="dash"/>
-          </a:ln>
-        </p:spPr>
-        <p:txBody>
-          <a:bodyPr wrap="square" lIns="50800" tIns="50800" rIns="50800" bIns="50800" rtlCol="0" anchor="ctr"/>
-          <a:lstStyle/>
-          <a:p>
-            <a:pPr algn="ctr" indent="0" marL="0">
-              <a:buNone/>
-            </a:pPr>
-            <a:endParaRPr lang="en-US" sz="1200" dirty="0"/>
-          </a:p>
-        </p:txBody>
-      </p:sp>
-      <p:sp>
-        <p:nvSpPr>
-          <p:cNvPr id="24" name="Text 22"/>
-          <p:cNvSpPr txBox="1"/>
-          <p:nvPr/>
-        </p:nvSpPr>
-        <p:spPr>
-          <a:xfrm>
-            <a:off x="9611258" y="2147377"/>
-            <a:ext cx="1613002" cy="358445"/>
-          </a:xfrm>
-          <a:prstGeom prst="rect">
-            <a:avLst/>
-          </a:prstGeom>
-          <a:noFill/>
-          <a:ln/>
-        </p:spPr>
-        <p:txBody>
-          <a:bodyPr wrap="square" lIns="0" tIns="0" rIns="0" bIns="0" rtlCol="0" anchor="t"/>
-          <a:lstStyle/>
-          <a:p>
-            <a:pPr algn="ctr" indent="0" marL="0">
-              <a:buNone/>
-            </a:pPr>
-            <a:r>
-              <a:rPr lang="en-US" sz="1100" b="1" dirty="0">
-                <a:solidFill>
-                  <a:srgbClr val="085041"/>
-                </a:solidFill>
-                <a:latin typeface="Calibri" pitchFamily="34" charset="0"/>
-                <a:ea typeface="Calibri" pitchFamily="34" charset="-122"/>
-                <a:cs typeface="Calibri" pitchFamily="34" charset="-120"/>
-              </a:rPr>
-              <a:t>Action</a:t>
-            </a:r>
-            <a:endParaRPr lang="en-US" sz="1400" dirty="0"/>
-          </a:p>
-          <a:p>
-            <a:pPr algn="ctr" indent="0" marL="0">
-              <a:buNone/>
-            </a:pPr>
-            <a:r>
-              <a:rPr lang="en-US" sz="1000" dirty="0">
-                <a:solidFill>
-                  <a:srgbClr val="0F6E56"/>
-                </a:solidFill>
-                <a:latin typeface="Calibri" pitchFamily="34" charset="0"/>
-                <a:ea typeface="Calibri" pitchFamily="34" charset="-122"/>
-                <a:cs typeface="Calibri" pitchFamily="34" charset="-120"/>
-              </a:rPr>
-              <a:t>subgraph</a:t>
-            </a:r>
-            <a:endParaRPr lang="en-US" sz="1400" dirty="0"/>
-          </a:p>
-        </p:txBody>
-      </p:sp>
-      <p:sp>
-        <p:nvSpPr>
-          <p:cNvPr id="25" name="Text 23"/>
-          <p:cNvSpPr/>
-          <p:nvPr/>
-        </p:nvSpPr>
-        <p:spPr>
-          <a:xfrm>
-            <a:off x="9745675" y="2577511"/>
-            <a:ext cx="591434" cy="358445"/>
-          </a:xfrm>
-          <a:prstGeom prst="roundRect">
-            <a:avLst>
-              <a:gd name="adj" fmla="val 20408"/>
-            </a:avLst>
-          </a:prstGeom>
-          <a:solidFill>
-            <a:srgbClr val="F1EFE8"/>
-          </a:solidFill>
-          <a:ln w="12700">
-            <a:solidFill>
-              <a:srgbClr val="888780"/>
-            </a:solidFill>
-            <a:prstDash val="solid"/>
-          </a:ln>
-        </p:spPr>
-        <p:txBody>
-          <a:bodyPr wrap="square" lIns="50800" tIns="50800" rIns="50800" bIns="50800" rtlCol="0" anchor="ctr"/>
-          <a:lstStyle/>
-          <a:p>
-            <a:pPr algn="ctr" indent="0" marL="0">
-              <a:buNone/>
-            </a:pPr>
-            <a:r>
-              <a:rPr lang="en-US" sz="1000" dirty="0">
-                <a:solidFill>
-                  <a:srgbClr val="2C2C2A"/>
-                </a:solidFill>
-                <a:latin typeface="Calibri" pitchFamily="34" charset="0"/>
-                <a:ea typeface="Calibri" pitchFamily="34" charset="-122"/>
-                <a:cs typeface="Calibri" pitchFamily="34" charset="-120"/>
-              </a:rPr>
-              <a:t>LLM</a:t>
-            </a:r>
-            <a:endParaRPr lang="en-US" sz="1000" dirty="0"/>
-          </a:p>
-        </p:txBody>
-      </p:sp>
-      <p:sp>
-        <p:nvSpPr>
-          <p:cNvPr id="26" name="Text 24"/>
-          <p:cNvSpPr/>
-          <p:nvPr/>
-        </p:nvSpPr>
-        <p:spPr>
-          <a:xfrm>
-            <a:off x="10498409" y="2577511"/>
-            <a:ext cx="591434" cy="358445"/>
-          </a:xfrm>
-          <a:prstGeom prst="roundRect">
-            <a:avLst>
-              <a:gd name="adj" fmla="val 20408"/>
-            </a:avLst>
-          </a:prstGeom>
-          <a:solidFill>
-            <a:srgbClr val="F1EFE8"/>
-          </a:solidFill>
-          <a:ln w="12700">
-            <a:solidFill>
-              <a:srgbClr val="888780"/>
-            </a:solidFill>
-            <a:prstDash val="solid"/>
-          </a:ln>
-        </p:spPr>
-        <p:txBody>
-          <a:bodyPr wrap="square" lIns="50800" tIns="50800" rIns="50800" bIns="50800" rtlCol="0" anchor="ctr"/>
-          <a:lstStyle/>
-          <a:p>
-            <a:pPr algn="ctr" indent="0" marL="0">
-              <a:buNone/>
-            </a:pPr>
-            <a:r>
-              <a:rPr lang="en-US" sz="1000" dirty="0">
-                <a:solidFill>
-                  <a:srgbClr val="2C2C2A"/>
-                </a:solidFill>
-                <a:latin typeface="Calibri" pitchFamily="34" charset="0"/>
-                <a:ea typeface="Calibri" pitchFamily="34" charset="-122"/>
-                <a:cs typeface="Calibri" pitchFamily="34" charset="-120"/>
-              </a:rPr>
-              <a:t>Tools</a:t>
-            </a:r>
-            <a:endParaRPr lang="en-US" sz="1000" dirty="0"/>
-          </a:p>
-        </p:txBody>
-      </p:sp>
-      <p:sp>
-        <p:nvSpPr>
-          <p:cNvPr id="27" name="Shape 25"/>
-          <p:cNvSpPr/>
-          <p:nvPr/>
-        </p:nvSpPr>
-        <p:spPr>
-          <a:xfrm>
-            <a:off x="10346070" y="2756733"/>
-            <a:ext cx="143378" cy="914"/>
-          </a:xfrm>
-          <a:prstGeom prst="line">
-            <a:avLst/>
-          </a:prstGeom>
-          <a:noFill/>
-          <a:ln w="12700">
-            <a:solidFill>
-              <a:srgbClr val="5F5E5A"/>
-            </a:solidFill>
-            <a:prstDash val="solid"/>
-            <a:headEnd type="triangle"/>
-            <a:tailEnd type="triangle"/>
-          </a:ln>
-        </p:spPr>
-      </p:sp>
-      <p:sp>
-        <p:nvSpPr>
-          <p:cNvPr id="28" name="Text 26"/>
-          <p:cNvSpPr txBox="1"/>
-          <p:nvPr/>
-        </p:nvSpPr>
-        <p:spPr>
-          <a:xfrm>
-            <a:off x="9611258" y="3097256"/>
-            <a:ext cx="1613002" cy="201168"/>
-          </a:xfrm>
-          <a:prstGeom prst="rect">
-            <a:avLst/>
-          </a:prstGeom>
-          <a:noFill/>
-          <a:ln/>
-        </p:spPr>
-        <p:txBody>
-          <a:bodyPr wrap="square" lIns="0" tIns="0" rIns="0" bIns="0" rtlCol="0" anchor="t"/>
-          <a:lstStyle/>
-          <a:p>
-            <a:pPr algn="ctr" indent="0" marL="0">
-              <a:buNone/>
-            </a:pPr>
-            <a:r>
-              <a:rPr lang="en-US" sz="1000" dirty="0">
-                <a:solidFill>
-                  <a:srgbClr val="0F6E56"/>
-                </a:solidFill>
-                <a:latin typeface="Calibri" pitchFamily="34" charset="0"/>
-                <a:ea typeface="Calibri" pitchFamily="34" charset="-122"/>
-                <a:cs typeface="Calibri" pitchFamily="34" charset="-120"/>
-              </a:rPr>
-              <a:t>Own loop + state</a:t>
-            </a:r>
-            <a:endParaRPr lang="en-US" sz="1000" dirty="0"/>
-          </a:p>
-        </p:txBody>
-      </p:sp>
-      <p:sp>
-        <p:nvSpPr>
-          <p:cNvPr id="29" name="Shape 27"/>
-          <p:cNvSpPr/>
-          <p:nvPr/>
-        </p:nvSpPr>
-        <p:spPr>
-          <a:xfrm>
-            <a:off x="7057339" y="3419856"/>
-            <a:ext cx="1164946" cy="250911"/>
-          </a:xfrm>
-          <a:prstGeom prst="line">
-            <a:avLst/>
-          </a:prstGeom>
-          <a:noFill/>
-          <a:ln w="15875">
-            <a:solidFill>
-              <a:srgbClr val="5F5E5A"/>
-            </a:solidFill>
-            <a:prstDash val="solid"/>
-            <a:tailEnd type="triangle"/>
-          </a:ln>
-        </p:spPr>
-      </p:sp>
-      <p:sp>
-        <p:nvSpPr>
-          <p:cNvPr id="30" name="Shape 28"/>
-          <p:cNvSpPr/>
-          <p:nvPr/>
-        </p:nvSpPr>
-        <p:spPr>
-          <a:xfrm>
-            <a:off x="8670341" y="3419856"/>
-            <a:ext cx="914" cy="250911"/>
-          </a:xfrm>
-          <a:prstGeom prst="line">
-            <a:avLst/>
-          </a:prstGeom>
-          <a:noFill/>
-          <a:ln w="15875">
-            <a:solidFill>
-              <a:srgbClr val="5F5E5A"/>
-            </a:solidFill>
-            <a:prstDash val="solid"/>
-            <a:tailEnd type="triangle"/>
-          </a:ln>
-        </p:spPr>
-      </p:sp>
-      <p:sp>
-        <p:nvSpPr>
-          <p:cNvPr id="31" name="Shape 29"/>
-          <p:cNvSpPr/>
-          <p:nvPr/>
-        </p:nvSpPr>
-        <p:spPr>
-          <a:xfrm flipH="1">
-            <a:off x="9118397" y="3419856"/>
-            <a:ext cx="1164946" cy="250911"/>
-          </a:xfrm>
-          <a:prstGeom prst="line">
-            <a:avLst/>
-          </a:prstGeom>
-          <a:noFill/>
-          <a:ln w="15875">
-            <a:solidFill>
-              <a:srgbClr val="5F5E5A"/>
-            </a:solidFill>
-            <a:prstDash val="solid"/>
-            <a:tailEnd type="triangle"/>
-          </a:ln>
-        </p:spPr>
-      </p:sp>
-      <p:sp>
-        <p:nvSpPr>
-          <p:cNvPr id="32" name="Text 30"/>
-          <p:cNvSpPr/>
-          <p:nvPr/>
-        </p:nvSpPr>
-        <p:spPr>
-          <a:xfrm>
-            <a:off x="7684618" y="3688690"/>
-            <a:ext cx="1971446" cy="483900"/>
-          </a:xfrm>
-          <a:prstGeom prst="roundRect">
-            <a:avLst>
-              <a:gd name="adj" fmla="val 15117"/>
-            </a:avLst>
-          </a:prstGeom>
-          <a:solidFill>
-            <a:srgbClr val="EEEDFE"/>
-          </a:solidFill>
-          <a:ln w="12700">
-            <a:solidFill>
-              <a:srgbClr val="534AB7"/>
-            </a:solidFill>
-            <a:prstDash val="solid"/>
-          </a:ln>
-        </p:spPr>
-        <p:txBody>
-          <a:bodyPr wrap="square" lIns="50800" tIns="50800" rIns="50800" bIns="50800" rtlCol="0" anchor="ctr"/>
-          <a:lstStyle/>
-          <a:p>
-            <a:pPr algn="ctr" indent="0" marL="0">
-              <a:buNone/>
-            </a:pPr>
-            <a:r>
-              <a:rPr lang="en-US" sz="1100" b="1" dirty="0">
-                <a:solidFill>
-                  <a:srgbClr val="3C3489"/>
-                </a:solidFill>
-                <a:latin typeface="Calibri" pitchFamily="34" charset="0"/>
-                <a:ea typeface="Calibri" pitchFamily="34" charset="-122"/>
-                <a:cs typeface="Calibri" pitchFamily="34" charset="-120"/>
-              </a:rPr>
-              <a:t>Checker</a:t>
-            </a:r>
-            <a:endParaRPr lang="en-US" sz="1200" dirty="0"/>
-          </a:p>
-          <a:p>
-            <a:pPr algn="ctr" indent="0" marL="0">
-              <a:buNone/>
-            </a:pPr>
-            <a:r>
-              <a:rPr lang="en-US" sz="1000" dirty="0">
-                <a:solidFill>
-                  <a:srgbClr val="534AB7"/>
-                </a:solidFill>
-                <a:latin typeface="Calibri" pitchFamily="34" charset="0"/>
-                <a:ea typeface="Calibri" pitchFamily="34" charset="-122"/>
-                <a:cs typeface="Calibri" pitchFamily="34" charset="-120"/>
-              </a:rPr>
-              <a:t>Verifies the result</a:t>
-            </a:r>
-            <a:endParaRPr lang="en-US" sz="1200" dirty="0"/>
-          </a:p>
-        </p:txBody>
-      </p:sp>
-      <p:sp>
-        <p:nvSpPr>
-          <p:cNvPr id="33" name="Shape 31"/>
-          <p:cNvSpPr/>
-          <p:nvPr/>
-        </p:nvSpPr>
-        <p:spPr>
-          <a:xfrm>
-            <a:off x="8670341" y="4172590"/>
-            <a:ext cx="914" cy="394289"/>
-          </a:xfrm>
-          <a:prstGeom prst="line">
-            <a:avLst/>
-          </a:prstGeom>
-          <a:noFill/>
-          <a:ln w="15875">
-            <a:solidFill>
-              <a:srgbClr val="5F5E5A"/>
-            </a:solidFill>
-            <a:prstDash val="solid"/>
-            <a:tailEnd type="triangle"/>
-          </a:ln>
-        </p:spPr>
-      </p:sp>
-      <p:sp>
-        <p:nvSpPr>
-          <p:cNvPr id="34" name="Text 32"/>
-          <p:cNvSpPr/>
-          <p:nvPr/>
-        </p:nvSpPr>
-        <p:spPr>
-          <a:xfrm>
-            <a:off x="7953451" y="4584802"/>
-            <a:ext cx="1433779" cy="394289"/>
-          </a:xfrm>
-          <a:prstGeom prst="roundRect">
-            <a:avLst>
-              <a:gd name="adj" fmla="val 18553"/>
-            </a:avLst>
-          </a:prstGeom>
-          <a:solidFill>
-            <a:srgbClr val="F1EFE8"/>
-          </a:solidFill>
-          <a:ln w="12700">
-            <a:solidFill>
-              <a:srgbClr val="888780"/>
-            </a:solidFill>
-            <a:prstDash val="solid"/>
-          </a:ln>
-        </p:spPr>
-        <p:txBody>
-          <a:bodyPr wrap="square" lIns="50800" tIns="50800" rIns="50800" bIns="50800" rtlCol="0" anchor="ctr"/>
-          <a:lstStyle/>
-          <a:p>
-            <a:pPr algn="ctr" indent="0" marL="0">
-              <a:buNone/>
-            </a:pPr>
-            <a:r>
-              <a:rPr lang="en-US" sz="1100" b="1" dirty="0">
-                <a:solidFill>
-                  <a:srgbClr val="2C2C2A"/>
-                </a:solidFill>
-                <a:latin typeface="Calibri" pitchFamily="34" charset="0"/>
-                <a:ea typeface="Calibri" pitchFamily="34" charset="-122"/>
-                <a:cs typeface="Calibri" pitchFamily="34" charset="-120"/>
-              </a:rPr>
-              <a:t>Final answer</a:t>
-            </a:r>
-            <a:endParaRPr lang="en-US" sz="1100" dirty="0"/>
-          </a:p>
-        </p:txBody>
-      </p:sp>
-      <p:sp>
-        <p:nvSpPr>
-          <p:cNvPr id="35" name="Text 33"/>
-          <p:cNvSpPr txBox="1"/>
-          <p:nvPr/>
-        </p:nvSpPr>
-        <p:spPr>
-          <a:xfrm>
-            <a:off x="5892394" y="5122469"/>
-            <a:ext cx="5555894" cy="228600"/>
-          </a:xfrm>
-          <a:prstGeom prst="rect">
-            <a:avLst/>
-          </a:prstGeom>
-          <a:noFill/>
-          <a:ln/>
-        </p:spPr>
-        <p:txBody>
-          <a:bodyPr wrap="square" lIns="0" tIns="0" rIns="0" bIns="0" rtlCol="0" anchor="t"/>
-          <a:lstStyle/>
-          <a:p>
-            <a:pPr algn="ctr" indent="0" marL="0">
-              <a:buNone/>
-            </a:pPr>
-            <a:r>
-              <a:rPr lang="en-US" sz="1000" dirty="0">
-                <a:solidFill>
-                  <a:srgbClr val="5F5E5A"/>
-                </a:solidFill>
-                <a:latin typeface="Calibri" pitchFamily="34" charset="0"/>
-                <a:ea typeface="Calibri" pitchFamily="34" charset="-122"/>
-                <a:cs typeface="Calibri" pitchFamily="34" charset="-120"/>
-              </a:rPr>
-              <a:t>Purple: control nodes  ·  Dashed teal: subgraphs</a:t>
-            </a:r>
-            <a:endParaRPr lang="en-US" sz="1000" dirty="0"/>
+        </p:txBody>
+      </p:sp>
+      <p:sp>
+        <p:nvSpPr>
+          <p:cNvPr id="25" name="Slide Number Placeholder 0"/>
+          <p:cNvSpPr>
+            <a:spLocks noGrp="1"/>
+          </p:cNvSpPr>
+          <p:nvPr>
+            <p:ph type="sldNum" sz="quarter" idx="4294967295"/>
+          </p:nvPr>
+        </p:nvSpPr>
+        <p:spPr>
+          <a:xfrm>
+            <a:off x="5641848" y="6382512"/>
+            <a:ext cx="914400" cy="201168"/>
+          </a:xfrm>
+          <a:prstGeom prst="rect">
+            <a:avLst/>
+          </a:prstGeom>
+          <a:extLst>
+            <a:ext uri="{C572A759-6A51-4108-AA02-DFA0A04FC94B}">
+              <ma14:wrappingTextBoxFlag xmlns:ma14="http://schemas.microsoft.com/office/mac/drawingml/2011/main" val="0"/>
+            </a:ext>
+          </a:extLst>
+        </p:spPr>
+        <p:txBody>
+          <a:bodyPr/>
+          <a:lstStyle>
+            <a:lvl1pPr>
+              <a:defRPr sz="1000">
+                <a:solidFill>
+                  <a:srgbClr val="595959"/>
+                </a:solidFill>
+                <a:latin typeface="Arial"/>
+                <a:ea typeface="Arial"/>
+                <a:cs typeface="Arial"/>
+              </a:defRPr>
+            </a:lvl1pPr>
+          </a:lstStyle>
+          <a:p>
+            <a:pPr algn="ctr"/>
+            <a:fld id="{F7021451-1387-4CA6-816F-3879F97B5CBC}" type="slidenum">
+              <a:rPr b="0" lang="en-US"/>
+              <a:t>1</a:t>
+            </a:fld>
+            <a:endParaRPr lang="en-US"/>
           </a:p>
         </p:txBody>
       </p:sp>
@@ -3101,8 +4935,8 @@
         </p:nvSpPr>
         <p:spPr>
           <a:xfrm>
-            <a:off x="502920" y="292608"/>
-            <a:ext cx="11155680" cy="640080"/>
+            <a:off x="411480" y="201168"/>
+            <a:ext cx="11338560" cy="530352"/>
           </a:xfrm>
           <a:prstGeom prst="rect">
             <a:avLst/>
@@ -3111,36 +4945,137 @@
           <a:ln/>
         </p:spPr>
         <p:txBody>
-          <a:bodyPr wrap="square" lIns="0" tIns="0" rIns="0" bIns="0" rtlCol="0" anchor="t"/>
+          <a:bodyPr wrap="square" lIns="0" tIns="0" rIns="0" bIns="0" rtlCol="0" anchor="b"/>
           <a:lstStyle/>
           <a:p>
             <a:pPr algn="l" indent="0" marL="0">
               <a:buNone/>
             </a:pPr>
             <a:r>
-              <a:rPr lang="en-US" sz="3000" b="1" dirty="0">
-                <a:solidFill>
-                  <a:srgbClr val="2C2C2A"/>
+              <a:rPr lang="en-US" sz="2600" b="1" dirty="0">
+                <a:solidFill>
+                  <a:srgbClr val="1A1A1A"/>
                 </a:solidFill>
                 <a:latin typeface="Calibri" pitchFamily="34" charset="0"/>
                 <a:ea typeface="Calibri" pitchFamily="34" charset="-122"/>
                 <a:cs typeface="Calibri" pitchFamily="34" charset="-120"/>
               </a:rPr>
-              <a:t>Thinking + Acting + Checking Are Mixed Together</a:t>
-            </a:r>
-            <a:endParaRPr lang="en-US" sz="3000" dirty="0"/>
-          </a:p>
-        </p:txBody>
-      </p:sp>
-      <p:sp>
-        <p:nvSpPr>
-          <p:cNvPr id="3" name="!!hdm"/>
+              <a:t>Why Single Agents Fail – Part 2</a:t>
+            </a:r>
+            <a:endParaRPr lang="en-US" sz="2600" dirty="0"/>
+          </a:p>
+        </p:txBody>
+      </p:sp>
+      <p:sp>
+        <p:nvSpPr>
+          <p:cNvPr id="3" name="!!rule"/>
+          <p:cNvSpPr/>
+          <p:nvPr/>
+        </p:nvSpPr>
+        <p:spPr>
+          <a:xfrm>
+            <a:off x="411480" y="804672"/>
+            <a:ext cx="11365992" cy="914"/>
+          </a:xfrm>
+          <a:prstGeom prst="line">
+            <a:avLst/>
+          </a:prstGeom>
+          <a:noFill/>
+          <a:ln w="9525">
+            <a:solidFill>
+              <a:srgbClr val="7F7F7F"/>
+            </a:solidFill>
+            <a:prstDash val="solid"/>
+          </a:ln>
+        </p:spPr>
+      </p:sp>
+      <p:sp>
+        <p:nvSpPr>
+          <p:cNvPr id="4" name="!!lead"/>
           <p:cNvSpPr txBox="1"/>
           <p:nvPr/>
         </p:nvSpPr>
         <p:spPr>
           <a:xfrm>
-            <a:off x="548640" y="1024128"/>
+            <a:off x="411480" y="886968"/>
+            <a:ext cx="11338560" cy="438912"/>
+          </a:xfrm>
+          <a:prstGeom prst="rect">
+            <a:avLst/>
+          </a:prstGeom>
+          <a:noFill/>
+          <a:ln/>
+        </p:spPr>
+        <p:txBody>
+          <a:bodyPr wrap="square" lIns="0" tIns="0" rIns="0" bIns="0" rtlCol="0" anchor="t"/>
+          <a:lstStyle/>
+          <a:p>
+            <a:pPr indent="0" marL="0">
+              <a:buNone/>
+            </a:pPr>
+            <a:r>
+              <a:rPr lang="en-US" sz="1400" dirty="0">
+                <a:solidFill>
+                  <a:srgbClr val="404040"/>
+                </a:solidFill>
+                <a:latin typeface="Arial" pitchFamily="34" charset="0"/>
+                <a:ea typeface="Arial" pitchFamily="34" charset="-122"/>
+                <a:cs typeface="Arial" pitchFamily="34" charset="-120"/>
+              </a:rPr>
+              <a:t>Thinking, acting and checking are mixed together in one loop. Sort the same messages by job and three separate responsibilities appear.</a:t>
+            </a:r>
+            <a:endParaRPr lang="en-US" sz="1400" dirty="0"/>
+          </a:p>
+        </p:txBody>
+      </p:sp>
+      <p:sp>
+        <p:nvSpPr>
+          <p:cNvPr id="5" name="!!restricted"/>
+          <p:cNvSpPr txBox="1"/>
+          <p:nvPr/>
+        </p:nvSpPr>
+        <p:spPr>
+          <a:xfrm>
+            <a:off x="5184648" y="6556248"/>
+            <a:ext cx="1828800" cy="201168"/>
+          </a:xfrm>
+          <a:prstGeom prst="rect">
+            <a:avLst/>
+          </a:prstGeom>
+          <a:noFill/>
+          <a:ln/>
+        </p:spPr>
+        <p:txBody>
+          <a:bodyPr wrap="square" lIns="0" tIns="0" rIns="0" bIns="0" rtlCol="0" anchor="ctr"/>
+          <a:lstStyle/>
+          <a:p>
+            <a:pPr algn="ctr" indent="0" marL="0">
+              <a:buNone/>
+            </a:pPr>
+            <a:r>
+              <a:rPr lang="en-US" sz="800" dirty="0">
+                <a:solidFill>
+                  <a:srgbClr val="7F7F7F"/>
+                </a:solidFill>
+                <a:latin typeface="Arial" pitchFamily="34" charset="0"/>
+                <a:ea typeface="Arial" pitchFamily="34" charset="-122"/>
+                <a:cs typeface="Arial" pitchFamily="34" charset="-120"/>
+              </a:rPr>
+              <a:t>RESTRICTED</a:t>
+            </a:r>
+            <a:endParaRPr lang="en-US" sz="800" dirty="0"/>
+          </a:p>
+        </p:txBody>
+      </p:sp>
+      <p:sp>
+        <p:nvSpPr>
+          <p:cNvPr id="6" name="!!hdm"/>
+          <p:cNvSpPr txBox="1"/>
+          <p:nvPr/>
+        </p:nvSpPr>
+        <p:spPr>
+          <a:xfrm>
+            <a:off x="548640" y="1344168"/>
             <a:ext cx="6949440" cy="274320"/>
           </a:xfrm>
           <a:prstGeom prst="rect">
@@ -3173,18 +5108,18 @@
       </p:sp>
       <p:sp>
         <p:nvSpPr>
-          <p:cNvPr id="4" name="!!blk01"/>
+          <p:cNvPr id="7" name="!!blk01"/>
           <p:cNvSpPr/>
           <p:nvPr/>
         </p:nvSpPr>
         <p:spPr>
           <a:xfrm>
-            <a:off x="548640" y="1371600"/>
-            <a:ext cx="6949440" cy="246888"/>
+            <a:off x="548640" y="1645920"/>
+            <a:ext cx="6949440" cy="228600"/>
           </a:xfrm>
           <a:prstGeom prst="roundRect">
             <a:avLst>
-              <a:gd name="adj" fmla="val 18519"/>
+              <a:gd name="adj" fmla="val 20000"/>
             </a:avLst>
           </a:prstGeom>
           <a:solidFill>
@@ -3221,14 +5156,14 @@
       </p:sp>
       <p:sp>
         <p:nvSpPr>
-          <p:cNvPr id="5" name="!!tag01"/>
+          <p:cNvPr id="8" name="!!tag01"/>
           <p:cNvSpPr txBox="1"/>
           <p:nvPr/>
         </p:nvSpPr>
         <p:spPr>
           <a:xfrm>
-            <a:off x="6035040" y="1371600"/>
-            <a:ext cx="1371600" cy="246888"/>
+            <a:off x="6035040" y="1645920"/>
+            <a:ext cx="1371600" cy="228600"/>
           </a:xfrm>
           <a:prstGeom prst="rect">
             <a:avLst/>
@@ -3260,18 +5195,18 @@
       </p:sp>
       <p:sp>
         <p:nvSpPr>
-          <p:cNvPr id="6" name="!!blk02"/>
+          <p:cNvPr id="9" name="!!blk02"/>
           <p:cNvSpPr/>
           <p:nvPr/>
         </p:nvSpPr>
         <p:spPr>
           <a:xfrm>
-            <a:off x="548640" y="1668780"/>
-            <a:ext cx="6949440" cy="246888"/>
+            <a:off x="548640" y="1915668"/>
+            <a:ext cx="6949440" cy="228600"/>
           </a:xfrm>
           <a:prstGeom prst="roundRect">
             <a:avLst>
-              <a:gd name="adj" fmla="val 18519"/>
+              <a:gd name="adj" fmla="val 20000"/>
             </a:avLst>
           </a:prstGeom>
           <a:solidFill>
@@ -3308,14 +5243,14 @@
       </p:sp>
       <p:sp>
         <p:nvSpPr>
-          <p:cNvPr id="7" name="!!tag02"/>
+          <p:cNvPr id="10" name="!!tag02"/>
           <p:cNvSpPr txBox="1"/>
           <p:nvPr/>
         </p:nvSpPr>
         <p:spPr>
           <a:xfrm>
-            <a:off x="6035040" y="1668780"/>
-            <a:ext cx="1371600" cy="246888"/>
+            <a:off x="6035040" y="1915668"/>
+            <a:ext cx="1371600" cy="228600"/>
           </a:xfrm>
           <a:prstGeom prst="rect">
             <a:avLst/>
@@ -3347,18 +5282,18 @@
       </p:sp>
       <p:sp>
         <p:nvSpPr>
-          <p:cNvPr id="8" name="!!blk03"/>
+          <p:cNvPr id="11" name="!!blk03"/>
           <p:cNvSpPr/>
           <p:nvPr/>
         </p:nvSpPr>
         <p:spPr>
           <a:xfrm>
-            <a:off x="548640" y="1965960"/>
-            <a:ext cx="6949440" cy="548640"/>
+            <a:off x="548640" y="2185416"/>
+            <a:ext cx="6949440" cy="457200"/>
           </a:xfrm>
           <a:prstGeom prst="roundRect">
             <a:avLst>
-              <a:gd name="adj" fmla="val 8333"/>
+              <a:gd name="adj" fmla="val 10000"/>
             </a:avLst>
           </a:prstGeom>
           <a:solidFill>
@@ -3395,14 +5330,14 @@
       </p:sp>
       <p:sp>
         <p:nvSpPr>
-          <p:cNvPr id="9" name="!!tag03"/>
+          <p:cNvPr id="12" name="!!tag03"/>
           <p:cNvSpPr txBox="1"/>
           <p:nvPr/>
         </p:nvSpPr>
         <p:spPr>
           <a:xfrm>
-            <a:off x="6035040" y="1965960"/>
-            <a:ext cx="1371600" cy="548640"/>
+            <a:off x="6035040" y="2185416"/>
+            <a:ext cx="1371600" cy="457200"/>
           </a:xfrm>
           <a:prstGeom prst="rect">
             <a:avLst/>
@@ -3434,18 +5369,18 @@
       </p:sp>
       <p:sp>
         <p:nvSpPr>
-          <p:cNvPr id="10" name="!!blk04"/>
+          <p:cNvPr id="13" name="!!blk04"/>
           <p:cNvSpPr/>
           <p:nvPr/>
         </p:nvSpPr>
         <p:spPr>
           <a:xfrm>
-            <a:off x="548640" y="2564892"/>
-            <a:ext cx="6949440" cy="246888"/>
+            <a:off x="548640" y="2683764"/>
+            <a:ext cx="6949440" cy="228600"/>
           </a:xfrm>
           <a:prstGeom prst="roundRect">
             <a:avLst>
-              <a:gd name="adj" fmla="val 18519"/>
+              <a:gd name="adj" fmla="val 20000"/>
             </a:avLst>
           </a:prstGeom>
           <a:solidFill>
@@ -3482,14 +5417,14 @@
       </p:sp>
       <p:sp>
         <p:nvSpPr>
-          <p:cNvPr id="11" name="!!tag04"/>
+          <p:cNvPr id="14" name="!!tag04"/>
           <p:cNvSpPr txBox="1"/>
           <p:nvPr/>
         </p:nvSpPr>
         <p:spPr>
           <a:xfrm>
-            <a:off x="6035040" y="2564892"/>
-            <a:ext cx="1371600" cy="246888"/>
+            <a:off x="6035040" y="2683764"/>
+            <a:ext cx="1371600" cy="228600"/>
           </a:xfrm>
           <a:prstGeom prst="rect">
             <a:avLst/>
@@ -3521,18 +5456,18 @@
       </p:sp>
       <p:sp>
         <p:nvSpPr>
-          <p:cNvPr id="12" name="!!blk05"/>
+          <p:cNvPr id="15" name="!!blk05"/>
           <p:cNvSpPr/>
           <p:nvPr/>
         </p:nvSpPr>
         <p:spPr>
           <a:xfrm>
-            <a:off x="548640" y="2862072"/>
-            <a:ext cx="6949440" cy="246888"/>
+            <a:off x="548640" y="2953512"/>
+            <a:ext cx="6949440" cy="228600"/>
           </a:xfrm>
           <a:prstGeom prst="roundRect">
             <a:avLst>
-              <a:gd name="adj" fmla="val 18519"/>
+              <a:gd name="adj" fmla="val 20000"/>
             </a:avLst>
           </a:prstGeom>
           <a:solidFill>
@@ -3569,14 +5504,14 @@
       </p:sp>
       <p:sp>
         <p:nvSpPr>
-          <p:cNvPr id="13" name="!!tag05"/>
+          <p:cNvPr id="16" name="!!tag05"/>
           <p:cNvSpPr txBox="1"/>
           <p:nvPr/>
         </p:nvSpPr>
         <p:spPr>
           <a:xfrm>
-            <a:off x="6035040" y="2862072"/>
-            <a:ext cx="1371600" cy="246888"/>
+            <a:off x="6035040" y="2953512"/>
+            <a:ext cx="1371600" cy="228600"/>
           </a:xfrm>
           <a:prstGeom prst="rect">
             <a:avLst/>
@@ -3608,18 +5543,18 @@
       </p:sp>
       <p:sp>
         <p:nvSpPr>
-          <p:cNvPr id="14" name="!!blk06"/>
+          <p:cNvPr id="17" name="!!blk06"/>
           <p:cNvSpPr/>
           <p:nvPr/>
         </p:nvSpPr>
         <p:spPr>
           <a:xfrm>
-            <a:off x="548640" y="3159252"/>
-            <a:ext cx="6949440" cy="246888"/>
+            <a:off x="548640" y="3223260"/>
+            <a:ext cx="6949440" cy="228600"/>
           </a:xfrm>
           <a:prstGeom prst="roundRect">
             <a:avLst>
-              <a:gd name="adj" fmla="val 18519"/>
+              <a:gd name="adj" fmla="val 20000"/>
             </a:avLst>
           </a:prstGeom>
           <a:solidFill>
@@ -3656,14 +5591,14 @@
       </p:sp>
       <p:sp>
         <p:nvSpPr>
-          <p:cNvPr id="15" name="!!tag06"/>
+          <p:cNvPr id="18" name="!!tag06"/>
           <p:cNvSpPr txBox="1"/>
           <p:nvPr/>
         </p:nvSpPr>
         <p:spPr>
           <a:xfrm>
-            <a:off x="6035040" y="3159252"/>
-            <a:ext cx="1371600" cy="246888"/>
+            <a:off x="6035040" y="3223260"/>
+            <a:ext cx="1371600" cy="228600"/>
           </a:xfrm>
           <a:prstGeom prst="rect">
             <a:avLst/>
@@ -3695,18 +5630,18 @@
       </p:sp>
       <p:sp>
         <p:nvSpPr>
-          <p:cNvPr id="16" name="!!blk07"/>
+          <p:cNvPr id="19" name="!!blk07"/>
           <p:cNvSpPr/>
           <p:nvPr/>
         </p:nvSpPr>
         <p:spPr>
           <a:xfrm>
-            <a:off x="548640" y="3456432"/>
-            <a:ext cx="6949440" cy="246888"/>
+            <a:off x="548640" y="3493008"/>
+            <a:ext cx="6949440" cy="228600"/>
           </a:xfrm>
           <a:prstGeom prst="roundRect">
             <a:avLst>
-              <a:gd name="adj" fmla="val 18519"/>
+              <a:gd name="adj" fmla="val 20000"/>
             </a:avLst>
           </a:prstGeom>
           <a:solidFill>
@@ -3743,14 +5678,14 @@
       </p:sp>
       <p:sp>
         <p:nvSpPr>
-          <p:cNvPr id="17" name="!!tag07"/>
+          <p:cNvPr id="20" name="!!tag07"/>
           <p:cNvSpPr txBox="1"/>
           <p:nvPr/>
         </p:nvSpPr>
         <p:spPr>
           <a:xfrm>
-            <a:off x="6035040" y="3456432"/>
-            <a:ext cx="1371600" cy="246888"/>
+            <a:off x="6035040" y="3493008"/>
+            <a:ext cx="1371600" cy="228600"/>
           </a:xfrm>
           <a:prstGeom prst="rect">
             <a:avLst/>
@@ -3782,18 +5717,18 @@
       </p:sp>
       <p:sp>
         <p:nvSpPr>
-          <p:cNvPr id="18" name="!!blk08"/>
+          <p:cNvPr id="21" name="!!blk08"/>
           <p:cNvSpPr/>
           <p:nvPr/>
         </p:nvSpPr>
         <p:spPr>
           <a:xfrm>
-            <a:off x="548640" y="3753612"/>
-            <a:ext cx="6949440" cy="246888"/>
+            <a:off x="548640" y="3762756"/>
+            <a:ext cx="6949440" cy="228600"/>
           </a:xfrm>
           <a:prstGeom prst="roundRect">
             <a:avLst>
-              <a:gd name="adj" fmla="val 18519"/>
+              <a:gd name="adj" fmla="val 20000"/>
             </a:avLst>
           </a:prstGeom>
           <a:solidFill>
@@ -3830,14 +5765,14 @@
       </p:sp>
       <p:sp>
         <p:nvSpPr>
-          <p:cNvPr id="19" name="!!tag08"/>
+          <p:cNvPr id="22" name="!!tag08"/>
           <p:cNvSpPr txBox="1"/>
           <p:nvPr/>
         </p:nvSpPr>
         <p:spPr>
           <a:xfrm>
-            <a:off x="6035040" y="3753612"/>
-            <a:ext cx="1371600" cy="246888"/>
+            <a:off x="6035040" y="3762756"/>
+            <a:ext cx="1371600" cy="228600"/>
           </a:xfrm>
           <a:prstGeom prst="rect">
             <a:avLst/>
@@ -3869,18 +5804,18 @@
       </p:sp>
       <p:sp>
         <p:nvSpPr>
-          <p:cNvPr id="20" name="!!blk09"/>
+          <p:cNvPr id="23" name="!!blk09"/>
           <p:cNvSpPr/>
           <p:nvPr/>
         </p:nvSpPr>
         <p:spPr>
           <a:xfrm>
-            <a:off x="548640" y="4050792"/>
-            <a:ext cx="6949440" cy="246888"/>
+            <a:off x="548640" y="4032504"/>
+            <a:ext cx="6949440" cy="228600"/>
           </a:xfrm>
           <a:prstGeom prst="roundRect">
             <a:avLst>
-              <a:gd name="adj" fmla="val 18519"/>
+              <a:gd name="adj" fmla="val 20000"/>
             </a:avLst>
           </a:prstGeom>
           <a:solidFill>
@@ -3917,14 +5852,14 @@
       </p:sp>
       <p:sp>
         <p:nvSpPr>
-          <p:cNvPr id="21" name="!!tag09"/>
+          <p:cNvPr id="24" name="!!tag09"/>
           <p:cNvSpPr txBox="1"/>
           <p:nvPr/>
         </p:nvSpPr>
         <p:spPr>
           <a:xfrm>
-            <a:off x="6035040" y="4050792"/>
-            <a:ext cx="1371600" cy="246888"/>
+            <a:off x="6035040" y="4032504"/>
+            <a:ext cx="1371600" cy="228600"/>
           </a:xfrm>
           <a:prstGeom prst="rect">
             <a:avLst/>
@@ -3956,18 +5891,18 @@
       </p:sp>
       <p:sp>
         <p:nvSpPr>
-          <p:cNvPr id="22" name="!!blk10"/>
+          <p:cNvPr id="25" name="!!blk10"/>
           <p:cNvSpPr/>
           <p:nvPr/>
         </p:nvSpPr>
         <p:spPr>
           <a:xfrm>
-            <a:off x="548640" y="4347972"/>
-            <a:ext cx="6949440" cy="246888"/>
+            <a:off x="548640" y="4302252"/>
+            <a:ext cx="6949440" cy="228600"/>
           </a:xfrm>
           <a:prstGeom prst="roundRect">
             <a:avLst>
-              <a:gd name="adj" fmla="val 18519"/>
+              <a:gd name="adj" fmla="val 20000"/>
             </a:avLst>
           </a:prstGeom>
           <a:solidFill>
@@ -4004,14 +5939,14 @@
       </p:sp>
       <p:sp>
         <p:nvSpPr>
-          <p:cNvPr id="23" name="!!tag10"/>
+          <p:cNvPr id="26" name="!!tag10"/>
           <p:cNvSpPr txBox="1"/>
           <p:nvPr/>
         </p:nvSpPr>
         <p:spPr>
           <a:xfrm>
-            <a:off x="6035040" y="4347972"/>
-            <a:ext cx="1371600" cy="246888"/>
+            <a:off x="6035040" y="4302252"/>
+            <a:ext cx="1371600" cy="228600"/>
           </a:xfrm>
           <a:prstGeom prst="rect">
             <a:avLst/>
@@ -4043,18 +5978,18 @@
       </p:sp>
       <p:sp>
         <p:nvSpPr>
-          <p:cNvPr id="24" name="!!blk11"/>
+          <p:cNvPr id="27" name="!!blk11"/>
           <p:cNvSpPr/>
           <p:nvPr/>
         </p:nvSpPr>
         <p:spPr>
           <a:xfrm>
-            <a:off x="548640" y="4645152"/>
-            <a:ext cx="6949440" cy="246888"/>
+            <a:off x="548640" y="4572000"/>
+            <a:ext cx="6949440" cy="228600"/>
           </a:xfrm>
           <a:prstGeom prst="roundRect">
             <a:avLst>
-              <a:gd name="adj" fmla="val 18519"/>
+              <a:gd name="adj" fmla="val 20000"/>
             </a:avLst>
           </a:prstGeom>
           <a:solidFill>
@@ -4091,14 +6026,14 @@
       </p:sp>
       <p:sp>
         <p:nvSpPr>
-          <p:cNvPr id="25" name="!!tag11"/>
+          <p:cNvPr id="28" name="!!tag11"/>
           <p:cNvSpPr txBox="1"/>
           <p:nvPr/>
         </p:nvSpPr>
         <p:spPr>
           <a:xfrm>
-            <a:off x="6035040" y="4645152"/>
-            <a:ext cx="1371600" cy="246888"/>
+            <a:off x="6035040" y="4572000"/>
+            <a:ext cx="1371600" cy="228600"/>
           </a:xfrm>
           <a:prstGeom prst="rect">
             <a:avLst/>
@@ -4130,18 +6065,18 @@
       </p:sp>
       <p:sp>
         <p:nvSpPr>
-          <p:cNvPr id="26" name="!!blk12"/>
+          <p:cNvPr id="29" name="!!blk12"/>
           <p:cNvSpPr/>
           <p:nvPr/>
         </p:nvSpPr>
         <p:spPr>
           <a:xfrm>
-            <a:off x="548640" y="4942332"/>
-            <a:ext cx="6949440" cy="246888"/>
+            <a:off x="548640" y="4841748"/>
+            <a:ext cx="6949440" cy="228600"/>
           </a:xfrm>
           <a:prstGeom prst="roundRect">
             <a:avLst>
-              <a:gd name="adj" fmla="val 18519"/>
+              <a:gd name="adj" fmla="val 20000"/>
             </a:avLst>
           </a:prstGeom>
           <a:solidFill>
@@ -4178,14 +6113,14 @@
       </p:sp>
       <p:sp>
         <p:nvSpPr>
-          <p:cNvPr id="27" name="!!tag12"/>
+          <p:cNvPr id="30" name="!!tag12"/>
           <p:cNvSpPr txBox="1"/>
           <p:nvPr/>
         </p:nvSpPr>
         <p:spPr>
           <a:xfrm>
-            <a:off x="6035040" y="4942332"/>
-            <a:ext cx="1371600" cy="246888"/>
+            <a:off x="6035040" y="4841748"/>
+            <a:ext cx="1371600" cy="228600"/>
           </a:xfrm>
           <a:prstGeom prst="rect">
             <a:avLst/>
@@ -4217,18 +6152,18 @@
       </p:sp>
       <p:sp>
         <p:nvSpPr>
-          <p:cNvPr id="28" name="!!blk13"/>
+          <p:cNvPr id="31" name="!!blk13"/>
           <p:cNvSpPr/>
           <p:nvPr/>
         </p:nvSpPr>
         <p:spPr>
           <a:xfrm>
-            <a:off x="548640" y="5239512"/>
-            <a:ext cx="6949440" cy="246888"/>
+            <a:off x="548640" y="5111496"/>
+            <a:ext cx="6949440" cy="228600"/>
           </a:xfrm>
           <a:prstGeom prst="roundRect">
             <a:avLst>
-              <a:gd name="adj" fmla="val 18519"/>
+              <a:gd name="adj" fmla="val 20000"/>
             </a:avLst>
           </a:prstGeom>
           <a:solidFill>
@@ -4265,14 +6200,14 @@
       </p:sp>
       <p:sp>
         <p:nvSpPr>
-          <p:cNvPr id="29" name="!!tag13"/>
+          <p:cNvPr id="32" name="!!tag13"/>
           <p:cNvSpPr txBox="1"/>
           <p:nvPr/>
         </p:nvSpPr>
         <p:spPr>
           <a:xfrm>
-            <a:off x="6035040" y="5239512"/>
-            <a:ext cx="1371600" cy="246888"/>
+            <a:off x="6035040" y="5111496"/>
+            <a:ext cx="1371600" cy="228600"/>
           </a:xfrm>
           <a:prstGeom prst="rect">
             <a:avLst/>
@@ -4304,18 +6239,18 @@
       </p:sp>
       <p:sp>
         <p:nvSpPr>
-          <p:cNvPr id="30" name="!!blk14"/>
+          <p:cNvPr id="33" name="!!blk14"/>
           <p:cNvSpPr/>
           <p:nvPr/>
         </p:nvSpPr>
         <p:spPr>
           <a:xfrm>
-            <a:off x="548640" y="5536692"/>
-            <a:ext cx="6949440" cy="246888"/>
+            <a:off x="548640" y="5381244"/>
+            <a:ext cx="6949440" cy="228600"/>
           </a:xfrm>
           <a:prstGeom prst="roundRect">
             <a:avLst>
-              <a:gd name="adj" fmla="val 18519"/>
+              <a:gd name="adj" fmla="val 20000"/>
             </a:avLst>
           </a:prstGeom>
           <a:solidFill>
@@ -4352,14 +6287,14 @@
       </p:sp>
       <p:sp>
         <p:nvSpPr>
-          <p:cNvPr id="31" name="!!tag14"/>
+          <p:cNvPr id="34" name="!!tag14"/>
           <p:cNvSpPr txBox="1"/>
           <p:nvPr/>
         </p:nvSpPr>
         <p:spPr>
           <a:xfrm>
-            <a:off x="6035040" y="5536692"/>
-            <a:ext cx="1371600" cy="246888"/>
+            <a:off x="6035040" y="5381244"/>
+            <a:ext cx="1371600" cy="228600"/>
           </a:xfrm>
           <a:prstGeom prst="rect">
             <a:avLst/>
@@ -4391,18 +6326,18 @@
       </p:sp>
       <p:sp>
         <p:nvSpPr>
-          <p:cNvPr id="32" name="!!blk15"/>
+          <p:cNvPr id="35" name="!!blk15"/>
           <p:cNvSpPr/>
           <p:nvPr/>
         </p:nvSpPr>
         <p:spPr>
           <a:xfrm>
-            <a:off x="548640" y="5833872"/>
-            <a:ext cx="6949440" cy="246888"/>
+            <a:off x="548640" y="5650992"/>
+            <a:ext cx="6949440" cy="228600"/>
           </a:xfrm>
           <a:prstGeom prst="roundRect">
             <a:avLst>
-              <a:gd name="adj" fmla="val 18519"/>
+              <a:gd name="adj" fmla="val 20000"/>
             </a:avLst>
           </a:prstGeom>
           <a:solidFill>
@@ -4439,14 +6374,14 @@
       </p:sp>
       <p:sp>
         <p:nvSpPr>
-          <p:cNvPr id="33" name="!!tag15"/>
+          <p:cNvPr id="36" name="!!tag15"/>
           <p:cNvSpPr txBox="1"/>
           <p:nvPr/>
         </p:nvSpPr>
         <p:spPr>
           <a:xfrm>
-            <a:off x="6035040" y="5833872"/>
-            <a:ext cx="1371600" cy="246888"/>
+            <a:off x="6035040" y="5650992"/>
+            <a:ext cx="1371600" cy="228600"/>
           </a:xfrm>
           <a:prstGeom prst="rect">
             <a:avLst/>
@@ -4478,18 +6413,18 @@
       </p:sp>
       <p:sp>
         <p:nvSpPr>
-          <p:cNvPr id="34" name="!!blk16"/>
+          <p:cNvPr id="37" name="!!blk16"/>
           <p:cNvSpPr/>
           <p:nvPr/>
         </p:nvSpPr>
         <p:spPr>
           <a:xfrm>
-            <a:off x="548640" y="6131052"/>
-            <a:ext cx="6949440" cy="246888"/>
+            <a:off x="548640" y="5920740"/>
+            <a:ext cx="6949440" cy="228600"/>
           </a:xfrm>
           <a:prstGeom prst="roundRect">
             <a:avLst>
-              <a:gd name="adj" fmla="val 18519"/>
+              <a:gd name="adj" fmla="val 20000"/>
             </a:avLst>
           </a:prstGeom>
           <a:solidFill>
@@ -4526,14 +6461,14 @@
       </p:sp>
       <p:sp>
         <p:nvSpPr>
-          <p:cNvPr id="35" name="!!tag16"/>
+          <p:cNvPr id="38" name="!!tag16"/>
           <p:cNvSpPr txBox="1"/>
           <p:nvPr/>
         </p:nvSpPr>
         <p:spPr>
           <a:xfrm>
-            <a:off x="6035040" y="6131052"/>
-            <a:ext cx="1371600" cy="246888"/>
+            <a:off x="6035040" y="5920740"/>
+            <a:ext cx="1371600" cy="228600"/>
           </a:xfrm>
           <a:prstGeom prst="rect">
             <a:avLst/>
@@ -4565,13 +6500,13 @@
       </p:sp>
       <p:sp>
         <p:nvSpPr>
-          <p:cNvPr id="36" name="Text 34"/>
+          <p:cNvPr id="39" name="Text 37"/>
           <p:cNvSpPr txBox="1"/>
           <p:nvPr/>
         </p:nvSpPr>
         <p:spPr>
           <a:xfrm>
-            <a:off x="7955280" y="1371600"/>
+            <a:off x="7955280" y="1645920"/>
             <a:ext cx="3749040" cy="365760"/>
           </a:xfrm>
           <a:prstGeom prst="rect">
@@ -4604,13 +6539,13 @@
       </p:sp>
       <p:sp>
         <p:nvSpPr>
-          <p:cNvPr id="37" name="Text 35"/>
+          <p:cNvPr id="40" name="Text 38"/>
           <p:cNvSpPr/>
           <p:nvPr/>
         </p:nvSpPr>
         <p:spPr>
           <a:xfrm>
-            <a:off x="7955280" y="1901952"/>
+            <a:off x="7955280" y="2176272"/>
             <a:ext cx="201168" cy="201168"/>
           </a:xfrm>
           <a:prstGeom prst="roundRect">
@@ -4641,13 +6576,13 @@
       </p:sp>
       <p:sp>
         <p:nvSpPr>
-          <p:cNvPr id="38" name="Text 36"/>
+          <p:cNvPr id="41" name="Text 39"/>
           <p:cNvSpPr txBox="1"/>
           <p:nvPr/>
         </p:nvSpPr>
         <p:spPr>
           <a:xfrm>
-            <a:off x="8275320" y="1847088"/>
+            <a:off x="8275320" y="2121408"/>
             <a:ext cx="3429000" cy="457200"/>
           </a:xfrm>
           <a:prstGeom prst="rect">
@@ -4694,13 +6629,13 @@
       </p:sp>
       <p:sp>
         <p:nvSpPr>
-          <p:cNvPr id="39" name="Text 37"/>
+          <p:cNvPr id="42" name="Text 40"/>
           <p:cNvSpPr/>
           <p:nvPr/>
         </p:nvSpPr>
         <p:spPr>
           <a:xfrm>
-            <a:off x="7955280" y="2468880"/>
+            <a:off x="7955280" y="2743200"/>
             <a:ext cx="201168" cy="201168"/>
           </a:xfrm>
           <a:prstGeom prst="roundRect">
@@ -4731,13 +6666,13 @@
       </p:sp>
       <p:sp>
         <p:nvSpPr>
-          <p:cNvPr id="40" name="Text 38"/>
+          <p:cNvPr id="43" name="Text 41"/>
           <p:cNvSpPr txBox="1"/>
           <p:nvPr/>
         </p:nvSpPr>
         <p:spPr>
           <a:xfrm>
-            <a:off x="8275320" y="2414016"/>
+            <a:off x="8275320" y="2688336"/>
             <a:ext cx="3429000" cy="457200"/>
           </a:xfrm>
           <a:prstGeom prst="rect">
@@ -4784,13 +6719,13 @@
       </p:sp>
       <p:sp>
         <p:nvSpPr>
-          <p:cNvPr id="41" name="Text 39"/>
+          <p:cNvPr id="44" name="Text 42"/>
           <p:cNvSpPr/>
           <p:nvPr/>
         </p:nvSpPr>
         <p:spPr>
           <a:xfrm>
-            <a:off x="7955280" y="3035808"/>
+            <a:off x="7955280" y="3310128"/>
             <a:ext cx="201168" cy="201168"/>
           </a:xfrm>
           <a:prstGeom prst="roundRect">
@@ -4821,13 +6756,13 @@
       </p:sp>
       <p:sp>
         <p:nvSpPr>
-          <p:cNvPr id="42" name="Text 40"/>
+          <p:cNvPr id="45" name="Text 43"/>
           <p:cNvSpPr txBox="1"/>
           <p:nvPr/>
         </p:nvSpPr>
         <p:spPr>
           <a:xfrm>
-            <a:off x="8275320" y="2980944"/>
+            <a:off x="8275320" y="3255264"/>
             <a:ext cx="3429000" cy="457200"/>
           </a:xfrm>
           <a:prstGeom prst="rect">
@@ -4874,13 +6809,13 @@
       </p:sp>
       <p:sp>
         <p:nvSpPr>
-          <p:cNvPr id="43" name="Text 41"/>
+          <p:cNvPr id="46" name="Text 44"/>
           <p:cNvSpPr txBox="1"/>
           <p:nvPr/>
         </p:nvSpPr>
         <p:spPr>
           <a:xfrm>
-            <a:off x="7955280" y="3657600"/>
+            <a:off x="7955280" y="3931920"/>
             <a:ext cx="3749040" cy="822960"/>
           </a:xfrm>
           <a:prstGeom prst="rect">
@@ -4922,6 +6857,54 @@
               <a:t> only signals acting (tool_use) or stopping (end_turn). There is no "plan ready" and no "check passed".</a:t>
             </a:r>
             <a:endParaRPr lang="en-US" sz="1400" dirty="0"/>
+          </a:p>
+        </p:txBody>
+      </p:sp>
+      <p:sp>
+        <p:nvSpPr>
+          <p:cNvPr id="25" name="Slide Number Placeholder 0"/>
+          <p:cNvSpPr>
+            <a:spLocks noGrp="1"/>
+          </p:cNvSpPr>
+          <p:nvPr>
+            <p:ph type="sldNum" sz="quarter" idx="4294967295"/>
+          </p:nvPr>
+        </p:nvSpPr>
+        <p:spPr>
+          <a:xfrm>
+            <a:off x="5641848" y="6382512"/>
+            <a:ext cx="914400" cy="201168"/>
+          </a:xfrm>
+          <a:prstGeom prst="rect">
+            <a:avLst/>
+          </a:prstGeom>
+          <a:extLst>
+            <a:ext uri="{C572A759-6A51-4108-AA02-DFA0A04FC94B}">
+              <ma14:wrappingTextBoxFlag xmlns:ma14="http://schemas.microsoft.com/office/mac/drawingml/2011/main" val="0"/>
+            </a:ext>
+          </a:extLst>
+        </p:spPr>
+        <p:txBody>
+          <a:bodyPr/>
+          <a:lstStyle>
+            <a:lvl1pPr>
+              <a:defRPr sz="1000">
+                <a:solidFill>
+                  <a:srgbClr val="595959"/>
+                </a:solidFill>
+                <a:latin typeface="Arial"/>
+                <a:ea typeface="Arial"/>
+                <a:cs typeface="Arial"/>
+              </a:defRPr>
+            </a:lvl1pPr>
+          </a:lstStyle>
+          <a:p>
+            <a:pPr algn="ctr"/>
+            <a:fld id="{F7021451-1387-4CA6-816F-3879F97B5CBC}" type="slidenum">
+              <a:rPr b="0" lang="en-US"/>
+              <a:t>29</a:t>
+            </a:fld>
+            <a:endParaRPr lang="en-US"/>
           </a:p>
         </p:txBody>
       </p:sp>
@@ -4977,8 +6960,8 @@
         </p:nvSpPr>
         <p:spPr>
           <a:xfrm>
-            <a:off x="502920" y="292608"/>
-            <a:ext cx="11155680" cy="640080"/>
+            <a:off x="411480" y="201168"/>
+            <a:ext cx="11338560" cy="530352"/>
           </a:xfrm>
           <a:prstGeom prst="rect">
             <a:avLst/>
@@ -4987,36 +6970,137 @@
           <a:ln/>
         </p:spPr>
         <p:txBody>
-          <a:bodyPr wrap="square" lIns="0" tIns="0" rIns="0" bIns="0" rtlCol="0" anchor="t"/>
+          <a:bodyPr wrap="square" lIns="0" tIns="0" rIns="0" bIns="0" rtlCol="0" anchor="b"/>
           <a:lstStyle/>
           <a:p>
             <a:pPr algn="l" indent="0" marL="0">
               <a:buNone/>
             </a:pPr>
             <a:r>
-              <a:rPr lang="en-US" sz="3000" b="1" dirty="0">
-                <a:solidFill>
-                  <a:srgbClr val="2C2C2A"/>
+              <a:rPr lang="en-US" sz="2600" b="1" dirty="0">
+                <a:solidFill>
+                  <a:srgbClr val="1A1A1A"/>
                 </a:solidFill>
                 <a:latin typeface="Calibri" pitchFamily="34" charset="0"/>
                 <a:ea typeface="Calibri" pitchFamily="34" charset="-122"/>
                 <a:cs typeface="Calibri" pitchFamily="34" charset="-120"/>
               </a:rPr>
-              <a:t>Thinking + Acting + Checking Are Mixed Together</a:t>
-            </a:r>
-            <a:endParaRPr lang="en-US" sz="3000" dirty="0"/>
-          </a:p>
-        </p:txBody>
-      </p:sp>
-      <p:sp>
-        <p:nvSpPr>
-          <p:cNvPr id="3" name="!!lh0"/>
+              <a:t>Why Single Agents Fail – Part 2</a:t>
+            </a:r>
+            <a:endParaRPr lang="en-US" sz="2600" dirty="0"/>
+          </a:p>
+        </p:txBody>
+      </p:sp>
+      <p:sp>
+        <p:nvSpPr>
+          <p:cNvPr id="3" name="!!rule"/>
+          <p:cNvSpPr/>
+          <p:nvPr/>
+        </p:nvSpPr>
+        <p:spPr>
+          <a:xfrm>
+            <a:off x="411480" y="804672"/>
+            <a:ext cx="11365992" cy="914"/>
+          </a:xfrm>
+          <a:prstGeom prst="line">
+            <a:avLst/>
+          </a:prstGeom>
+          <a:noFill/>
+          <a:ln w="9525">
+            <a:solidFill>
+              <a:srgbClr val="7F7F7F"/>
+            </a:solidFill>
+            <a:prstDash val="solid"/>
+          </a:ln>
+        </p:spPr>
+      </p:sp>
+      <p:sp>
+        <p:nvSpPr>
+          <p:cNvPr id="4" name="!!lead"/>
           <p:cNvSpPr txBox="1"/>
           <p:nvPr/>
         </p:nvSpPr>
         <p:spPr>
           <a:xfrm>
-            <a:off x="548640" y="1024128"/>
+            <a:off x="411480" y="886968"/>
+            <a:ext cx="11338560" cy="438912"/>
+          </a:xfrm>
+          <a:prstGeom prst="rect">
+            <a:avLst/>
+          </a:prstGeom>
+          <a:noFill/>
+          <a:ln/>
+        </p:spPr>
+        <p:txBody>
+          <a:bodyPr wrap="square" lIns="0" tIns="0" rIns="0" bIns="0" rtlCol="0" anchor="t"/>
+          <a:lstStyle/>
+          <a:p>
+            <a:pPr indent="0" marL="0">
+              <a:buNone/>
+            </a:pPr>
+            <a:r>
+              <a:rPr lang="en-US" sz="1400" dirty="0">
+                <a:solidFill>
+                  <a:srgbClr val="404040"/>
+                </a:solidFill>
+                <a:latin typeface="Arial" pitchFamily="34" charset="0"/>
+                <a:ea typeface="Arial" pitchFamily="34" charset="-122"/>
+                <a:cs typeface="Arial" pitchFamily="34" charset="-120"/>
+              </a:rPr>
+              <a:t>Thinking, acting and checking are mixed together in one loop. Sort the same messages by job and three separate responsibilities appear.</a:t>
+            </a:r>
+            <a:endParaRPr lang="en-US" sz="1400" dirty="0"/>
+          </a:p>
+        </p:txBody>
+      </p:sp>
+      <p:sp>
+        <p:nvSpPr>
+          <p:cNvPr id="5" name="!!restricted"/>
+          <p:cNvSpPr txBox="1"/>
+          <p:nvPr/>
+        </p:nvSpPr>
+        <p:spPr>
+          <a:xfrm>
+            <a:off x="5184648" y="6556248"/>
+            <a:ext cx="1828800" cy="201168"/>
+          </a:xfrm>
+          <a:prstGeom prst="rect">
+            <a:avLst/>
+          </a:prstGeom>
+          <a:noFill/>
+          <a:ln/>
+        </p:spPr>
+        <p:txBody>
+          <a:bodyPr wrap="square" lIns="0" tIns="0" rIns="0" bIns="0" rtlCol="0" anchor="ctr"/>
+          <a:lstStyle/>
+          <a:p>
+            <a:pPr algn="ctr" indent="0" marL="0">
+              <a:buNone/>
+            </a:pPr>
+            <a:r>
+              <a:rPr lang="en-US" sz="800" dirty="0">
+                <a:solidFill>
+                  <a:srgbClr val="7F7F7F"/>
+                </a:solidFill>
+                <a:latin typeface="Arial" pitchFamily="34" charset="0"/>
+                <a:ea typeface="Arial" pitchFamily="34" charset="-122"/>
+                <a:cs typeface="Arial" pitchFamily="34" charset="-120"/>
+              </a:rPr>
+              <a:t>RESTRICTED</a:t>
+            </a:r>
+            <a:endParaRPr lang="en-US" sz="800" dirty="0"/>
+          </a:p>
+        </p:txBody>
+      </p:sp>
+      <p:sp>
+        <p:nvSpPr>
+          <p:cNvPr id="6" name="!!lh0"/>
+          <p:cNvSpPr txBox="1"/>
+          <p:nvPr/>
+        </p:nvSpPr>
+        <p:spPr>
+          <a:xfrm>
+            <a:off x="548640" y="1344168"/>
             <a:ext cx="2258568" cy="274320"/>
           </a:xfrm>
           <a:prstGeom prst="rect">
@@ -5049,13 +7133,13 @@
       </p:sp>
       <p:sp>
         <p:nvSpPr>
-          <p:cNvPr id="4" name="!!lh1"/>
+          <p:cNvPr id="7" name="!!lh1"/>
           <p:cNvSpPr txBox="1"/>
           <p:nvPr/>
         </p:nvSpPr>
         <p:spPr>
           <a:xfrm>
-            <a:off x="2898648" y="1024128"/>
+            <a:off x="2898648" y="1344168"/>
             <a:ext cx="2258568" cy="274320"/>
           </a:xfrm>
           <a:prstGeom prst="rect">
@@ -5088,13 +7172,13 @@
       </p:sp>
       <p:sp>
         <p:nvSpPr>
-          <p:cNvPr id="5" name="!!lh2"/>
+          <p:cNvPr id="8" name="!!lh2"/>
           <p:cNvSpPr txBox="1"/>
           <p:nvPr/>
         </p:nvSpPr>
         <p:spPr>
           <a:xfrm>
-            <a:off x="5248656" y="1024128"/>
+            <a:off x="5248656" y="1344168"/>
             <a:ext cx="2258568" cy="274320"/>
           </a:xfrm>
           <a:prstGeom prst="rect">
@@ -5127,18 +7211,18 @@
       </p:sp>
       <p:sp>
         <p:nvSpPr>
-          <p:cNvPr id="6" name="!!blk01"/>
+          <p:cNvPr id="9" name="!!blk01"/>
           <p:cNvSpPr/>
           <p:nvPr/>
         </p:nvSpPr>
         <p:spPr>
           <a:xfrm>
-            <a:off x="548640" y="1371600"/>
-            <a:ext cx="2258568" cy="246888"/>
+            <a:off x="548640" y="1645920"/>
+            <a:ext cx="2258568" cy="228600"/>
           </a:xfrm>
           <a:prstGeom prst="roundRect">
             <a:avLst>
-              <a:gd name="adj" fmla="val 18519"/>
+              <a:gd name="adj" fmla="val 20000"/>
             </a:avLst>
           </a:prstGeom>
           <a:solidFill>
@@ -5175,18 +7259,18 @@
       </p:sp>
       <p:sp>
         <p:nvSpPr>
-          <p:cNvPr id="7" name="!!blk02"/>
+          <p:cNvPr id="10" name="!!blk02"/>
           <p:cNvSpPr/>
           <p:nvPr/>
         </p:nvSpPr>
         <p:spPr>
           <a:xfrm>
-            <a:off x="2898648" y="1668780"/>
-            <a:ext cx="2258568" cy="246888"/>
+            <a:off x="2898648" y="1915668"/>
+            <a:ext cx="2258568" cy="228600"/>
           </a:xfrm>
           <a:prstGeom prst="roundRect">
             <a:avLst>
-              <a:gd name="adj" fmla="val 18519"/>
+              <a:gd name="adj" fmla="val 20000"/>
             </a:avLst>
           </a:prstGeom>
           <a:solidFill>
@@ -5223,18 +7307,18 @@
       </p:sp>
       <p:sp>
         <p:nvSpPr>
-          <p:cNvPr id="8" name="!!blk03"/>
+          <p:cNvPr id="11" name="!!blk03"/>
           <p:cNvSpPr/>
           <p:nvPr/>
         </p:nvSpPr>
         <p:spPr>
           <a:xfrm>
-            <a:off x="2898648" y="1965960"/>
-            <a:ext cx="2258568" cy="548640"/>
+            <a:off x="2898648" y="2185416"/>
+            <a:ext cx="2258568" cy="457200"/>
           </a:xfrm>
           <a:prstGeom prst="roundRect">
             <a:avLst>
-              <a:gd name="adj" fmla="val 8333"/>
+              <a:gd name="adj" fmla="val 10000"/>
             </a:avLst>
           </a:prstGeom>
           <a:solidFill>
@@ -5271,18 +7355,18 @@
       </p:sp>
       <p:sp>
         <p:nvSpPr>
-          <p:cNvPr id="9" name="!!blk04"/>
+          <p:cNvPr id="12" name="!!blk04"/>
           <p:cNvSpPr/>
           <p:nvPr/>
         </p:nvSpPr>
         <p:spPr>
           <a:xfrm>
-            <a:off x="548640" y="2564892"/>
-            <a:ext cx="2258568" cy="246888"/>
+            <a:off x="548640" y="2683764"/>
+            <a:ext cx="2258568" cy="228600"/>
           </a:xfrm>
           <a:prstGeom prst="roundRect">
             <a:avLst>
-              <a:gd name="adj" fmla="val 18519"/>
+              <a:gd name="adj" fmla="val 20000"/>
             </a:avLst>
           </a:prstGeom>
           <a:solidFill>
@@ -5319,18 +7403,18 @@
       </p:sp>
       <p:sp>
         <p:nvSpPr>
-          <p:cNvPr id="10" name="!!blk05"/>
+          <p:cNvPr id="13" name="!!blk05"/>
           <p:cNvSpPr/>
           <p:nvPr/>
         </p:nvSpPr>
         <p:spPr>
           <a:xfrm>
-            <a:off x="2898648" y="2862072"/>
-            <a:ext cx="2258568" cy="246888"/>
+            <a:off x="2898648" y="2953512"/>
+            <a:ext cx="2258568" cy="228600"/>
           </a:xfrm>
           <a:prstGeom prst="roundRect">
             <a:avLst>
-              <a:gd name="adj" fmla="val 18519"/>
+              <a:gd name="adj" fmla="val 20000"/>
             </a:avLst>
           </a:prstGeom>
           <a:solidFill>
@@ -5367,18 +7451,18 @@
       </p:sp>
       <p:sp>
         <p:nvSpPr>
-          <p:cNvPr id="11" name="!!blk06"/>
+          <p:cNvPr id="14" name="!!blk06"/>
           <p:cNvSpPr/>
           <p:nvPr/>
         </p:nvSpPr>
         <p:spPr>
           <a:xfrm>
-            <a:off x="548640" y="3159252"/>
-            <a:ext cx="2258568" cy="246888"/>
+            <a:off x="548640" y="3223260"/>
+            <a:ext cx="2258568" cy="228600"/>
           </a:xfrm>
           <a:prstGeom prst="roundRect">
             <a:avLst>
-              <a:gd name="adj" fmla="val 18519"/>
+              <a:gd name="adj" fmla="val 20000"/>
             </a:avLst>
           </a:prstGeom>
           <a:solidFill>
@@ -5415,18 +7499,18 @@
       </p:sp>
       <p:sp>
         <p:nvSpPr>
-          <p:cNvPr id="12" name="!!blk07"/>
+          <p:cNvPr id="15" name="!!blk07"/>
           <p:cNvSpPr/>
           <p:nvPr/>
         </p:nvSpPr>
         <p:spPr>
           <a:xfrm>
-            <a:off x="2898648" y="3456432"/>
-            <a:ext cx="2258568" cy="246888"/>
+            <a:off x="2898648" y="3493008"/>
+            <a:ext cx="2258568" cy="228600"/>
           </a:xfrm>
           <a:prstGeom prst="roundRect">
             <a:avLst>
-              <a:gd name="adj" fmla="val 18519"/>
+              <a:gd name="adj" fmla="val 20000"/>
             </a:avLst>
           </a:prstGeom>
           <a:solidFill>
@@ -5463,18 +7547,18 @@
       </p:sp>
       <p:sp>
         <p:nvSpPr>
-          <p:cNvPr id="13" name="!!blk08"/>
+          <p:cNvPr id="16" name="!!blk08"/>
           <p:cNvSpPr/>
           <p:nvPr/>
         </p:nvSpPr>
         <p:spPr>
           <a:xfrm>
-            <a:off x="2898648" y="3753612"/>
-            <a:ext cx="2258568" cy="246888"/>
+            <a:off x="2898648" y="3762756"/>
+            <a:ext cx="2258568" cy="228600"/>
           </a:xfrm>
           <a:prstGeom prst="roundRect">
             <a:avLst>
-              <a:gd name="adj" fmla="val 18519"/>
+              <a:gd name="adj" fmla="val 20000"/>
             </a:avLst>
           </a:prstGeom>
           <a:solidFill>
@@ -5511,18 +7595,18 @@
       </p:sp>
       <p:sp>
         <p:nvSpPr>
-          <p:cNvPr id="14" name="!!blk09"/>
+          <p:cNvPr id="17" name="!!blk09"/>
           <p:cNvSpPr/>
           <p:nvPr/>
         </p:nvSpPr>
         <p:spPr>
           <a:xfrm>
-            <a:off x="5248656" y="4050792"/>
-            <a:ext cx="2258568" cy="246888"/>
+            <a:off x="5248656" y="4032504"/>
+            <a:ext cx="2258568" cy="228600"/>
           </a:xfrm>
           <a:prstGeom prst="roundRect">
             <a:avLst>
-              <a:gd name="adj" fmla="val 18519"/>
+              <a:gd name="adj" fmla="val 20000"/>
             </a:avLst>
           </a:prstGeom>
           <a:solidFill>
@@ -5559,18 +7643,18 @@
       </p:sp>
       <p:sp>
         <p:nvSpPr>
-          <p:cNvPr id="15" name="!!blk10"/>
+          <p:cNvPr id="18" name="!!blk10"/>
           <p:cNvSpPr/>
           <p:nvPr/>
         </p:nvSpPr>
         <p:spPr>
           <a:xfrm>
-            <a:off x="2898648" y="4347972"/>
-            <a:ext cx="2258568" cy="246888"/>
+            <a:off x="2898648" y="4302252"/>
+            <a:ext cx="2258568" cy="228600"/>
           </a:xfrm>
           <a:prstGeom prst="roundRect">
             <a:avLst>
-              <a:gd name="adj" fmla="val 18519"/>
+              <a:gd name="adj" fmla="val 20000"/>
             </a:avLst>
           </a:prstGeom>
           <a:solidFill>
@@ -5607,18 +7691,18 @@
       </p:sp>
       <p:sp>
         <p:nvSpPr>
-          <p:cNvPr id="16" name="!!blk11"/>
+          <p:cNvPr id="19" name="!!blk11"/>
           <p:cNvSpPr/>
           <p:nvPr/>
         </p:nvSpPr>
         <p:spPr>
           <a:xfrm>
-            <a:off x="5248656" y="4645152"/>
-            <a:ext cx="2258568" cy="246888"/>
+            <a:off x="5248656" y="4572000"/>
+            <a:ext cx="2258568" cy="228600"/>
           </a:xfrm>
           <a:prstGeom prst="roundRect">
             <a:avLst>
-              <a:gd name="adj" fmla="val 18519"/>
+              <a:gd name="adj" fmla="val 20000"/>
             </a:avLst>
           </a:prstGeom>
           <a:solidFill>
@@ -5655,18 +7739,18 @@
       </p:sp>
       <p:sp>
         <p:nvSpPr>
-          <p:cNvPr id="17" name="!!blk12"/>
+          <p:cNvPr id="20" name="!!blk12"/>
           <p:cNvSpPr/>
           <p:nvPr/>
         </p:nvSpPr>
         <p:spPr>
           <a:xfrm>
-            <a:off x="2898648" y="4942332"/>
-            <a:ext cx="2258568" cy="246888"/>
+            <a:off x="2898648" y="4841748"/>
+            <a:ext cx="2258568" cy="228600"/>
           </a:xfrm>
           <a:prstGeom prst="roundRect">
             <a:avLst>
-              <a:gd name="adj" fmla="val 18519"/>
+              <a:gd name="adj" fmla="val 20000"/>
             </a:avLst>
           </a:prstGeom>
           <a:solidFill>
@@ -5703,18 +7787,18 @@
       </p:sp>
       <p:sp>
         <p:nvSpPr>
-          <p:cNvPr id="18" name="!!blk13"/>
+          <p:cNvPr id="21" name="!!blk13"/>
           <p:cNvSpPr/>
           <p:nvPr/>
         </p:nvSpPr>
         <p:spPr>
           <a:xfrm>
-            <a:off x="5248656" y="5239512"/>
-            <a:ext cx="2258568" cy="246888"/>
+            <a:off x="5248656" y="5111496"/>
+            <a:ext cx="2258568" cy="228600"/>
           </a:xfrm>
           <a:prstGeom prst="roundRect">
             <a:avLst>
-              <a:gd name="adj" fmla="val 18519"/>
+              <a:gd name="adj" fmla="val 20000"/>
             </a:avLst>
           </a:prstGeom>
           <a:solidFill>
@@ -5751,18 +7835,18 @@
       </p:sp>
       <p:sp>
         <p:nvSpPr>
-          <p:cNvPr id="19" name="!!blk14"/>
+          <p:cNvPr id="22" name="!!blk14"/>
           <p:cNvSpPr/>
           <p:nvPr/>
         </p:nvSpPr>
         <p:spPr>
           <a:xfrm>
-            <a:off x="548640" y="5536692"/>
-            <a:ext cx="2258568" cy="246888"/>
+            <a:off x="548640" y="5381244"/>
+            <a:ext cx="2258568" cy="228600"/>
           </a:xfrm>
           <a:prstGeom prst="roundRect">
             <a:avLst>
-              <a:gd name="adj" fmla="val 18519"/>
+              <a:gd name="adj" fmla="val 20000"/>
             </a:avLst>
           </a:prstGeom>
           <a:solidFill>
@@ -5799,18 +7883,18 @@
       </p:sp>
       <p:sp>
         <p:nvSpPr>
-          <p:cNvPr id="20" name="!!blk15"/>
+          <p:cNvPr id="23" name="!!blk15"/>
           <p:cNvSpPr/>
           <p:nvPr/>
         </p:nvSpPr>
         <p:spPr>
           <a:xfrm>
-            <a:off x="5248656" y="5833872"/>
-            <a:ext cx="2258568" cy="246888"/>
+            <a:off x="5248656" y="5650992"/>
+            <a:ext cx="2258568" cy="228600"/>
           </a:xfrm>
           <a:prstGeom prst="roundRect">
             <a:avLst>
-              <a:gd name="adj" fmla="val 18519"/>
+              <a:gd name="adj" fmla="val 20000"/>
             </a:avLst>
           </a:prstGeom>
           <a:solidFill>
@@ -5847,18 +7931,18 @@
       </p:sp>
       <p:sp>
         <p:nvSpPr>
-          <p:cNvPr id="21" name="!!blk16"/>
+          <p:cNvPr id="24" name="!!blk16"/>
           <p:cNvSpPr/>
           <p:nvPr/>
         </p:nvSpPr>
         <p:spPr>
           <a:xfrm>
-            <a:off x="548640" y="6131052"/>
-            <a:ext cx="2258568" cy="246888"/>
+            <a:off x="548640" y="5920740"/>
+            <a:ext cx="2258568" cy="228600"/>
           </a:xfrm>
           <a:prstGeom prst="roundRect">
             <a:avLst>
-              <a:gd name="adj" fmla="val 18519"/>
+              <a:gd name="adj" fmla="val 20000"/>
             </a:avLst>
           </a:prstGeom>
           <a:solidFill>
@@ -5895,13 +7979,13 @@
       </p:sp>
       <p:sp>
         <p:nvSpPr>
-          <p:cNvPr id="22" name="Text 20"/>
+          <p:cNvPr id="25" name="Text 23"/>
           <p:cNvSpPr txBox="1"/>
           <p:nvPr/>
         </p:nvSpPr>
         <p:spPr>
           <a:xfrm>
-            <a:off x="7955280" y="1371600"/>
+            <a:off x="7955280" y="1645920"/>
             <a:ext cx="3749040" cy="365760"/>
           </a:xfrm>
           <a:prstGeom prst="rect">
@@ -5934,13 +8018,13 @@
       </p:sp>
       <p:sp>
         <p:nvSpPr>
-          <p:cNvPr id="23" name="Text 21"/>
+          <p:cNvPr id="26" name="Text 24"/>
           <p:cNvSpPr/>
           <p:nvPr/>
         </p:nvSpPr>
         <p:spPr>
           <a:xfrm>
-            <a:off x="7955280" y="1901952"/>
+            <a:off x="7955280" y="2176272"/>
             <a:ext cx="201168" cy="201168"/>
           </a:xfrm>
           <a:prstGeom prst="roundRect">
@@ -5971,13 +8055,13 @@
       </p:sp>
       <p:sp>
         <p:nvSpPr>
-          <p:cNvPr id="24" name="Text 22"/>
+          <p:cNvPr id="27" name="Text 25"/>
           <p:cNvSpPr txBox="1"/>
           <p:nvPr/>
         </p:nvSpPr>
         <p:spPr>
           <a:xfrm>
-            <a:off x="8275320" y="1847088"/>
+            <a:off x="8275320" y="2121408"/>
             <a:ext cx="3429000" cy="457200"/>
           </a:xfrm>
           <a:prstGeom prst="rect">
@@ -6024,13 +8108,13 @@
       </p:sp>
       <p:sp>
         <p:nvSpPr>
-          <p:cNvPr id="25" name="Text 23"/>
+          <p:cNvPr id="28" name="Text 26"/>
           <p:cNvSpPr/>
           <p:nvPr/>
         </p:nvSpPr>
         <p:spPr>
           <a:xfrm>
-            <a:off x="7955280" y="2468880"/>
+            <a:off x="7955280" y="2743200"/>
             <a:ext cx="201168" cy="201168"/>
           </a:xfrm>
           <a:prstGeom prst="roundRect">
@@ -6061,13 +8145,13 @@
       </p:sp>
       <p:sp>
         <p:nvSpPr>
-          <p:cNvPr id="26" name="Text 24"/>
+          <p:cNvPr id="29" name="Text 27"/>
           <p:cNvSpPr txBox="1"/>
           <p:nvPr/>
         </p:nvSpPr>
         <p:spPr>
           <a:xfrm>
-            <a:off x="8275320" y="2414016"/>
+            <a:off x="8275320" y="2688336"/>
             <a:ext cx="3429000" cy="457200"/>
           </a:xfrm>
           <a:prstGeom prst="rect">
@@ -6114,13 +8198,13 @@
       </p:sp>
       <p:sp>
         <p:nvSpPr>
-          <p:cNvPr id="27" name="Text 25"/>
+          <p:cNvPr id="30" name="Text 28"/>
           <p:cNvSpPr/>
           <p:nvPr/>
         </p:nvSpPr>
         <p:spPr>
           <a:xfrm>
-            <a:off x="7955280" y="3035808"/>
+            <a:off x="7955280" y="3310128"/>
             <a:ext cx="201168" cy="201168"/>
           </a:xfrm>
           <a:prstGeom prst="roundRect">
@@ -6151,13 +8235,13 @@
       </p:sp>
       <p:sp>
         <p:nvSpPr>
-          <p:cNvPr id="28" name="Text 26"/>
+          <p:cNvPr id="31" name="Text 29"/>
           <p:cNvSpPr txBox="1"/>
           <p:nvPr/>
         </p:nvSpPr>
         <p:spPr>
           <a:xfrm>
-            <a:off x="8275320" y="2980944"/>
+            <a:off x="8275320" y="3255264"/>
             <a:ext cx="3429000" cy="457200"/>
           </a:xfrm>
           <a:prstGeom prst="rect">
@@ -6204,13 +8288,13 @@
       </p:sp>
       <p:sp>
         <p:nvSpPr>
-          <p:cNvPr id="29" name="Text 27"/>
+          <p:cNvPr id="32" name="Text 30"/>
           <p:cNvSpPr txBox="1"/>
           <p:nvPr/>
         </p:nvSpPr>
         <p:spPr>
           <a:xfrm>
-            <a:off x="7955280" y="3657600"/>
+            <a:off x="7955280" y="3931920"/>
             <a:ext cx="3749040" cy="822960"/>
           </a:xfrm>
           <a:prstGeom prst="rect">
@@ -6257,18 +8341,18 @@
       </p:sp>
       <p:sp>
         <p:nvSpPr>
-          <p:cNvPr id="30" name="!!take3"/>
+          <p:cNvPr id="33" name="!!take3"/>
           <p:cNvSpPr/>
           <p:nvPr/>
         </p:nvSpPr>
         <p:spPr>
           <a:xfrm>
-            <a:off x="7955280" y="4709160"/>
-            <a:ext cx="3749040" cy="1051560"/>
+            <a:off x="7955280" y="4983480"/>
+            <a:ext cx="3749040" cy="1005840"/>
           </a:xfrm>
           <a:prstGeom prst="roundRect">
             <a:avLst>
-              <a:gd name="adj" fmla="val 10435"/>
+              <a:gd name="adj" fmla="val 10909"/>
             </a:avLst>
           </a:prstGeom>
           <a:solidFill>
@@ -6300,6 +8384,54 @@
               <a:t>One loop, three jobs, one exit signal. We'd never let the maker check their own work. Why let an agent?</a:t>
             </a:r>
             <a:endParaRPr lang="en-US" sz="1400" dirty="0"/>
+          </a:p>
+        </p:txBody>
+      </p:sp>
+      <p:sp>
+        <p:nvSpPr>
+          <p:cNvPr id="25" name="Slide Number Placeholder 0"/>
+          <p:cNvSpPr>
+            <a:spLocks noGrp="1"/>
+          </p:cNvSpPr>
+          <p:nvPr>
+            <p:ph type="sldNum" sz="quarter" idx="4294967295"/>
+          </p:nvPr>
+        </p:nvSpPr>
+        <p:spPr>
+          <a:xfrm>
+            <a:off x="5641848" y="6382512"/>
+            <a:ext cx="914400" cy="201168"/>
+          </a:xfrm>
+          <a:prstGeom prst="rect">
+            <a:avLst/>
+          </a:prstGeom>
+          <a:extLst>
+            <a:ext uri="{C572A759-6A51-4108-AA02-DFA0A04FC94B}">
+              <ma14:wrappingTextBoxFlag xmlns:ma14="http://schemas.microsoft.com/office/mac/drawingml/2011/main" val="0"/>
+            </a:ext>
+          </a:extLst>
+        </p:spPr>
+        <p:txBody>
+          <a:bodyPr/>
+          <a:lstStyle>
+            <a:lvl1pPr>
+              <a:defRPr sz="1000">
+                <a:solidFill>
+                  <a:srgbClr val="595959"/>
+                </a:solidFill>
+                <a:latin typeface="Arial"/>
+                <a:ea typeface="Arial"/>
+                <a:cs typeface="Arial"/>
+              </a:defRPr>
+            </a:lvl1pPr>
+          </a:lstStyle>
+          <a:p>
+            <a:pPr algn="ctr"/>
+            <a:fld id="{F7021451-1387-4CA6-816F-3879F97B5CBC}" type="slidenum">
+              <a:rPr b="0" lang="en-US"/>
+              <a:t>30</a:t>
+            </a:fld>
+            <a:endParaRPr lang="en-US"/>
           </a:p>
         </p:txBody>
       </p:sp>
@@ -6355,8 +8487,8 @@
         </p:nvSpPr>
         <p:spPr>
           <a:xfrm>
-            <a:off x="502920" y="292608"/>
-            <a:ext cx="11155680" cy="640080"/>
+            <a:off x="411480" y="201168"/>
+            <a:ext cx="11338560" cy="530352"/>
           </a:xfrm>
           <a:prstGeom prst="rect">
             <a:avLst/>
@@ -6365,16 +8497,16 @@
           <a:ln/>
         </p:spPr>
         <p:txBody>
-          <a:bodyPr wrap="square" lIns="0" tIns="0" rIns="0" bIns="0" rtlCol="0" anchor="t"/>
+          <a:bodyPr wrap="square" lIns="0" tIns="0" rIns="0" bIns="0" rtlCol="0" anchor="b"/>
           <a:lstStyle/>
           <a:p>
             <a:pPr algn="l" indent="0" marL="0">
               <a:buNone/>
             </a:pPr>
             <a:r>
-              <a:rPr lang="en-US" sz="3000" b="1" dirty="0">
-                <a:solidFill>
-                  <a:srgbClr val="2C2C2A"/>
+              <a:rPr lang="en-US" sz="2600" b="1" dirty="0">
+                <a:solidFill>
+                  <a:srgbClr val="1A1A1A"/>
                 </a:solidFill>
                 <a:latin typeface="Calibri" pitchFamily="34" charset="0"/>
                 <a:ea typeface="Calibri" pitchFamily="34" charset="-122"/>
@@ -6382,13 +8514,114 @@
               </a:rPr>
               <a:t>Failure Modes: What You Observe</a:t>
             </a:r>
-            <a:endParaRPr lang="en-US" sz="3000" dirty="0"/>
+            <a:endParaRPr lang="en-US" sz="2600" dirty="0"/>
+          </a:p>
+        </p:txBody>
+      </p:sp>
+      <p:sp>
+        <p:nvSpPr>
+          <p:cNvPr id="3" name="!!rule"/>
+          <p:cNvSpPr/>
+          <p:nvPr/>
+        </p:nvSpPr>
+        <p:spPr>
+          <a:xfrm>
+            <a:off x="411480" y="804672"/>
+            <a:ext cx="11365992" cy="914"/>
+          </a:xfrm>
+          <a:prstGeom prst="line">
+            <a:avLst/>
+          </a:prstGeom>
+          <a:noFill/>
+          <a:ln w="9525">
+            <a:solidFill>
+              <a:srgbClr val="7F7F7F"/>
+            </a:solidFill>
+            <a:prstDash val="solid"/>
+          </a:ln>
+        </p:spPr>
+      </p:sp>
+      <p:sp>
+        <p:nvSpPr>
+          <p:cNvPr id="4" name="!!lead"/>
+          <p:cNvSpPr txBox="1"/>
+          <p:nvPr/>
+        </p:nvSpPr>
+        <p:spPr>
+          <a:xfrm>
+            <a:off x="411480" y="886968"/>
+            <a:ext cx="11338560" cy="438912"/>
+          </a:xfrm>
+          <a:prstGeom prst="rect">
+            <a:avLst/>
+          </a:prstGeom>
+          <a:noFill/>
+          <a:ln/>
+        </p:spPr>
+        <p:txBody>
+          <a:bodyPr wrap="square" lIns="0" tIns="0" rIns="0" bIns="0" rtlCol="0" anchor="t"/>
+          <a:lstStyle/>
+          <a:p>
+            <a:pPr indent="0" marL="0">
+              <a:buNone/>
+            </a:pPr>
+            <a:r>
+              <a:rPr lang="en-US" sz="1400" dirty="0">
+                <a:solidFill>
+                  <a:srgbClr val="404040"/>
+                </a:solidFill>
+                <a:latin typeface="Arial" pitchFamily="34" charset="0"/>
+                <a:ea typeface="Arial" pitchFamily="34" charset="-122"/>
+                <a:cs typeface="Arial" pitchFamily="34" charset="-120"/>
+              </a:rPr>
+              <a:t>Too much work in one loop shows up as recognisable errors, like picking the wrong tool. They fall into three families: thinking, acting and checking.</a:t>
+            </a:r>
+            <a:endParaRPr lang="en-US" sz="1400" dirty="0"/>
+          </a:p>
+        </p:txBody>
+      </p:sp>
+      <p:sp>
+        <p:nvSpPr>
+          <p:cNvPr id="5" name="!!restricted"/>
+          <p:cNvSpPr txBox="1"/>
+          <p:nvPr/>
+        </p:nvSpPr>
+        <p:spPr>
+          <a:xfrm>
+            <a:off x="5184648" y="6556248"/>
+            <a:ext cx="1828800" cy="201168"/>
+          </a:xfrm>
+          <a:prstGeom prst="rect">
+            <a:avLst/>
+          </a:prstGeom>
+          <a:noFill/>
+          <a:ln/>
+        </p:spPr>
+        <p:txBody>
+          <a:bodyPr wrap="square" lIns="0" tIns="0" rIns="0" bIns="0" rtlCol="0" anchor="ctr"/>
+          <a:lstStyle/>
+          <a:p>
+            <a:pPr algn="ctr" indent="0" marL="0">
+              <a:buNone/>
+            </a:pPr>
+            <a:r>
+              <a:rPr lang="en-US" sz="800" dirty="0">
+                <a:solidFill>
+                  <a:srgbClr val="7F7F7F"/>
+                </a:solidFill>
+                <a:latin typeface="Arial" pitchFamily="34" charset="0"/>
+                <a:ea typeface="Arial" pitchFamily="34" charset="-122"/>
+                <a:cs typeface="Arial" pitchFamily="34" charset="-120"/>
+              </a:rPr>
+              <a:t>RESTRICTED</a:t>
+            </a:r>
+            <a:endParaRPr lang="en-US" sz="800" dirty="0"/>
           </a:p>
         </p:txBody>
       </p:sp>
       <p:pic>
         <p:nvPicPr>
-          <p:cNvPr id="3" name="!!fi0" descr="/home/claude/multi-agent-deck/assets/icons/TbBrain_534AB7.png">    </p:cNvPr>
+          <p:cNvPr id="6" name="!!fi0" descr="/tmp/deck-icons/TbBrain_534AB7.png">    </p:cNvPr>
           <p:cNvPicPr>
             <a:picLocks noChangeAspect="1"/>
           </p:cNvPicPr>
@@ -6402,7 +8635,7 @@
         </p:blipFill>
         <p:spPr>
           <a:xfrm>
-            <a:off x="548640" y="1143000"/>
+            <a:off x="548640" y="1371600"/>
             <a:ext cx="292608" cy="292608"/>
           </a:xfrm>
           <a:prstGeom prst="rect">
@@ -6412,13 +8645,13 @@
       </p:pic>
       <p:sp>
         <p:nvSpPr>
-          <p:cNvPr id="4" name="!!fh0"/>
+          <p:cNvPr id="7" name="!!fh0"/>
           <p:cNvSpPr txBox="1"/>
           <p:nvPr/>
         </p:nvSpPr>
         <p:spPr>
           <a:xfrm>
-            <a:off x="932688" y="1143000"/>
+            <a:off x="932688" y="1371600"/>
             <a:ext cx="3182112" cy="310896"/>
           </a:xfrm>
           <a:prstGeom prst="rect">
@@ -6451,18 +8684,18 @@
       </p:sp>
       <p:sp>
         <p:nvSpPr>
-          <p:cNvPr id="5" name="!!card00"/>
+          <p:cNvPr id="8" name="!!card00"/>
           <p:cNvSpPr/>
           <p:nvPr/>
         </p:nvSpPr>
         <p:spPr>
           <a:xfrm>
-            <a:off x="548640" y="1645920"/>
-            <a:ext cx="3566160" cy="1920240"/>
+            <a:off x="548640" y="1828800"/>
+            <a:ext cx="3566160" cy="1874520"/>
           </a:xfrm>
           <a:prstGeom prst="roundRect">
             <a:avLst>
-              <a:gd name="adj" fmla="val 6667"/>
+              <a:gd name="adj" fmla="val 6829"/>
             </a:avLst>
           </a:prstGeom>
           <a:solidFill>
@@ -6488,7 +8721,7 @@
       </p:sp>
       <p:pic>
         <p:nvPicPr>
-          <p:cNvPr id="6" name="!!ci00" descr="/home/claude/multi-agent-deck/assets/icons/TbRouteOff_534AB7.png">    </p:cNvPr>
+          <p:cNvPr id="9" name="!!ci00" descr="/tmp/deck-icons/TbRouteOff_534AB7.png">    </p:cNvPr>
           <p:cNvPicPr>
             <a:picLocks noChangeAspect="1"/>
           </p:cNvPicPr>
@@ -6502,7 +8735,7 @@
         </p:blipFill>
         <p:spPr>
           <a:xfrm>
-            <a:off x="731520" y="1828800"/>
+            <a:off x="731520" y="2011680"/>
             <a:ext cx="274320" cy="274320"/>
           </a:xfrm>
           <a:prstGeom prst="rect">
@@ -6512,13 +8745,13 @@
       </p:pic>
       <p:sp>
         <p:nvSpPr>
-          <p:cNvPr id="7" name="!!cn00"/>
+          <p:cNvPr id="10" name="!!cn00"/>
           <p:cNvSpPr txBox="1"/>
           <p:nvPr/>
         </p:nvSpPr>
         <p:spPr>
           <a:xfrm>
-            <a:off x="1097280" y="1810512"/>
+            <a:off x="1097280" y="1993392"/>
             <a:ext cx="2834640" cy="329184"/>
           </a:xfrm>
           <a:prstGeom prst="rect">
@@ -6551,13 +8784,13 @@
       </p:sp>
       <p:sp>
         <p:nvSpPr>
-          <p:cNvPr id="8" name="!!cb00"/>
+          <p:cNvPr id="11" name="!!cb00"/>
           <p:cNvSpPr txBox="1"/>
           <p:nvPr/>
         </p:nvSpPr>
         <p:spPr>
           <a:xfrm>
-            <a:off x="731520" y="2212848"/>
+            <a:off x="731520" y="2395728"/>
             <a:ext cx="3200400" cy="1280160"/>
           </a:xfrm>
           <a:prstGeom prst="rect">
@@ -6684,18 +8917,18 @@
       </p:sp>
       <p:sp>
         <p:nvSpPr>
-          <p:cNvPr id="9" name="!!card01"/>
+          <p:cNvPr id="12" name="!!card01"/>
           <p:cNvSpPr/>
           <p:nvPr/>
         </p:nvSpPr>
         <p:spPr>
           <a:xfrm>
-            <a:off x="548640" y="3749040"/>
-            <a:ext cx="3566160" cy="1920240"/>
+            <a:off x="548640" y="3840480"/>
+            <a:ext cx="3566160" cy="1874520"/>
           </a:xfrm>
           <a:prstGeom prst="roundRect">
             <a:avLst>
-              <a:gd name="adj" fmla="val 6667"/>
+              <a:gd name="adj" fmla="val 6829"/>
             </a:avLst>
           </a:prstGeom>
           <a:solidFill>
@@ -6721,7 +8954,7 @@
       </p:sp>
       <p:pic>
         <p:nvPicPr>
-          <p:cNvPr id="10" name="!!ci01" descr="/home/claude/multi-agent-deck/assets/icons/TbTool_534AB7.png">    </p:cNvPr>
+          <p:cNvPr id="13" name="!!ci01" descr="/tmp/deck-icons/TbTool_534AB7.png">    </p:cNvPr>
           <p:cNvPicPr>
             <a:picLocks noChangeAspect="1"/>
           </p:cNvPicPr>
@@ -6735,7 +8968,7 @@
         </p:blipFill>
         <p:spPr>
           <a:xfrm>
-            <a:off x="731520" y="3931920"/>
+            <a:off x="731520" y="4023360"/>
             <a:ext cx="274320" cy="274320"/>
           </a:xfrm>
           <a:prstGeom prst="rect">
@@ -6745,13 +8978,13 @@
       </p:pic>
       <p:sp>
         <p:nvSpPr>
-          <p:cNvPr id="11" name="!!cn01"/>
+          <p:cNvPr id="14" name="!!cn01"/>
           <p:cNvSpPr txBox="1"/>
           <p:nvPr/>
         </p:nvSpPr>
         <p:spPr>
           <a:xfrm>
-            <a:off x="1097280" y="3913632"/>
+            <a:off x="1097280" y="4005072"/>
             <a:ext cx="2834640" cy="329184"/>
           </a:xfrm>
           <a:prstGeom prst="rect">
@@ -6784,13 +9017,13 @@
       </p:sp>
       <p:sp>
         <p:nvSpPr>
-          <p:cNvPr id="12" name="!!cb01"/>
+          <p:cNvPr id="15" name="!!cb01"/>
           <p:cNvSpPr txBox="1"/>
           <p:nvPr/>
         </p:nvSpPr>
         <p:spPr>
           <a:xfrm>
-            <a:off x="731520" y="4315968"/>
+            <a:off x="731520" y="4407408"/>
             <a:ext cx="3200400" cy="1280160"/>
           </a:xfrm>
           <a:prstGeom prst="rect">
@@ -6917,7 +9150,7 @@
       </p:sp>
       <p:pic>
         <p:nvPicPr>
-          <p:cNvPr id="13" name="!!fi1" descr="/home/claude/multi-agent-deck/assets/icons/TbPlayerPlay_0F6E56.png">    </p:cNvPr>
+          <p:cNvPr id="16" name="!!fi1" descr="/tmp/deck-icons/TbPlayerPlay_0F6E56.png">    </p:cNvPr>
           <p:cNvPicPr>
             <a:picLocks noChangeAspect="1"/>
           </p:cNvPicPr>
@@ -6931,7 +9164,7 @@
         </p:blipFill>
         <p:spPr>
           <a:xfrm>
-            <a:off x="4297680" y="1143000"/>
+            <a:off x="4297680" y="1371600"/>
             <a:ext cx="292608" cy="292608"/>
           </a:xfrm>
           <a:prstGeom prst="rect">
@@ -6941,13 +9174,13 @@
       </p:pic>
       <p:sp>
         <p:nvSpPr>
-          <p:cNvPr id="14" name="!!fh1"/>
+          <p:cNvPr id="17" name="!!fh1"/>
           <p:cNvSpPr txBox="1"/>
           <p:nvPr/>
         </p:nvSpPr>
         <p:spPr>
           <a:xfrm>
-            <a:off x="4681728" y="1143000"/>
+            <a:off x="4681728" y="1371600"/>
             <a:ext cx="3182112" cy="310896"/>
           </a:xfrm>
           <a:prstGeom prst="rect">
@@ -6980,18 +9213,18 @@
       </p:sp>
       <p:sp>
         <p:nvSpPr>
-          <p:cNvPr id="15" name="!!card10"/>
+          <p:cNvPr id="18" name="!!card10"/>
           <p:cNvSpPr/>
           <p:nvPr/>
         </p:nvSpPr>
         <p:spPr>
           <a:xfrm>
-            <a:off x="4297680" y="1645920"/>
-            <a:ext cx="3566160" cy="1920240"/>
+            <a:off x="4297680" y="1828800"/>
+            <a:ext cx="3566160" cy="1874520"/>
           </a:xfrm>
           <a:prstGeom prst="roundRect">
             <a:avLst>
-              <a:gd name="adj" fmla="val 6667"/>
+              <a:gd name="adj" fmla="val 6829"/>
             </a:avLst>
           </a:prstGeom>
           <a:solidFill>
@@ -7017,7 +9250,7 @@
       </p:sp>
       <p:pic>
         <p:nvPicPr>
-          <p:cNvPr id="16" name="!!ci10" descr="/home/claude/multi-agent-deck/assets/icons/TbRepeat_0F6E56.png">    </p:cNvPr>
+          <p:cNvPr id="19" name="!!ci10" descr="/tmp/deck-icons/TbRepeat_0F6E56.png">    </p:cNvPr>
           <p:cNvPicPr>
             <a:picLocks noChangeAspect="1"/>
           </p:cNvPicPr>
@@ -7031,7 +9264,7 @@
         </p:blipFill>
         <p:spPr>
           <a:xfrm>
-            <a:off x="4480560" y="1828800"/>
+            <a:off x="4480560" y="2011680"/>
             <a:ext cx="274320" cy="274320"/>
           </a:xfrm>
           <a:prstGeom prst="rect">
@@ -7041,13 +9274,13 @@
       </p:pic>
       <p:sp>
         <p:nvSpPr>
-          <p:cNvPr id="17" name="!!cn10"/>
+          <p:cNvPr id="20" name="!!cn10"/>
           <p:cNvSpPr txBox="1"/>
           <p:nvPr/>
         </p:nvSpPr>
         <p:spPr>
           <a:xfrm>
-            <a:off x="4846320" y="1810512"/>
+            <a:off x="4846320" y="1993392"/>
             <a:ext cx="2834640" cy="329184"/>
           </a:xfrm>
           <a:prstGeom prst="rect">
@@ -7080,13 +9313,13 @@
       </p:sp>
       <p:sp>
         <p:nvSpPr>
-          <p:cNvPr id="18" name="!!cb10"/>
+          <p:cNvPr id="21" name="!!cb10"/>
           <p:cNvSpPr txBox="1"/>
           <p:nvPr/>
         </p:nvSpPr>
         <p:spPr>
           <a:xfrm>
-            <a:off x="4480560" y="2212848"/>
+            <a:off x="4480560" y="2395728"/>
             <a:ext cx="3200400" cy="1280160"/>
           </a:xfrm>
           <a:prstGeom prst="rect">
@@ -7213,18 +9446,18 @@
       </p:sp>
       <p:sp>
         <p:nvSpPr>
-          <p:cNvPr id="19" name="!!card11"/>
+          <p:cNvPr id="22" name="!!card11"/>
           <p:cNvSpPr/>
           <p:nvPr/>
         </p:nvSpPr>
         <p:spPr>
           <a:xfrm>
-            <a:off x="4297680" y="3749040"/>
-            <a:ext cx="3566160" cy="1920240"/>
+            <a:off x="4297680" y="3840480"/>
+            <a:ext cx="3566160" cy="1874520"/>
           </a:xfrm>
           <a:prstGeom prst="roundRect">
             <a:avLst>
-              <a:gd name="adj" fmla="val 6667"/>
+              <a:gd name="adj" fmla="val 6829"/>
             </a:avLst>
           </a:prstGeom>
           <a:solidFill>
@@ -7250,7 +9483,7 @@
       </p:sp>
       <p:pic>
         <p:nvPicPr>
-          <p:cNvPr id="20" name="!!ci11" descr="/home/claude/multi-agent-deck/assets/icons/TbStack2_0F6E56.png">    </p:cNvPr>
+          <p:cNvPr id="23" name="!!ci11" descr="/tmp/deck-icons/TbStack2_0F6E56.png">    </p:cNvPr>
           <p:cNvPicPr>
             <a:picLocks noChangeAspect="1"/>
           </p:cNvPicPr>
@@ -7264,7 +9497,7 @@
         </p:blipFill>
         <p:spPr>
           <a:xfrm>
-            <a:off x="4480560" y="3931920"/>
+            <a:off x="4480560" y="4023360"/>
             <a:ext cx="274320" cy="274320"/>
           </a:xfrm>
           <a:prstGeom prst="rect">
@@ -7274,13 +9507,13 @@
       </p:pic>
       <p:sp>
         <p:nvSpPr>
-          <p:cNvPr id="21" name="!!cn11"/>
+          <p:cNvPr id="24" name="!!cn11"/>
           <p:cNvSpPr txBox="1"/>
           <p:nvPr/>
         </p:nvSpPr>
         <p:spPr>
           <a:xfrm>
-            <a:off x="4846320" y="3913632"/>
+            <a:off x="4846320" y="4005072"/>
             <a:ext cx="2834640" cy="329184"/>
           </a:xfrm>
           <a:prstGeom prst="rect">
@@ -7313,13 +9546,13 @@
       </p:sp>
       <p:sp>
         <p:nvSpPr>
-          <p:cNvPr id="22" name="!!cb11"/>
+          <p:cNvPr id="25" name="!!cb11"/>
           <p:cNvSpPr txBox="1"/>
           <p:nvPr/>
         </p:nvSpPr>
         <p:spPr>
           <a:xfrm>
-            <a:off x="4480560" y="4315968"/>
+            <a:off x="4480560" y="4407408"/>
             <a:ext cx="3200400" cy="1280160"/>
           </a:xfrm>
           <a:prstGeom prst="rect">
@@ -7446,7 +9679,7 @@
       </p:sp>
       <p:pic>
         <p:nvPicPr>
-          <p:cNvPr id="23" name="!!fi2" descr="/home/claude/multi-agent-deck/assets/icons/TbChecklist_993C1D.png">    </p:cNvPr>
+          <p:cNvPr id="26" name="!!fi2" descr="/tmp/deck-icons/TbChecklist_993C1D.png">    </p:cNvPr>
           <p:cNvPicPr>
             <a:picLocks noChangeAspect="1"/>
           </p:cNvPicPr>
@@ -7460,7 +9693,7 @@
         </p:blipFill>
         <p:spPr>
           <a:xfrm>
-            <a:off x="8046720" y="1143000"/>
+            <a:off x="8046720" y="1371600"/>
             <a:ext cx="292608" cy="292608"/>
           </a:xfrm>
           <a:prstGeom prst="rect">
@@ -7470,13 +9703,13 @@
       </p:pic>
       <p:sp>
         <p:nvSpPr>
-          <p:cNvPr id="24" name="!!fh2"/>
+          <p:cNvPr id="27" name="!!fh2"/>
           <p:cNvSpPr txBox="1"/>
           <p:nvPr/>
         </p:nvSpPr>
         <p:spPr>
           <a:xfrm>
-            <a:off x="8430768" y="1143000"/>
+            <a:off x="8430768" y="1371600"/>
             <a:ext cx="3182112" cy="310896"/>
           </a:xfrm>
           <a:prstGeom prst="rect">
@@ -7509,18 +9742,18 @@
       </p:sp>
       <p:sp>
         <p:nvSpPr>
-          <p:cNvPr id="25" name="!!card20"/>
+          <p:cNvPr id="28" name="!!card20"/>
           <p:cNvSpPr/>
           <p:nvPr/>
         </p:nvSpPr>
         <p:spPr>
           <a:xfrm>
-            <a:off x="8046720" y="1645920"/>
-            <a:ext cx="3566160" cy="1920240"/>
+            <a:off x="8046720" y="1828800"/>
+            <a:ext cx="3566160" cy="1874520"/>
           </a:xfrm>
           <a:prstGeom prst="roundRect">
             <a:avLst>
-              <a:gd name="adj" fmla="val 6667"/>
+              <a:gd name="adj" fmla="val 6829"/>
             </a:avLst>
           </a:prstGeom>
           <a:solidFill>
@@ -7546,7 +9779,7 @@
       </p:sp>
       <p:pic>
         <p:nvPicPr>
-          <p:cNvPr id="26" name="!!ci20" descr="/home/claude/multi-agent-deck/assets/icons/TbMoodCheck_993C1D.png">    </p:cNvPr>
+          <p:cNvPr id="29" name="!!ci20" descr="/tmp/deck-icons/TbMoodCheck_993C1D.png">    </p:cNvPr>
           <p:cNvPicPr>
             <a:picLocks noChangeAspect="1"/>
           </p:cNvPicPr>
@@ -7560,7 +9793,7 @@
         </p:blipFill>
         <p:spPr>
           <a:xfrm>
-            <a:off x="8229600" y="1828800"/>
+            <a:off x="8229600" y="2011680"/>
             <a:ext cx="274320" cy="274320"/>
           </a:xfrm>
           <a:prstGeom prst="rect">
@@ -7570,13 +9803,13 @@
       </p:pic>
       <p:sp>
         <p:nvSpPr>
-          <p:cNvPr id="27" name="!!cn20"/>
+          <p:cNvPr id="30" name="!!cn20"/>
           <p:cNvSpPr txBox="1"/>
           <p:nvPr/>
         </p:nvSpPr>
         <p:spPr>
           <a:xfrm>
-            <a:off x="8595360" y="1810512"/>
+            <a:off x="8595360" y="1993392"/>
             <a:ext cx="2834640" cy="329184"/>
           </a:xfrm>
           <a:prstGeom prst="rect">
@@ -7609,13 +9842,13 @@
       </p:sp>
       <p:sp>
         <p:nvSpPr>
-          <p:cNvPr id="28" name="!!cb20"/>
+          <p:cNvPr id="31" name="!!cb20"/>
           <p:cNvSpPr txBox="1"/>
           <p:nvPr/>
         </p:nvSpPr>
         <p:spPr>
           <a:xfrm>
-            <a:off x="8229600" y="2212848"/>
+            <a:off x="8229600" y="2395728"/>
             <a:ext cx="3200400" cy="1280160"/>
           </a:xfrm>
           <a:prstGeom prst="rect">
@@ -7742,18 +9975,18 @@
       </p:sp>
       <p:sp>
         <p:nvSpPr>
-          <p:cNvPr id="29" name="!!card21"/>
+          <p:cNvPr id="32" name="!!card21"/>
           <p:cNvSpPr/>
           <p:nvPr/>
         </p:nvSpPr>
         <p:spPr>
           <a:xfrm>
-            <a:off x="8046720" y="3749040"/>
-            <a:ext cx="3566160" cy="1920240"/>
+            <a:off x="8046720" y="3840480"/>
+            <a:ext cx="3566160" cy="1874520"/>
           </a:xfrm>
           <a:prstGeom prst="roundRect">
             <a:avLst>
-              <a:gd name="adj" fmla="val 6667"/>
+              <a:gd name="adj" fmla="val 6829"/>
             </a:avLst>
           </a:prstGeom>
           <a:solidFill>
@@ -7779,7 +10012,7 @@
       </p:sp>
       <p:pic>
         <p:nvPicPr>
-          <p:cNvPr id="30" name="!!ci21" descr="/home/claude/multi-agent-deck/assets/icons/TbPlayerStop_993C1D.png">    </p:cNvPr>
+          <p:cNvPr id="33" name="!!ci21" descr="/tmp/deck-icons/TbPlayerStop_993C1D.png">    </p:cNvPr>
           <p:cNvPicPr>
             <a:picLocks noChangeAspect="1"/>
           </p:cNvPicPr>
@@ -7793,7 +10026,7 @@
         </p:blipFill>
         <p:spPr>
           <a:xfrm>
-            <a:off x="8229600" y="3931920"/>
+            <a:off x="8229600" y="4023360"/>
             <a:ext cx="274320" cy="274320"/>
           </a:xfrm>
           <a:prstGeom prst="rect">
@@ -7803,13 +10036,13 @@
       </p:pic>
       <p:sp>
         <p:nvSpPr>
-          <p:cNvPr id="31" name="!!cn21"/>
+          <p:cNvPr id="34" name="!!cn21"/>
           <p:cNvSpPr txBox="1"/>
           <p:nvPr/>
         </p:nvSpPr>
         <p:spPr>
           <a:xfrm>
-            <a:off x="8595360" y="3913632"/>
+            <a:off x="8595360" y="4005072"/>
             <a:ext cx="2834640" cy="329184"/>
           </a:xfrm>
           <a:prstGeom prst="rect">
@@ -7842,13 +10075,13 @@
       </p:sp>
       <p:sp>
         <p:nvSpPr>
-          <p:cNvPr id="32" name="!!cb21"/>
+          <p:cNvPr id="35" name="!!cb21"/>
           <p:cNvSpPr txBox="1"/>
           <p:nvPr/>
         </p:nvSpPr>
         <p:spPr>
           <a:xfrm>
-            <a:off x="8229600" y="4315968"/>
+            <a:off x="8229600" y="4407408"/>
             <a:ext cx="3200400" cy="1280160"/>
           </a:xfrm>
           <a:prstGeom prst="rect">
@@ -7975,13 +10208,13 @@
       </p:sp>
       <p:sp>
         <p:nvSpPr>
-          <p:cNvPr id="33" name="!!take4"/>
+          <p:cNvPr id="36" name="!!take4"/>
           <p:cNvSpPr txBox="1"/>
           <p:nvPr/>
         </p:nvSpPr>
         <p:spPr>
           <a:xfrm>
-            <a:off x="548640" y="5989320"/>
+            <a:off x="548640" y="5852160"/>
             <a:ext cx="11064240" cy="411480"/>
           </a:xfrm>
           <a:prstGeom prst="rect">
@@ -8009,6 +10242,54 @@
               <a:t>Every failure is one of three jobs going wrong, and every cause is a design choice.</a:t>
             </a:r>
             <a:endParaRPr lang="en-US" sz="1700" dirty="0"/>
+          </a:p>
+        </p:txBody>
+      </p:sp>
+      <p:sp>
+        <p:nvSpPr>
+          <p:cNvPr id="25" name="Slide Number Placeholder 0"/>
+          <p:cNvSpPr>
+            <a:spLocks noGrp="1"/>
+          </p:cNvSpPr>
+          <p:nvPr>
+            <p:ph type="sldNum" sz="quarter" idx="4294967295"/>
+          </p:nvPr>
+        </p:nvSpPr>
+        <p:spPr>
+          <a:xfrm>
+            <a:off x="5641848" y="6382512"/>
+            <a:ext cx="914400" cy="201168"/>
+          </a:xfrm>
+          <a:prstGeom prst="rect">
+            <a:avLst/>
+          </a:prstGeom>
+          <a:extLst>
+            <a:ext uri="{C572A759-6A51-4108-AA02-DFA0A04FC94B}">
+              <ma14:wrappingTextBoxFlag xmlns:ma14="http://schemas.microsoft.com/office/mac/drawingml/2011/main" val="0"/>
+            </a:ext>
+          </a:extLst>
+        </p:spPr>
+        <p:txBody>
+          <a:bodyPr/>
+          <a:lstStyle>
+            <a:lvl1pPr>
+              <a:defRPr sz="1000">
+                <a:solidFill>
+                  <a:srgbClr val="595959"/>
+                </a:solidFill>
+                <a:latin typeface="Arial"/>
+                <a:ea typeface="Arial"/>
+                <a:cs typeface="Arial"/>
+              </a:defRPr>
+            </a:lvl1pPr>
+          </a:lstStyle>
+          <a:p>
+            <a:pPr algn="ctr"/>
+            <a:fld id="{F7021451-1387-4CA6-816F-3879F97B5CBC}" type="slidenum">
+              <a:rPr b="0" lang="en-US"/>
+              <a:t>33</a:t>
+            </a:fld>
+            <a:endParaRPr lang="en-US"/>
           </a:p>
         </p:txBody>
       </p:sp>
@@ -8054,7 +10335,7 @@
                                           </p:stCondLst>
                                         </p:cTn>
                                         <p:tgtEl>
-                                          <p:spTgt spid="13"/>
+                                          <p:spTgt spid="16"/>
                                         </p:tgtEl>
                                         <p:attrNameLst>
                                           <p:attrName>style.visibility</p:attrName>
@@ -8068,7 +10349,7 @@
                                       <p:cBhvr>
                                         <p:cTn id="7" dur="500"/>
                                         <p:tgtEl>
-                                          <p:spTgt spid="13"/>
+                                          <p:spTgt spid="16"/>
                                         </p:tgtEl>
                                       </p:cBhvr>
                                     </p:animEffect>
@@ -8089,7 +10370,7 @@
                                           </p:stCondLst>
                                         </p:cTn>
                                         <p:tgtEl>
-                                          <p:spTgt spid="14"/>
+                                          <p:spTgt spid="17"/>
                                         </p:tgtEl>
                                         <p:attrNameLst>
                                           <p:attrName>style.visibility</p:attrName>
@@ -8103,7 +10384,7 @@
                                       <p:cBhvr>
                                         <p:cTn id="10" dur="500"/>
                                         <p:tgtEl>
-                                          <p:spTgt spid="14"/>
+                                          <p:spTgt spid="17"/>
                                         </p:tgtEl>
                                       </p:cBhvr>
                                     </p:animEffect>
@@ -8124,7 +10405,7 @@
                                           </p:stCondLst>
                                         </p:cTn>
                                         <p:tgtEl>
-                                          <p:spTgt spid="15"/>
+                                          <p:spTgt spid="18"/>
                                         </p:tgtEl>
                                         <p:attrNameLst>
                                           <p:attrName>style.visibility</p:attrName>
@@ -8138,7 +10419,7 @@
                                       <p:cBhvr>
                                         <p:cTn id="13" dur="500"/>
                                         <p:tgtEl>
-                                          <p:spTgt spid="15"/>
+                                          <p:spTgt spid="18"/>
                                         </p:tgtEl>
                                       </p:cBhvr>
                                     </p:animEffect>
@@ -8159,7 +10440,7 @@
                                           </p:stCondLst>
                                         </p:cTn>
                                         <p:tgtEl>
-                                          <p:spTgt spid="16"/>
+                                          <p:spTgt spid="19"/>
                                         </p:tgtEl>
                                         <p:attrNameLst>
                                           <p:attrName>style.visibility</p:attrName>
@@ -8173,7 +10454,7 @@
                                       <p:cBhvr>
                                         <p:cTn id="16" dur="500"/>
                                         <p:tgtEl>
-                                          <p:spTgt spid="16"/>
+                                          <p:spTgt spid="19"/>
                                         </p:tgtEl>
                                       </p:cBhvr>
                                     </p:animEffect>
@@ -8194,7 +10475,7 @@
                                           </p:stCondLst>
                                         </p:cTn>
                                         <p:tgtEl>
-                                          <p:spTgt spid="17"/>
+                                          <p:spTgt spid="20"/>
                                         </p:tgtEl>
                                         <p:attrNameLst>
                                           <p:attrName>style.visibility</p:attrName>
@@ -8208,7 +10489,7 @@
                                       <p:cBhvr>
                                         <p:cTn id="19" dur="500"/>
                                         <p:tgtEl>
-                                          <p:spTgt spid="17"/>
+                                          <p:spTgt spid="20"/>
                                         </p:tgtEl>
                                       </p:cBhvr>
                                     </p:animEffect>
@@ -8229,7 +10510,7 @@
                                           </p:stCondLst>
                                         </p:cTn>
                                         <p:tgtEl>
-                                          <p:spTgt spid="18"/>
+                                          <p:spTgt spid="21"/>
                                         </p:tgtEl>
                                         <p:attrNameLst>
                                           <p:attrName>style.visibility</p:attrName>
@@ -8243,7 +10524,7 @@
                                       <p:cBhvr>
                                         <p:cTn id="22" dur="500"/>
                                         <p:tgtEl>
-                                          <p:spTgt spid="18"/>
+                                          <p:spTgt spid="21"/>
                                         </p:tgtEl>
                                       </p:cBhvr>
                                     </p:animEffect>
@@ -8264,7 +10545,7 @@
                                           </p:stCondLst>
                                         </p:cTn>
                                         <p:tgtEl>
-                                          <p:spTgt spid="19"/>
+                                          <p:spTgt spid="22"/>
                                         </p:tgtEl>
                                         <p:attrNameLst>
                                           <p:attrName>style.visibility</p:attrName>
@@ -8278,7 +10559,7 @@
                                       <p:cBhvr>
                                         <p:cTn id="25" dur="500"/>
                                         <p:tgtEl>
-                                          <p:spTgt spid="19"/>
+                                          <p:spTgt spid="22"/>
                                         </p:tgtEl>
                                       </p:cBhvr>
                                     </p:animEffect>
@@ -8299,7 +10580,7 @@
                                           </p:stCondLst>
                                         </p:cTn>
                                         <p:tgtEl>
-                                          <p:spTgt spid="20"/>
+                                          <p:spTgt spid="23"/>
                                         </p:tgtEl>
                                         <p:attrNameLst>
                                           <p:attrName>style.visibility</p:attrName>
@@ -8313,7 +10594,7 @@
                                       <p:cBhvr>
                                         <p:cTn id="28" dur="500"/>
                                         <p:tgtEl>
-                                          <p:spTgt spid="20"/>
+                                          <p:spTgt spid="23"/>
                                         </p:tgtEl>
                                       </p:cBhvr>
                                     </p:animEffect>
@@ -8334,7 +10615,7 @@
                                           </p:stCondLst>
                                         </p:cTn>
                                         <p:tgtEl>
-                                          <p:spTgt spid="21"/>
+                                          <p:spTgt spid="24"/>
                                         </p:tgtEl>
                                         <p:attrNameLst>
                                           <p:attrName>style.visibility</p:attrName>
@@ -8348,7 +10629,7 @@
                                       <p:cBhvr>
                                         <p:cTn id="31" dur="500"/>
                                         <p:tgtEl>
-                                          <p:spTgt spid="21"/>
+                                          <p:spTgt spid="24"/>
                                         </p:tgtEl>
                                       </p:cBhvr>
                                     </p:animEffect>
@@ -8369,7 +10650,7 @@
                                           </p:stCondLst>
                                         </p:cTn>
                                         <p:tgtEl>
-                                          <p:spTgt spid="22"/>
+                                          <p:spTgt spid="25"/>
                                         </p:tgtEl>
                                         <p:attrNameLst>
                                           <p:attrName>style.visibility</p:attrName>
@@ -8383,7 +10664,7 @@
                                       <p:cBhvr>
                                         <p:cTn id="34" dur="500"/>
                                         <p:tgtEl>
-                                          <p:spTgt spid="22"/>
+                                          <p:spTgt spid="25"/>
                                         </p:tgtEl>
                                       </p:cBhvr>
                                     </p:animEffect>
@@ -8422,7 +10703,7 @@
                                           </p:stCondLst>
                                         </p:cTn>
                                         <p:tgtEl>
-                                          <p:spTgt spid="23"/>
+                                          <p:spTgt spid="26"/>
                                         </p:tgtEl>
                                         <p:attrNameLst>
                                           <p:attrName>style.visibility</p:attrName>
@@ -8436,7 +10717,7 @@
                                       <p:cBhvr>
                                         <p:cTn id="39" dur="500"/>
                                         <p:tgtEl>
-                                          <p:spTgt spid="23"/>
+                                          <p:spTgt spid="26"/>
                                         </p:tgtEl>
                                       </p:cBhvr>
                                     </p:animEffect>
@@ -8457,7 +10738,7 @@
                                           </p:stCondLst>
                                         </p:cTn>
                                         <p:tgtEl>
-                                          <p:spTgt spid="24"/>
+                                          <p:spTgt spid="27"/>
                                         </p:tgtEl>
                                         <p:attrNameLst>
                                           <p:attrName>style.visibility</p:attrName>
@@ -8471,7 +10752,7 @@
                                       <p:cBhvr>
                                         <p:cTn id="42" dur="500"/>
                                         <p:tgtEl>
-                                          <p:spTgt spid="24"/>
+                                          <p:spTgt spid="27"/>
                                         </p:tgtEl>
                                       </p:cBhvr>
                                     </p:animEffect>
@@ -8492,7 +10773,7 @@
                                           </p:stCondLst>
                                         </p:cTn>
                                         <p:tgtEl>
-                                          <p:spTgt spid="25"/>
+                                          <p:spTgt spid="28"/>
                                         </p:tgtEl>
                                         <p:attrNameLst>
                                           <p:attrName>style.visibility</p:attrName>
@@ -8506,7 +10787,7 @@
                                       <p:cBhvr>
                                         <p:cTn id="45" dur="500"/>
                                         <p:tgtEl>
-                                          <p:spTgt spid="25"/>
+                                          <p:spTgt spid="28"/>
                                         </p:tgtEl>
                                       </p:cBhvr>
                                     </p:animEffect>
@@ -8527,7 +10808,7 @@
                                           </p:stCondLst>
                                         </p:cTn>
                                         <p:tgtEl>
-                                          <p:spTgt spid="26"/>
+                                          <p:spTgt spid="29"/>
                                         </p:tgtEl>
                                         <p:attrNameLst>
                                           <p:attrName>style.visibility</p:attrName>
@@ -8541,7 +10822,7 @@
                                       <p:cBhvr>
                                         <p:cTn id="48" dur="500"/>
                                         <p:tgtEl>
-                                          <p:spTgt spid="26"/>
+                                          <p:spTgt spid="29"/>
                                         </p:tgtEl>
                                       </p:cBhvr>
                                     </p:animEffect>
@@ -8562,7 +10843,7 @@
                                           </p:stCondLst>
                                         </p:cTn>
                                         <p:tgtEl>
-                                          <p:spTgt spid="27"/>
+                                          <p:spTgt spid="30"/>
                                         </p:tgtEl>
                                         <p:attrNameLst>
                                           <p:attrName>style.visibility</p:attrName>
@@ -8576,7 +10857,7 @@
                                       <p:cBhvr>
                                         <p:cTn id="51" dur="500"/>
                                         <p:tgtEl>
-                                          <p:spTgt spid="27"/>
+                                          <p:spTgt spid="30"/>
                                         </p:tgtEl>
                                       </p:cBhvr>
                                     </p:animEffect>
@@ -8597,7 +10878,7 @@
                                           </p:stCondLst>
                                         </p:cTn>
                                         <p:tgtEl>
-                                          <p:spTgt spid="28"/>
+                                          <p:spTgt spid="31"/>
                                         </p:tgtEl>
                                         <p:attrNameLst>
                                           <p:attrName>style.visibility</p:attrName>
@@ -8611,7 +10892,7 @@
                                       <p:cBhvr>
                                         <p:cTn id="54" dur="500"/>
                                         <p:tgtEl>
-                                          <p:spTgt spid="28"/>
+                                          <p:spTgt spid="31"/>
                                         </p:tgtEl>
                                       </p:cBhvr>
                                     </p:animEffect>
@@ -8632,7 +10913,7 @@
                                           </p:stCondLst>
                                         </p:cTn>
                                         <p:tgtEl>
-                                          <p:spTgt spid="29"/>
+                                          <p:spTgt spid="32"/>
                                         </p:tgtEl>
                                         <p:attrNameLst>
                                           <p:attrName>style.visibility</p:attrName>
@@ -8646,7 +10927,7 @@
                                       <p:cBhvr>
                                         <p:cTn id="57" dur="500"/>
                                         <p:tgtEl>
-                                          <p:spTgt spid="29"/>
+                                          <p:spTgt spid="32"/>
                                         </p:tgtEl>
                                       </p:cBhvr>
                                     </p:animEffect>
@@ -8667,7 +10948,7 @@
                                           </p:stCondLst>
                                         </p:cTn>
                                         <p:tgtEl>
-                                          <p:spTgt spid="30"/>
+                                          <p:spTgt spid="33"/>
                                         </p:tgtEl>
                                         <p:attrNameLst>
                                           <p:attrName>style.visibility</p:attrName>
@@ -8681,7 +10962,7 @@
                                       <p:cBhvr>
                                         <p:cTn id="60" dur="500"/>
                                         <p:tgtEl>
-                                          <p:spTgt spid="30"/>
+                                          <p:spTgt spid="33"/>
                                         </p:tgtEl>
                                       </p:cBhvr>
                                     </p:animEffect>
@@ -8702,7 +10983,7 @@
                                           </p:stCondLst>
                                         </p:cTn>
                                         <p:tgtEl>
-                                          <p:spTgt spid="31"/>
+                                          <p:spTgt spid="34"/>
                                         </p:tgtEl>
                                         <p:attrNameLst>
                                           <p:attrName>style.visibility</p:attrName>
@@ -8716,7 +10997,7 @@
                                       <p:cBhvr>
                                         <p:cTn id="63" dur="500"/>
                                         <p:tgtEl>
-                                          <p:spTgt spid="31"/>
+                                          <p:spTgt spid="34"/>
                                         </p:tgtEl>
                                       </p:cBhvr>
                                     </p:animEffect>
@@ -8737,7 +11018,7 @@
                                           </p:stCondLst>
                                         </p:cTn>
                                         <p:tgtEl>
-                                          <p:spTgt spid="32"/>
+                                          <p:spTgt spid="35"/>
                                         </p:tgtEl>
                                         <p:attrNameLst>
                                           <p:attrName>style.visibility</p:attrName>
@@ -8751,7 +11032,7 @@
                                       <p:cBhvr>
                                         <p:cTn id="66" dur="500"/>
                                         <p:tgtEl>
-                                          <p:spTgt spid="32"/>
+                                          <p:spTgt spid="35"/>
                                         </p:tgtEl>
                                       </p:cBhvr>
                                     </p:animEffect>
@@ -8772,7 +11053,7 @@
                                           </p:stCondLst>
                                         </p:cTn>
                                         <p:tgtEl>
-                                          <p:spTgt spid="33"/>
+                                          <p:spTgt spid="36"/>
                                         </p:tgtEl>
                                         <p:attrNameLst>
                                           <p:attrName>style.visibility</p:attrName>
@@ -8786,7 +11067,7 @@
                                       <p:cBhvr>
                                         <p:cTn id="69" dur="500"/>
                                         <p:tgtEl>
-                                          <p:spTgt spid="33"/>
+                                          <p:spTgt spid="36"/>
                                         </p:tgtEl>
                                       </p:cBhvr>
                                     </p:animEffect>
@@ -8821,21 +11102,21 @@
       </p:par>
     </p:tnLst>
     <p:bldLst>
-      <p:bldP spid="14" grpId="0" animBg="1"/>
-      <p:bldP spid="15" grpId="0" animBg="1"/>
       <p:bldP spid="17" grpId="0" animBg="1"/>
       <p:bldP spid="18" grpId="0" animBg="1"/>
-      <p:bldP spid="19" grpId="0" animBg="1"/>
+      <p:bldP spid="20" grpId="0" animBg="1"/>
       <p:bldP spid="21" grpId="0" animBg="1"/>
       <p:bldP spid="22" grpId="0" animBg="1"/>
       <p:bldP spid="24" grpId="0" animBg="1"/>
       <p:bldP spid="25" grpId="0" animBg="1"/>
       <p:bldP spid="27" grpId="0" animBg="1"/>
       <p:bldP spid="28" grpId="0" animBg="1"/>
-      <p:bldP spid="29" grpId="0" animBg="1"/>
+      <p:bldP spid="30" grpId="0" animBg="1"/>
       <p:bldP spid="31" grpId="0" animBg="1"/>
       <p:bldP spid="32" grpId="0" animBg="1"/>
-      <p:bldP spid="33" grpId="0" animBg="1"/>
+      <p:bldP spid="34" grpId="0" animBg="1"/>
+      <p:bldP spid="35" grpId="0" animBg="1"/>
+      <p:bldP spid="36" grpId="0" animBg="1"/>
     </p:bldLst>
   </p:timing>
 </p:sld>
@@ -8873,8 +11154,8 @@
         </p:nvSpPr>
         <p:spPr>
           <a:xfrm>
-            <a:off x="502920" y="292608"/>
-            <a:ext cx="11155680" cy="640080"/>
+            <a:off x="411480" y="201168"/>
+            <a:ext cx="11338560" cy="530352"/>
           </a:xfrm>
           <a:prstGeom prst="rect">
             <a:avLst/>
@@ -8883,16 +11164,16 @@
           <a:ln/>
         </p:spPr>
         <p:txBody>
-          <a:bodyPr wrap="square" lIns="0" tIns="0" rIns="0" bIns="0" rtlCol="0" anchor="t"/>
+          <a:bodyPr wrap="square" lIns="0" tIns="0" rIns="0" bIns="0" rtlCol="0" anchor="b"/>
           <a:lstStyle/>
           <a:p>
             <a:pPr algn="l" indent="0" marL="0">
               <a:buNone/>
             </a:pPr>
             <a:r>
-              <a:rPr lang="en-US" sz="3000" b="1" dirty="0">
-                <a:solidFill>
-                  <a:srgbClr val="2C2C2A"/>
+              <a:rPr lang="en-US" sz="2600" b="1" dirty="0">
+                <a:solidFill>
+                  <a:srgbClr val="1A1A1A"/>
                 </a:solidFill>
                 <a:latin typeface="Calibri" pitchFamily="34" charset="0"/>
                 <a:ea typeface="Calibri" pitchFamily="34" charset="-122"/>
@@ -8900,19 +11181,120 @@
               </a:rPr>
               <a:t>Root Cause: A System Design Problem</a:t>
             </a:r>
-            <a:endParaRPr lang="en-US" sz="3000" dirty="0"/>
-          </a:p>
-        </p:txBody>
-      </p:sp>
-      <p:sp>
-        <p:nvSpPr>
-          <p:cNvPr id="3" name="!!task"/>
+            <a:endParaRPr lang="en-US" sz="2600" dirty="0"/>
+          </a:p>
+        </p:txBody>
+      </p:sp>
+      <p:sp>
+        <p:nvSpPr>
+          <p:cNvPr id="3" name="!!rule"/>
           <p:cNvSpPr/>
           <p:nvPr/>
         </p:nvSpPr>
         <p:spPr>
           <a:xfrm>
-            <a:off x="3821095" y="1269919"/>
+            <a:off x="411480" y="804672"/>
+            <a:ext cx="11365992" cy="914"/>
+          </a:xfrm>
+          <a:prstGeom prst="line">
+            <a:avLst/>
+          </a:prstGeom>
+          <a:noFill/>
+          <a:ln w="9525">
+            <a:solidFill>
+              <a:srgbClr val="7F7F7F"/>
+            </a:solidFill>
+            <a:prstDash val="solid"/>
+          </a:ln>
+        </p:spPr>
+      </p:sp>
+      <p:sp>
+        <p:nvSpPr>
+          <p:cNvPr id="4" name="!!lead"/>
+          <p:cNvSpPr txBox="1"/>
+          <p:nvPr/>
+        </p:nvSpPr>
+        <p:spPr>
+          <a:xfrm>
+            <a:off x="411480" y="886968"/>
+            <a:ext cx="11338560" cy="438912"/>
+          </a:xfrm>
+          <a:prstGeom prst="rect">
+            <a:avLst/>
+          </a:prstGeom>
+          <a:noFill/>
+          <a:ln/>
+        </p:spPr>
+        <p:txBody>
+          <a:bodyPr wrap="square" lIns="0" tIns="0" rIns="0" bIns="0" rtlCol="0" anchor="t"/>
+          <a:lstStyle/>
+          <a:p>
+            <a:pPr indent="0" marL="0">
+              <a:buNone/>
+            </a:pPr>
+            <a:r>
+              <a:rPr lang="en-US" sz="1400" dirty="0">
+                <a:solidFill>
+                  <a:srgbClr val="404040"/>
+                </a:solidFill>
+                <a:latin typeface="Arial" pitchFamily="34" charset="0"/>
+                <a:ea typeface="Arial" pitchFamily="34" charset="-122"/>
+                <a:cs typeface="Arial" pitchFamily="34" charset="-120"/>
+              </a:rPr>
+              <a:t>Without structure, intelligence degrades. The fix is design, not a bigger model: apply five principles we already trust and the monolith becomes a multi-agent system.</a:t>
+            </a:r>
+            <a:endParaRPr lang="en-US" sz="1400" dirty="0"/>
+          </a:p>
+        </p:txBody>
+      </p:sp>
+      <p:sp>
+        <p:nvSpPr>
+          <p:cNvPr id="5" name="!!restricted"/>
+          <p:cNvSpPr txBox="1"/>
+          <p:nvPr/>
+        </p:nvSpPr>
+        <p:spPr>
+          <a:xfrm>
+            <a:off x="5184648" y="6556248"/>
+            <a:ext cx="1828800" cy="201168"/>
+          </a:xfrm>
+          <a:prstGeom prst="rect">
+            <a:avLst/>
+          </a:prstGeom>
+          <a:noFill/>
+          <a:ln/>
+        </p:spPr>
+        <p:txBody>
+          <a:bodyPr wrap="square" lIns="0" tIns="0" rIns="0" bIns="0" rtlCol="0" anchor="ctr"/>
+          <a:lstStyle/>
+          <a:p>
+            <a:pPr algn="ctr" indent="0" marL="0">
+              <a:buNone/>
+            </a:pPr>
+            <a:r>
+              <a:rPr lang="en-US" sz="800" dirty="0">
+                <a:solidFill>
+                  <a:srgbClr val="7F7F7F"/>
+                </a:solidFill>
+                <a:latin typeface="Arial" pitchFamily="34" charset="0"/>
+                <a:ea typeface="Arial" pitchFamily="34" charset="-122"/>
+                <a:cs typeface="Arial" pitchFamily="34" charset="-120"/>
+              </a:rPr>
+              <a:t>RESTRICTED</a:t>
+            </a:r>
+            <a:endParaRPr lang="en-US" sz="800" dirty="0"/>
+          </a:p>
+        </p:txBody>
+      </p:sp>
+      <p:sp>
+        <p:nvSpPr>
+          <p:cNvPr id="6" name="!!task"/>
+          <p:cNvSpPr/>
+          <p:nvPr/>
+        </p:nvSpPr>
+        <p:spPr>
+          <a:xfrm>
+            <a:off x="3821095" y="1544239"/>
             <a:ext cx="517916" cy="517916"/>
           </a:xfrm>
           <a:prstGeom prst="ellipse">
@@ -8941,7 +11323,7 @@
       </p:sp>
       <p:pic>
         <p:nvPicPr>
-          <p:cNvPr id="4" name="!!taski" descr="/home/claude/multi-agent-deck/assets/icons/TbTicket_2C2C2A.png">    </p:cNvPr>
+          <p:cNvPr id="7" name="!!taski" descr="/tmp/deck-icons/TbTicket_2C2C2A.png">    </p:cNvPr>
           <p:cNvPicPr>
             <a:picLocks noChangeAspect="1"/>
           </p:cNvPicPr>
@@ -8955,7 +11337,7 @@
         </p:blipFill>
         <p:spPr>
           <a:xfrm>
-            <a:off x="3939784" y="1388608"/>
+            <a:off x="3939784" y="1662928"/>
             <a:ext cx="280538" cy="280538"/>
           </a:xfrm>
           <a:prstGeom prst="rect">
@@ -8965,13 +11347,13 @@
       </p:pic>
       <p:sp>
         <p:nvSpPr>
-          <p:cNvPr id="5" name="!!taskl"/>
+          <p:cNvPr id="8" name="!!taskl"/>
           <p:cNvSpPr txBox="1"/>
           <p:nvPr/>
         </p:nvSpPr>
         <p:spPr>
           <a:xfrm>
-            <a:off x="4425330" y="1442557"/>
+            <a:off x="4425330" y="1716877"/>
             <a:ext cx="731520" cy="201168"/>
           </a:xfrm>
           <a:prstGeom prst="rect">
@@ -9004,13 +11386,13 @@
       </p:sp>
       <p:sp>
         <p:nvSpPr>
-          <p:cNvPr id="6" name="!!big"/>
+          <p:cNvPr id="9" name="!!big"/>
           <p:cNvSpPr/>
           <p:nvPr/>
         </p:nvSpPr>
         <p:spPr>
           <a:xfrm>
-            <a:off x="3324758" y="2284171"/>
+            <a:off x="3324758" y="2558491"/>
             <a:ext cx="1510589" cy="1510589"/>
           </a:xfrm>
           <a:prstGeom prst="ellipse">
@@ -9041,13 +11423,13 @@
       </p:sp>
       <p:sp>
         <p:nvSpPr>
-          <p:cNvPr id="7" name="!!bigl"/>
+          <p:cNvPr id="10" name="!!bigl"/>
           <p:cNvSpPr txBox="1"/>
           <p:nvPr/>
         </p:nvSpPr>
         <p:spPr>
           <a:xfrm>
-            <a:off x="4921667" y="2284171"/>
+            <a:off x="4921667" y="2558491"/>
             <a:ext cx="1828800" cy="228600"/>
           </a:xfrm>
           <a:prstGeom prst="rect">
@@ -9080,13 +11462,13 @@
       </p:sp>
       <p:sp>
         <p:nvSpPr>
-          <p:cNvPr id="8" name="!!lt0"/>
+          <p:cNvPr id="11" name="!!lt0"/>
           <p:cNvSpPr/>
           <p:nvPr/>
         </p:nvSpPr>
         <p:spPr>
           <a:xfrm>
-            <a:off x="4080053" y="1809415"/>
+            <a:off x="4080053" y="2083735"/>
             <a:ext cx="914" cy="431597"/>
           </a:xfrm>
           <a:prstGeom prst="line">
@@ -9104,13 +11486,13 @@
       </p:sp>
       <p:sp>
         <p:nvSpPr>
-          <p:cNvPr id="9" name="!!fr"/>
+          <p:cNvPr id="12" name="!!fr"/>
           <p:cNvSpPr/>
           <p:nvPr/>
         </p:nvSpPr>
         <p:spPr>
           <a:xfrm>
-            <a:off x="5067330" y="3535802"/>
+            <a:off x="5067330" y="3810122"/>
             <a:ext cx="2125614" cy="215798"/>
           </a:xfrm>
           <a:prstGeom prst="roundRect">
@@ -9152,13 +11534,13 @@
       </p:sp>
       <p:sp>
         <p:nvSpPr>
-          <p:cNvPr id="10" name="!!j0"/>
+          <p:cNvPr id="13" name="!!j0"/>
           <p:cNvSpPr/>
           <p:nvPr/>
         </p:nvSpPr>
         <p:spPr>
           <a:xfrm>
-            <a:off x="3515524" y="2636786"/>
+            <a:off x="3515524" y="2911106"/>
             <a:ext cx="481662" cy="481662"/>
           </a:xfrm>
           <a:prstGeom prst="ellipse">
@@ -9187,7 +11569,7 @@
       </p:sp>
       <p:pic>
         <p:nvPicPr>
-          <p:cNvPr id="11" name="!!ji0" descr="/home/claude/multi-agent-deck/assets/icons/TbBrain_534AB7.png">    </p:cNvPr>
+          <p:cNvPr id="14" name="!!ji0" descr="/tmp/deck-icons/TbBrain_534AB7.png">    </p:cNvPr>
           <p:cNvPicPr>
             <a:picLocks noChangeAspect="1"/>
           </p:cNvPicPr>
@@ -9201,7 +11583,7 @@
         </p:blipFill>
         <p:spPr>
           <a:xfrm>
-            <a:off x="3611857" y="2733118"/>
+            <a:off x="3611857" y="3007438"/>
             <a:ext cx="288997" cy="288997"/>
           </a:xfrm>
           <a:prstGeom prst="rect">
@@ -9211,13 +11593,13 @@
       </p:pic>
       <p:sp>
         <p:nvSpPr>
-          <p:cNvPr id="12" name="!!j1"/>
+          <p:cNvPr id="15" name="!!j1"/>
           <p:cNvSpPr/>
           <p:nvPr/>
         </p:nvSpPr>
         <p:spPr>
           <a:xfrm>
-            <a:off x="4162919" y="2636786"/>
+            <a:off x="4162919" y="2911106"/>
             <a:ext cx="481662" cy="481662"/>
           </a:xfrm>
           <a:prstGeom prst="ellipse">
@@ -9246,7 +11628,7 @@
       </p:sp>
       <p:pic>
         <p:nvPicPr>
-          <p:cNvPr id="13" name="!!ji1" descr="/home/claude/multi-agent-deck/assets/icons/TbTool_0F6E56.png">    </p:cNvPr>
+          <p:cNvPr id="16" name="!!ji1" descr="/tmp/deck-icons/TbTool_0F6E56.png">    </p:cNvPr>
           <p:cNvPicPr>
             <a:picLocks noChangeAspect="1"/>
           </p:cNvPicPr>
@@ -9260,7 +11642,7 @@
         </p:blipFill>
         <p:spPr>
           <a:xfrm>
-            <a:off x="4259252" y="2733118"/>
+            <a:off x="4259252" y="3007438"/>
             <a:ext cx="288997" cy="288997"/>
           </a:xfrm>
           <a:prstGeom prst="rect">
@@ -9270,13 +11652,13 @@
       </p:pic>
       <p:sp>
         <p:nvSpPr>
-          <p:cNvPr id="14" name="!!j2"/>
+          <p:cNvPr id="17" name="!!j2"/>
           <p:cNvSpPr/>
           <p:nvPr/>
         </p:nvSpPr>
         <p:spPr>
           <a:xfrm>
-            <a:off x="3839222" y="3100752"/>
+            <a:off x="3839222" y="3375072"/>
             <a:ext cx="481662" cy="481662"/>
           </a:xfrm>
           <a:prstGeom prst="ellipse">
@@ -9305,7 +11687,7 @@
       </p:sp>
       <p:pic>
         <p:nvPicPr>
-          <p:cNvPr id="15" name="!!ji2" descr="/home/claude/multi-agent-deck/assets/icons/TbChecklist_993C1D.png">    </p:cNvPr>
+          <p:cNvPr id="18" name="!!ji2" descr="/tmp/deck-icons/TbChecklist_993C1D.png">    </p:cNvPr>
           <p:cNvPicPr>
             <a:picLocks noChangeAspect="1"/>
           </p:cNvPicPr>
@@ -9319,7 +11701,7 @@
         </p:blipFill>
         <p:spPr>
           <a:xfrm>
-            <a:off x="3935554" y="3197085"/>
+            <a:off x="3935554" y="3471405"/>
             <a:ext cx="288997" cy="288997"/>
           </a:xfrm>
           <a:prstGeom prst="rect">
@@ -9329,13 +11711,13 @@
       </p:pic>
       <p:sp>
         <p:nvSpPr>
-          <p:cNvPr id="16" name="!!shm"/>
+          <p:cNvPr id="19" name="!!shm"/>
           <p:cNvSpPr/>
           <p:nvPr/>
         </p:nvSpPr>
         <p:spPr>
           <a:xfrm>
-            <a:off x="2461565" y="4226357"/>
+            <a:off x="2461565" y="4500677"/>
             <a:ext cx="3236976" cy="496336"/>
           </a:xfrm>
           <a:prstGeom prst="roundRect">
@@ -9377,13 +11759,13 @@
       </p:sp>
       <p:sp>
         <p:nvSpPr>
-          <p:cNvPr id="17" name="!!sm0"/>
+          <p:cNvPr id="20" name="!!sm0"/>
           <p:cNvSpPr/>
           <p:nvPr/>
         </p:nvSpPr>
         <p:spPr>
           <a:xfrm>
-            <a:off x="4080053" y="3816340"/>
+            <a:off x="4080053" y="4090660"/>
             <a:ext cx="914" cy="388437"/>
           </a:xfrm>
           <a:prstGeom prst="line">
@@ -9401,13 +11783,13 @@
       </p:sp>
       <p:sp>
         <p:nvSpPr>
-          <p:cNvPr id="18" name="!!pstep"/>
+          <p:cNvPr id="21" name="!!pstep"/>
           <p:cNvSpPr txBox="1"/>
           <p:nvPr/>
         </p:nvSpPr>
         <p:spPr>
           <a:xfrm>
-            <a:off x="8092440" y="1143000"/>
+            <a:off x="8092440" y="1371600"/>
             <a:ext cx="3611880" cy="274320"/>
           </a:xfrm>
           <a:prstGeom prst="rect">
@@ -9440,13 +11822,13 @@
       </p:sp>
       <p:sp>
         <p:nvSpPr>
-          <p:cNvPr id="19" name="!!pname"/>
+          <p:cNvPr id="22" name="!!pname"/>
           <p:cNvSpPr txBox="1"/>
           <p:nvPr/>
         </p:nvSpPr>
         <p:spPr>
           <a:xfrm>
-            <a:off x="8092440" y="1417320"/>
+            <a:off x="8092440" y="1645920"/>
             <a:ext cx="3611880" cy="411480"/>
           </a:xfrm>
           <a:prstGeom prst="rect">
@@ -9479,13 +11861,13 @@
       </p:sp>
       <p:sp>
         <p:nvSpPr>
-          <p:cNvPr id="20" name="!!pcap"/>
+          <p:cNvPr id="23" name="!!pcap"/>
           <p:cNvSpPr txBox="1"/>
           <p:nvPr/>
         </p:nvSpPr>
         <p:spPr>
           <a:xfrm>
-            <a:off x="8092440" y="1920240"/>
+            <a:off x="8092440" y="2148840"/>
             <a:ext cx="3611880" cy="1051560"/>
           </a:xfrm>
           <a:prstGeom prst="rect">
@@ -9518,7 +11900,7 @@
       </p:sp>
       <p:pic>
         <p:nvPicPr>
-          <p:cNvPr id="21" name="!!cki0" descr="/home/claude/multi-agent-deck/assets/icons/TbCircle_B4B2A9.png">    </p:cNvPr>
+          <p:cNvPr id="24" name="!!cki0" descr="/tmp/deck-icons/TbCircle_B4B2A9.png">    </p:cNvPr>
           <p:cNvPicPr>
             <a:picLocks noChangeAspect="1"/>
           </p:cNvPicPr>
@@ -9532,7 +11914,7 @@
         </p:blipFill>
         <p:spPr>
           <a:xfrm>
-            <a:off x="8092440" y="3191256"/>
+            <a:off x="8092440" y="3419856"/>
             <a:ext cx="256032" cy="256032"/>
           </a:xfrm>
           <a:prstGeom prst="rect">
@@ -9542,13 +11924,13 @@
       </p:pic>
       <p:sp>
         <p:nvSpPr>
-          <p:cNvPr id="22" name="!!ckt0"/>
+          <p:cNvPr id="25" name="!!ckt0"/>
           <p:cNvSpPr txBox="1"/>
           <p:nvPr/>
         </p:nvSpPr>
         <p:spPr>
           <a:xfrm>
-            <a:off x="8458200" y="3154680"/>
+            <a:off x="8458200" y="3383280"/>
             <a:ext cx="3246120" cy="329184"/>
           </a:xfrm>
           <a:prstGeom prst="rect">
@@ -9581,7 +11963,7 @@
       </p:sp>
       <p:pic>
         <p:nvPicPr>
-          <p:cNvPr id="23" name="!!cki1" descr="/home/claude/multi-agent-deck/assets/icons/TbCircle_B4B2A9.png">    </p:cNvPr>
+          <p:cNvPr id="26" name="!!cki1" descr="/tmp/deck-icons/TbCircle_B4B2A9.png">    </p:cNvPr>
           <p:cNvPicPr>
             <a:picLocks noChangeAspect="1"/>
           </p:cNvPicPr>
@@ -9595,7 +11977,7 @@
         </p:blipFill>
         <p:spPr>
           <a:xfrm>
-            <a:off x="8092440" y="3648456"/>
+            <a:off x="8092440" y="3877056"/>
             <a:ext cx="256032" cy="256032"/>
           </a:xfrm>
           <a:prstGeom prst="rect">
@@ -9605,13 +11987,13 @@
       </p:pic>
       <p:sp>
         <p:nvSpPr>
-          <p:cNvPr id="24" name="!!ckt1"/>
+          <p:cNvPr id="27" name="!!ckt1"/>
           <p:cNvSpPr txBox="1"/>
           <p:nvPr/>
         </p:nvSpPr>
         <p:spPr>
           <a:xfrm>
-            <a:off x="8458200" y="3611880"/>
+            <a:off x="8458200" y="3840480"/>
             <a:ext cx="3246120" cy="329184"/>
           </a:xfrm>
           <a:prstGeom prst="rect">
@@ -9644,7 +12026,7 @@
       </p:sp>
       <p:pic>
         <p:nvPicPr>
-          <p:cNvPr id="25" name="!!cki2" descr="/home/claude/multi-agent-deck/assets/icons/TbCircle_B4B2A9.png">    </p:cNvPr>
+          <p:cNvPr id="28" name="!!cki2" descr="/tmp/deck-icons/TbCircle_B4B2A9.png">    </p:cNvPr>
           <p:cNvPicPr>
             <a:picLocks noChangeAspect="1"/>
           </p:cNvPicPr>
@@ -9658,7 +12040,7 @@
         </p:blipFill>
         <p:spPr>
           <a:xfrm>
-            <a:off x="8092440" y="4105656"/>
+            <a:off x="8092440" y="4334256"/>
             <a:ext cx="256032" cy="256032"/>
           </a:xfrm>
           <a:prstGeom prst="rect">
@@ -9668,13 +12050,13 @@
       </p:pic>
       <p:sp>
         <p:nvSpPr>
-          <p:cNvPr id="26" name="!!ckt2"/>
+          <p:cNvPr id="29" name="!!ckt2"/>
           <p:cNvSpPr txBox="1"/>
           <p:nvPr/>
         </p:nvSpPr>
         <p:spPr>
           <a:xfrm>
-            <a:off x="8458200" y="4069080"/>
+            <a:off x="8458200" y="4297680"/>
             <a:ext cx="3246120" cy="329184"/>
           </a:xfrm>
           <a:prstGeom prst="rect">
@@ -9707,7 +12089,7 @@
       </p:sp>
       <p:pic>
         <p:nvPicPr>
-          <p:cNvPr id="27" name="!!cki3" descr="/home/claude/multi-agent-deck/assets/icons/TbCircle_B4B2A9.png">    </p:cNvPr>
+          <p:cNvPr id="30" name="!!cki3" descr="/tmp/deck-icons/TbCircle_B4B2A9.png">    </p:cNvPr>
           <p:cNvPicPr>
             <a:picLocks noChangeAspect="1"/>
           </p:cNvPicPr>
@@ -9721,7 +12103,7 @@
         </p:blipFill>
         <p:spPr>
           <a:xfrm>
-            <a:off x="8092440" y="4562856"/>
+            <a:off x="8092440" y="4791456"/>
             <a:ext cx="256032" cy="256032"/>
           </a:xfrm>
           <a:prstGeom prst="rect">
@@ -9731,13 +12113,13 @@
       </p:pic>
       <p:sp>
         <p:nvSpPr>
-          <p:cNvPr id="28" name="!!ckt3"/>
+          <p:cNvPr id="31" name="!!ckt3"/>
           <p:cNvSpPr txBox="1"/>
           <p:nvPr/>
         </p:nvSpPr>
         <p:spPr>
           <a:xfrm>
-            <a:off x="8458200" y="4526280"/>
+            <a:off x="8458200" y="4754880"/>
             <a:ext cx="3246120" cy="329184"/>
           </a:xfrm>
           <a:prstGeom prst="rect">
@@ -9770,7 +12152,7 @@
       </p:sp>
       <p:pic>
         <p:nvPicPr>
-          <p:cNvPr id="29" name="!!cki4" descr="/home/claude/multi-agent-deck/assets/icons/TbCircle_B4B2A9.png">    </p:cNvPr>
+          <p:cNvPr id="32" name="!!cki4" descr="/tmp/deck-icons/TbCircle_B4B2A9.png">    </p:cNvPr>
           <p:cNvPicPr>
             <a:picLocks noChangeAspect="1"/>
           </p:cNvPicPr>
@@ -9784,7 +12166,7 @@
         </p:blipFill>
         <p:spPr>
           <a:xfrm>
-            <a:off x="8092440" y="5020056"/>
+            <a:off x="8092440" y="5248656"/>
             <a:ext cx="256032" cy="256032"/>
           </a:xfrm>
           <a:prstGeom prst="rect">
@@ -9794,13 +12176,13 @@
       </p:pic>
       <p:sp>
         <p:nvSpPr>
-          <p:cNvPr id="30" name="!!ckt4"/>
+          <p:cNvPr id="33" name="!!ckt4"/>
           <p:cNvSpPr txBox="1"/>
           <p:nvPr/>
         </p:nvSpPr>
         <p:spPr>
           <a:xfrm>
-            <a:off x="8458200" y="4983480"/>
+            <a:off x="8458200" y="5212080"/>
             <a:ext cx="3246120" cy="329184"/>
           </a:xfrm>
           <a:prstGeom prst="rect">
@@ -9828,6 +12210,54 @@
               <a:t>Explicit hand-offs</a:t>
             </a:r>
             <a:endParaRPr lang="en-US" sz="1400" dirty="0"/>
+          </a:p>
+        </p:txBody>
+      </p:sp>
+      <p:sp>
+        <p:nvSpPr>
+          <p:cNvPr id="25" name="Slide Number Placeholder 0"/>
+          <p:cNvSpPr>
+            <a:spLocks noGrp="1"/>
+          </p:cNvSpPr>
+          <p:nvPr>
+            <p:ph type="sldNum" sz="quarter" idx="4294967295"/>
+          </p:nvPr>
+        </p:nvSpPr>
+        <p:spPr>
+          <a:xfrm>
+            <a:off x="5641848" y="6382512"/>
+            <a:ext cx="914400" cy="201168"/>
+          </a:xfrm>
+          <a:prstGeom prst="rect">
+            <a:avLst/>
+          </a:prstGeom>
+          <a:extLst>
+            <a:ext uri="{C572A759-6A51-4108-AA02-DFA0A04FC94B}">
+              <ma14:wrappingTextBoxFlag xmlns:ma14="http://schemas.microsoft.com/office/mac/drawingml/2011/main" val="0"/>
+            </a:ext>
+          </a:extLst>
+        </p:spPr>
+        <p:txBody>
+          <a:bodyPr/>
+          <a:lstStyle>
+            <a:lvl1pPr>
+              <a:defRPr sz="1000">
+                <a:solidFill>
+                  <a:srgbClr val="595959"/>
+                </a:solidFill>
+                <a:latin typeface="Arial"/>
+                <a:ea typeface="Arial"/>
+                <a:cs typeface="Arial"/>
+              </a:defRPr>
+            </a:lvl1pPr>
+          </a:lstStyle>
+          <a:p>
+            <a:pPr algn="ctr"/>
+            <a:fld id="{F7021451-1387-4CA6-816F-3879F97B5CBC}" type="slidenum">
+              <a:rPr b="0" lang="en-US"/>
+              <a:t>34</a:t>
+            </a:fld>
+            <a:endParaRPr lang="en-US"/>
           </a:p>
         </p:txBody>
       </p:sp>
@@ -9883,8 +12313,8 @@
         </p:nvSpPr>
         <p:spPr>
           <a:xfrm>
-            <a:off x="502920" y="292608"/>
-            <a:ext cx="11155680" cy="640080"/>
+            <a:off x="411480" y="201168"/>
+            <a:ext cx="11338560" cy="530352"/>
           </a:xfrm>
           <a:prstGeom prst="rect">
             <a:avLst/>
@@ -9893,16 +12323,16 @@
           <a:ln/>
         </p:spPr>
         <p:txBody>
-          <a:bodyPr wrap="square" lIns="0" tIns="0" rIns="0" bIns="0" rtlCol="0" anchor="t"/>
+          <a:bodyPr wrap="square" lIns="0" tIns="0" rIns="0" bIns="0" rtlCol="0" anchor="b"/>
           <a:lstStyle/>
           <a:p>
             <a:pPr algn="l" indent="0" marL="0">
               <a:buNone/>
             </a:pPr>
             <a:r>
-              <a:rPr lang="en-US" sz="3000" b="1" dirty="0">
-                <a:solidFill>
-                  <a:srgbClr val="2C2C2A"/>
+              <a:rPr lang="en-US" sz="2600" b="1" dirty="0">
+                <a:solidFill>
+                  <a:srgbClr val="1A1A1A"/>
                 </a:solidFill>
                 <a:latin typeface="Calibri" pitchFamily="34" charset="0"/>
                 <a:ea typeface="Calibri" pitchFamily="34" charset="-122"/>
@@ -9910,19 +12340,120 @@
               </a:rPr>
               <a:t>Root Cause: A System Design Problem</a:t>
             </a:r>
-            <a:endParaRPr lang="en-US" sz="3000" dirty="0"/>
-          </a:p>
-        </p:txBody>
-      </p:sp>
-      <p:sp>
-        <p:nvSpPr>
-          <p:cNvPr id="3" name="!!task"/>
+            <a:endParaRPr lang="en-US" sz="2600" dirty="0"/>
+          </a:p>
+        </p:txBody>
+      </p:sp>
+      <p:sp>
+        <p:nvSpPr>
+          <p:cNvPr id="3" name="!!rule"/>
           <p:cNvSpPr/>
           <p:nvPr/>
         </p:nvSpPr>
         <p:spPr>
           <a:xfrm>
-            <a:off x="3821095" y="1269919"/>
+            <a:off x="411480" y="804672"/>
+            <a:ext cx="11365992" cy="914"/>
+          </a:xfrm>
+          <a:prstGeom prst="line">
+            <a:avLst/>
+          </a:prstGeom>
+          <a:noFill/>
+          <a:ln w="9525">
+            <a:solidFill>
+              <a:srgbClr val="7F7F7F"/>
+            </a:solidFill>
+            <a:prstDash val="solid"/>
+          </a:ln>
+        </p:spPr>
+      </p:sp>
+      <p:sp>
+        <p:nvSpPr>
+          <p:cNvPr id="4" name="!!lead"/>
+          <p:cNvSpPr txBox="1"/>
+          <p:nvPr/>
+        </p:nvSpPr>
+        <p:spPr>
+          <a:xfrm>
+            <a:off x="411480" y="886968"/>
+            <a:ext cx="11338560" cy="438912"/>
+          </a:xfrm>
+          <a:prstGeom prst="rect">
+            <a:avLst/>
+          </a:prstGeom>
+          <a:noFill/>
+          <a:ln/>
+        </p:spPr>
+        <p:txBody>
+          <a:bodyPr wrap="square" lIns="0" tIns="0" rIns="0" bIns="0" rtlCol="0" anchor="t"/>
+          <a:lstStyle/>
+          <a:p>
+            <a:pPr indent="0" marL="0">
+              <a:buNone/>
+            </a:pPr>
+            <a:r>
+              <a:rPr lang="en-US" sz="1400" dirty="0">
+                <a:solidFill>
+                  <a:srgbClr val="404040"/>
+                </a:solidFill>
+                <a:latin typeface="Arial" pitchFamily="34" charset="0"/>
+                <a:ea typeface="Arial" pitchFamily="34" charset="-122"/>
+                <a:cs typeface="Arial" pitchFamily="34" charset="-120"/>
+              </a:rPr>
+              <a:t>Without structure, intelligence degrades. The fix is design, not a bigger model: apply five principles we already trust and the monolith becomes a multi-agent system.</a:t>
+            </a:r>
+            <a:endParaRPr lang="en-US" sz="1400" dirty="0"/>
+          </a:p>
+        </p:txBody>
+      </p:sp>
+      <p:sp>
+        <p:nvSpPr>
+          <p:cNvPr id="5" name="!!restricted"/>
+          <p:cNvSpPr txBox="1"/>
+          <p:nvPr/>
+        </p:nvSpPr>
+        <p:spPr>
+          <a:xfrm>
+            <a:off x="5184648" y="6556248"/>
+            <a:ext cx="1828800" cy="201168"/>
+          </a:xfrm>
+          <a:prstGeom prst="rect">
+            <a:avLst/>
+          </a:prstGeom>
+          <a:noFill/>
+          <a:ln/>
+        </p:spPr>
+        <p:txBody>
+          <a:bodyPr wrap="square" lIns="0" tIns="0" rIns="0" bIns="0" rtlCol="0" anchor="ctr"/>
+          <a:lstStyle/>
+          <a:p>
+            <a:pPr algn="ctr" indent="0" marL="0">
+              <a:buNone/>
+            </a:pPr>
+            <a:r>
+              <a:rPr lang="en-US" sz="800" dirty="0">
+                <a:solidFill>
+                  <a:srgbClr val="7F7F7F"/>
+                </a:solidFill>
+                <a:latin typeface="Arial" pitchFamily="34" charset="0"/>
+                <a:ea typeface="Arial" pitchFamily="34" charset="-122"/>
+                <a:cs typeface="Arial" pitchFamily="34" charset="-120"/>
+              </a:rPr>
+              <a:t>RESTRICTED</a:t>
+            </a:r>
+            <a:endParaRPr lang="en-US" sz="800" dirty="0"/>
+          </a:p>
+        </p:txBody>
+      </p:sp>
+      <p:sp>
+        <p:nvSpPr>
+          <p:cNvPr id="6" name="!!task"/>
+          <p:cNvSpPr/>
+          <p:nvPr/>
+        </p:nvSpPr>
+        <p:spPr>
+          <a:xfrm>
+            <a:off x="3821095" y="1544239"/>
             <a:ext cx="517916" cy="517916"/>
           </a:xfrm>
           <a:prstGeom prst="ellipse">
@@ -9951,7 +12482,7 @@
       </p:sp>
       <p:pic>
         <p:nvPicPr>
-          <p:cNvPr id="4" name="!!taski" descr="/home/claude/multi-agent-deck/assets/icons/TbTicket_2C2C2A.png">    </p:cNvPr>
+          <p:cNvPr id="7" name="!!taski" descr="/tmp/deck-icons/TbTicket_2C2C2A.png">    </p:cNvPr>
           <p:cNvPicPr>
             <a:picLocks noChangeAspect="1"/>
           </p:cNvPicPr>
@@ -9965,7 +12496,7 @@
         </p:blipFill>
         <p:spPr>
           <a:xfrm>
-            <a:off x="3939784" y="1388608"/>
+            <a:off x="3939784" y="1662928"/>
             <a:ext cx="280538" cy="280538"/>
           </a:xfrm>
           <a:prstGeom prst="rect">
@@ -9975,13 +12506,13 @@
       </p:pic>
       <p:sp>
         <p:nvSpPr>
-          <p:cNvPr id="5" name="!!taskl"/>
+          <p:cNvPr id="8" name="!!taskl"/>
           <p:cNvSpPr txBox="1"/>
           <p:nvPr/>
         </p:nvSpPr>
         <p:spPr>
           <a:xfrm>
-            <a:off x="4425330" y="1442557"/>
+            <a:off x="4425330" y="1716877"/>
             <a:ext cx="731520" cy="201168"/>
           </a:xfrm>
           <a:prstGeom prst="rect">
@@ -10014,13 +12545,13 @@
       </p:sp>
       <p:sp>
         <p:nvSpPr>
-          <p:cNvPr id="6" name="!!lt1a"/>
+          <p:cNvPr id="9" name="!!lt1a"/>
           <p:cNvSpPr/>
           <p:nvPr/>
         </p:nvSpPr>
         <p:spPr>
           <a:xfrm flipH="1">
-            <a:off x="1727850" y="1528877"/>
+            <a:off x="1727850" y="1803197"/>
             <a:ext cx="2093244" cy="914"/>
           </a:xfrm>
           <a:prstGeom prst="line">
@@ -10037,13 +12568,13 @@
       </p:sp>
       <p:sp>
         <p:nvSpPr>
-          <p:cNvPr id="7" name="!!lt1b"/>
+          <p:cNvPr id="10" name="!!lt1b"/>
           <p:cNvSpPr/>
           <p:nvPr/>
         </p:nvSpPr>
         <p:spPr>
           <a:xfrm>
-            <a:off x="1727850" y="1528877"/>
+            <a:off x="1727850" y="1803197"/>
             <a:ext cx="914" cy="1143732"/>
           </a:xfrm>
           <a:prstGeom prst="line">
@@ -10061,13 +12592,13 @@
       </p:sp>
       <p:sp>
         <p:nvSpPr>
-          <p:cNvPr id="8" name="!!lpw"/>
+          <p:cNvPr id="11" name="!!lpw"/>
           <p:cNvSpPr/>
           <p:nvPr/>
         </p:nvSpPr>
         <p:spPr>
           <a:xfrm>
-            <a:off x="2332086" y="3039466"/>
+            <a:off x="2332086" y="3313786"/>
             <a:ext cx="1316370" cy="914"/>
           </a:xfrm>
           <a:prstGeom prst="line">
@@ -10085,13 +12616,13 @@
       </p:sp>
       <p:sp>
         <p:nvSpPr>
-          <p:cNvPr id="9" name="!!lwc"/>
+          <p:cNvPr id="12" name="!!lwc"/>
           <p:cNvSpPr/>
           <p:nvPr/>
         </p:nvSpPr>
         <p:spPr>
           <a:xfrm>
-            <a:off x="4490070" y="3039466"/>
+            <a:off x="4490070" y="3313786"/>
             <a:ext cx="1316370" cy="914"/>
           </a:xfrm>
           <a:prstGeom prst="line">
@@ -10109,13 +12640,13 @@
       </p:sp>
       <p:sp>
         <p:nvSpPr>
-          <p:cNvPr id="10" name="!!fb1"/>
+          <p:cNvPr id="13" name="!!fb1"/>
           <p:cNvSpPr/>
           <p:nvPr/>
         </p:nvSpPr>
         <p:spPr>
           <a:xfrm flipV="1">
-            <a:off x="6238037" y="2370491"/>
+            <a:off x="6238037" y="2644811"/>
             <a:ext cx="914" cy="280538"/>
           </a:xfrm>
           <a:prstGeom prst="line">
@@ -10132,13 +12663,13 @@
       </p:sp>
       <p:sp>
         <p:nvSpPr>
-          <p:cNvPr id="11" name="!!fb2"/>
+          <p:cNvPr id="14" name="!!fb2"/>
           <p:cNvSpPr/>
           <p:nvPr/>
         </p:nvSpPr>
         <p:spPr>
           <a:xfrm flipH="1">
-            <a:off x="2137867" y="2370491"/>
+            <a:off x="2137867" y="2644811"/>
             <a:ext cx="4100170" cy="914"/>
           </a:xfrm>
           <a:prstGeom prst="line">
@@ -10155,13 +12686,13 @@
       </p:sp>
       <p:sp>
         <p:nvSpPr>
-          <p:cNvPr id="12" name="!!fb3"/>
+          <p:cNvPr id="15" name="!!fb3"/>
           <p:cNvSpPr/>
           <p:nvPr/>
         </p:nvSpPr>
         <p:spPr>
           <a:xfrm>
-            <a:off x="2137867" y="2370491"/>
+            <a:off x="2137867" y="2644811"/>
             <a:ext cx="914" cy="302118"/>
           </a:xfrm>
           <a:prstGeom prst="line">
@@ -10179,13 +12710,13 @@
       </p:sp>
       <p:sp>
         <p:nvSpPr>
-          <p:cNvPr id="13" name="!!j0"/>
+          <p:cNvPr id="16" name="!!j0"/>
           <p:cNvSpPr/>
           <p:nvPr/>
         </p:nvSpPr>
         <p:spPr>
           <a:xfrm>
-            <a:off x="1533632" y="2651028"/>
+            <a:off x="1533632" y="2925348"/>
             <a:ext cx="776874" cy="776874"/>
           </a:xfrm>
           <a:prstGeom prst="ellipse">
@@ -10214,7 +12745,7 @@
       </p:sp>
       <p:pic>
         <p:nvPicPr>
-          <p:cNvPr id="14" name="!!ji0" descr="/home/claude/multi-agent-deck/assets/icons/TbBrain_534AB7.png">    </p:cNvPr>
+          <p:cNvPr id="17" name="!!ji0" descr="/tmp/deck-icons/TbBrain_534AB7.png">    </p:cNvPr>
           <p:cNvPicPr>
             <a:picLocks noChangeAspect="1"/>
           </p:cNvPicPr>
@@ -10228,7 +12759,7 @@
         </p:blipFill>
         <p:spPr>
           <a:xfrm>
-            <a:off x="1689007" y="2806403"/>
+            <a:off x="1689007" y="3080723"/>
             <a:ext cx="466125" cy="466125"/>
           </a:xfrm>
           <a:prstGeom prst="rect">
@@ -10238,13 +12769,13 @@
       </p:pic>
       <p:sp>
         <p:nvSpPr>
-          <p:cNvPr id="15" name="!!jl0"/>
+          <p:cNvPr id="18" name="!!jl0"/>
           <p:cNvSpPr txBox="1"/>
           <p:nvPr/>
         </p:nvSpPr>
         <p:spPr>
           <a:xfrm>
-            <a:off x="1281989" y="3492642"/>
+            <a:off x="1281989" y="3766962"/>
             <a:ext cx="1280160" cy="237744"/>
           </a:xfrm>
           <a:prstGeom prst="rect">
@@ -10277,13 +12808,13 @@
       </p:sp>
       <p:sp>
         <p:nvSpPr>
-          <p:cNvPr id="16" name="!!j1"/>
+          <p:cNvPr id="19" name="!!j1"/>
           <p:cNvSpPr/>
           <p:nvPr/>
         </p:nvSpPr>
         <p:spPr>
           <a:xfrm>
-            <a:off x="3691616" y="2651028"/>
+            <a:off x="3691616" y="2925348"/>
             <a:ext cx="776874" cy="776874"/>
           </a:xfrm>
           <a:prstGeom prst="ellipse">
@@ -10312,7 +12843,7 @@
       </p:sp>
       <p:pic>
         <p:nvPicPr>
-          <p:cNvPr id="17" name="!!ji1" descr="/home/claude/multi-agent-deck/assets/icons/TbTool_0F6E56.png">    </p:cNvPr>
+          <p:cNvPr id="20" name="!!ji1" descr="/tmp/deck-icons/TbTool_0F6E56.png">    </p:cNvPr>
           <p:cNvPicPr>
             <a:picLocks noChangeAspect="1"/>
           </p:cNvPicPr>
@@ -10326,7 +12857,7 @@
         </p:blipFill>
         <p:spPr>
           <a:xfrm>
-            <a:off x="3846991" y="2806403"/>
+            <a:off x="3846991" y="3080723"/>
             <a:ext cx="466125" cy="466125"/>
           </a:xfrm>
           <a:prstGeom prst="rect">
@@ -10336,13 +12867,13 @@
       </p:pic>
       <p:sp>
         <p:nvSpPr>
-          <p:cNvPr id="18" name="!!jl1"/>
+          <p:cNvPr id="21" name="!!jl1"/>
           <p:cNvSpPr txBox="1"/>
           <p:nvPr/>
         </p:nvSpPr>
         <p:spPr>
           <a:xfrm>
-            <a:off x="3439973" y="3492642"/>
+            <a:off x="3439973" y="3766962"/>
             <a:ext cx="1280160" cy="237744"/>
           </a:xfrm>
           <a:prstGeom prst="rect">
@@ -10375,13 +12906,13 @@
       </p:sp>
       <p:sp>
         <p:nvSpPr>
-          <p:cNvPr id="19" name="!!j2"/>
+          <p:cNvPr id="22" name="!!j2"/>
           <p:cNvSpPr/>
           <p:nvPr/>
         </p:nvSpPr>
         <p:spPr>
           <a:xfrm>
-            <a:off x="5849600" y="2651028"/>
+            <a:off x="5849600" y="2925348"/>
             <a:ext cx="776874" cy="776874"/>
           </a:xfrm>
           <a:prstGeom prst="ellipse">
@@ -10410,7 +12941,7 @@
       </p:sp>
       <p:pic>
         <p:nvPicPr>
-          <p:cNvPr id="20" name="!!ji2" descr="/home/claude/multi-agent-deck/assets/icons/TbChecklist_993C1D.png">    </p:cNvPr>
+          <p:cNvPr id="23" name="!!ji2" descr="/tmp/deck-icons/TbChecklist_993C1D.png">    </p:cNvPr>
           <p:cNvPicPr>
             <a:picLocks noChangeAspect="1"/>
           </p:cNvPicPr>
@@ -10424,7 +12955,7 @@
         </p:blipFill>
         <p:spPr>
           <a:xfrm>
-            <a:off x="6004975" y="2806403"/>
+            <a:off x="6004975" y="3080723"/>
             <a:ext cx="466125" cy="466125"/>
           </a:xfrm>
           <a:prstGeom prst="rect">
@@ -10434,13 +12965,13 @@
       </p:pic>
       <p:sp>
         <p:nvSpPr>
-          <p:cNvPr id="21" name="!!jl2"/>
+          <p:cNvPr id="24" name="!!jl2"/>
           <p:cNvSpPr txBox="1"/>
           <p:nvPr/>
         </p:nvSpPr>
         <p:spPr>
           <a:xfrm>
-            <a:off x="5597957" y="3492642"/>
+            <a:off x="5597957" y="3766962"/>
             <a:ext cx="1280160" cy="237744"/>
           </a:xfrm>
           <a:prstGeom prst="rect">
@@ -10473,13 +13004,13 @@
       </p:sp>
       <p:sp>
         <p:nvSpPr>
-          <p:cNvPr id="22" name="!!own0"/>
+          <p:cNvPr id="25" name="!!own0"/>
           <p:cNvSpPr/>
           <p:nvPr/>
         </p:nvSpPr>
         <p:spPr>
           <a:xfrm>
-            <a:off x="1220724" y="4247937"/>
+            <a:off x="1220724" y="4522257"/>
             <a:ext cx="1402690" cy="453177"/>
           </a:xfrm>
           <a:prstGeom prst="roundRect">
@@ -10521,13 +13052,13 @@
       </p:sp>
       <p:sp>
         <p:nvSpPr>
-          <p:cNvPr id="23" name="!!owl0"/>
+          <p:cNvPr id="26" name="!!owl0"/>
           <p:cNvSpPr/>
           <p:nvPr/>
         </p:nvSpPr>
         <p:spPr>
           <a:xfrm>
-            <a:off x="1922069" y="3686861"/>
+            <a:off x="1922069" y="3961181"/>
             <a:ext cx="914" cy="539496"/>
           </a:xfrm>
           <a:prstGeom prst="line">
@@ -10545,13 +13076,13 @@
       </p:sp>
       <p:sp>
         <p:nvSpPr>
-          <p:cNvPr id="24" name="!!own1"/>
+          <p:cNvPr id="27" name="!!own1"/>
           <p:cNvSpPr/>
           <p:nvPr/>
         </p:nvSpPr>
         <p:spPr>
           <a:xfrm>
-            <a:off x="3378708" y="4247937"/>
+            <a:off x="3378708" y="4522257"/>
             <a:ext cx="1402690" cy="453177"/>
           </a:xfrm>
           <a:prstGeom prst="roundRect">
@@ -10593,13 +13124,13 @@
       </p:sp>
       <p:sp>
         <p:nvSpPr>
-          <p:cNvPr id="25" name="!!owl1"/>
+          <p:cNvPr id="28" name="!!owl1"/>
           <p:cNvSpPr/>
           <p:nvPr/>
         </p:nvSpPr>
         <p:spPr>
           <a:xfrm>
-            <a:off x="4080053" y="3686861"/>
+            <a:off x="4080053" y="3961181"/>
             <a:ext cx="914" cy="539496"/>
           </a:xfrm>
           <a:prstGeom prst="line">
@@ -10617,13 +13148,13 @@
       </p:sp>
       <p:sp>
         <p:nvSpPr>
-          <p:cNvPr id="26" name="!!own2"/>
+          <p:cNvPr id="29" name="!!own2"/>
           <p:cNvSpPr/>
           <p:nvPr/>
         </p:nvSpPr>
         <p:spPr>
           <a:xfrm>
-            <a:off x="5536692" y="4247937"/>
+            <a:off x="5536692" y="4522257"/>
             <a:ext cx="1402690" cy="453177"/>
           </a:xfrm>
           <a:prstGeom prst="roundRect">
@@ -10665,13 +13196,13 @@
       </p:sp>
       <p:sp>
         <p:nvSpPr>
-          <p:cNvPr id="27" name="!!owl2"/>
+          <p:cNvPr id="30" name="!!owl2"/>
           <p:cNvSpPr/>
           <p:nvPr/>
         </p:nvSpPr>
         <p:spPr>
           <a:xfrm>
-            <a:off x="6238037" y="3686861"/>
+            <a:off x="6238037" y="3961181"/>
             <a:ext cx="914" cy="539496"/>
           </a:xfrm>
           <a:prstGeom prst="line">
@@ -10689,13 +13220,13 @@
       </p:sp>
       <p:sp>
         <p:nvSpPr>
-          <p:cNvPr id="28" name="!!retry"/>
+          <p:cNvPr id="31" name="!!retry"/>
           <p:cNvSpPr/>
           <p:nvPr/>
         </p:nvSpPr>
         <p:spPr>
           <a:xfrm>
-            <a:off x="4603364" y="3773180"/>
+            <a:off x="4603364" y="4047500"/>
             <a:ext cx="1219261" cy="215798"/>
           </a:xfrm>
           <a:prstGeom prst="roundRect">
@@ -10737,7 +13268,7 @@
       </p:sp>
       <p:pic>
         <p:nvPicPr>
-          <p:cNvPr id="29" name="!!flag0" descr="/home/claude/multi-agent-deck/assets/icons/TbFlag_5F5E5A.png">    </p:cNvPr>
+          <p:cNvPr id="32" name="!!flag0" descr="/tmp/deck-icons/TbFlag_5F5E5A.png">    </p:cNvPr>
           <p:cNvPicPr>
             <a:picLocks noChangeAspect="1"/>
           </p:cNvPicPr>
@@ -10751,7 +13282,7 @@
         </p:blipFill>
         <p:spPr>
           <a:xfrm>
-            <a:off x="2903952" y="3212104"/>
+            <a:off x="2903952" y="3486424"/>
             <a:ext cx="194219" cy="194219"/>
           </a:xfrm>
           <a:prstGeom prst="rect">
@@ -10761,7 +13292,7 @@
       </p:pic>
       <p:pic>
         <p:nvPicPr>
-          <p:cNvPr id="30" name="!!flag1" descr="/home/claude/multi-agent-deck/assets/icons/TbFlag_5F5E5A.png">    </p:cNvPr>
+          <p:cNvPr id="33" name="!!flag1" descr="/tmp/deck-icons/TbFlag_5F5E5A.png">    </p:cNvPr>
           <p:cNvPicPr>
             <a:picLocks noChangeAspect="1"/>
           </p:cNvPicPr>
@@ -10775,7 +13306,7 @@
         </p:blipFill>
         <p:spPr>
           <a:xfrm>
-            <a:off x="5061936" y="3212104"/>
+            <a:off x="5061936" y="3486424"/>
             <a:ext cx="194219" cy="194219"/>
           </a:xfrm>
           <a:prstGeom prst="rect">
@@ -10785,13 +13316,13 @@
       </p:pic>
       <p:sp>
         <p:nvSpPr>
-          <p:cNvPr id="31" name="!!lockc"/>
+          <p:cNvPr id="34" name="!!lockc"/>
           <p:cNvSpPr/>
           <p:nvPr/>
         </p:nvSpPr>
         <p:spPr>
           <a:xfrm>
-            <a:off x="6410676" y="2543129"/>
+            <a:off x="6410676" y="2817449"/>
             <a:ext cx="280538" cy="280538"/>
           </a:xfrm>
           <a:prstGeom prst="ellipse">
@@ -10820,7 +13351,7 @@
       </p:sp>
       <p:pic>
         <p:nvPicPr>
-          <p:cNvPr id="32" name="!!locki" descr="/home/claude/multi-agent-deck/assets/icons/TbLock_993C1D.png">    </p:cNvPr>
+          <p:cNvPr id="35" name="!!locki" descr="/tmp/deck-icons/TbLock_993C1D.png">    </p:cNvPr>
           <p:cNvPicPr>
             <a:picLocks noChangeAspect="1"/>
           </p:cNvPicPr>
@@ -10834,7 +13365,7 @@
         </p:blipFill>
         <p:spPr>
           <a:xfrm>
-            <a:off x="6464625" y="2597079"/>
+            <a:off x="6464625" y="2871399"/>
             <a:ext cx="172639" cy="172639"/>
           </a:xfrm>
           <a:prstGeom prst="rect">
@@ -10844,13 +13375,13 @@
       </p:pic>
       <p:sp>
         <p:nvSpPr>
-          <p:cNvPr id="33" name="!!pP"/>
+          <p:cNvPr id="36" name="!!pP"/>
           <p:cNvSpPr/>
           <p:nvPr/>
         </p:nvSpPr>
         <p:spPr>
           <a:xfrm>
-            <a:off x="2655783" y="2715768"/>
+            <a:off x="2655783" y="2990088"/>
             <a:ext cx="690555" cy="215798"/>
           </a:xfrm>
           <a:prstGeom prst="roundRect">
@@ -10892,13 +13423,13 @@
       </p:sp>
       <p:sp>
         <p:nvSpPr>
-          <p:cNvPr id="34" name="!!pW"/>
+          <p:cNvPr id="37" name="!!pW"/>
           <p:cNvSpPr/>
           <p:nvPr/>
         </p:nvSpPr>
         <p:spPr>
           <a:xfrm>
-            <a:off x="4738238" y="2715768"/>
+            <a:off x="4738238" y="2990088"/>
             <a:ext cx="841614" cy="215798"/>
           </a:xfrm>
           <a:prstGeom prst="roundRect">
@@ -10940,13 +13471,13 @@
       </p:sp>
       <p:sp>
         <p:nvSpPr>
-          <p:cNvPr id="35" name="!!pF"/>
+          <p:cNvPr id="38" name="!!pF"/>
           <p:cNvSpPr/>
           <p:nvPr/>
         </p:nvSpPr>
         <p:spPr>
           <a:xfrm>
-            <a:off x="3351733" y="2089953"/>
+            <a:off x="3351733" y="2364273"/>
             <a:ext cx="1672438" cy="215798"/>
           </a:xfrm>
           <a:prstGeom prst="roundRect">
@@ -10988,13 +13519,13 @@
       </p:sp>
       <p:sp>
         <p:nvSpPr>
-          <p:cNvPr id="36" name="!!pstep"/>
+          <p:cNvPr id="39" name="!!pstep"/>
           <p:cNvSpPr txBox="1"/>
           <p:nvPr/>
         </p:nvSpPr>
         <p:spPr>
           <a:xfrm>
-            <a:off x="8092440" y="1143000"/>
+            <a:off x="8092440" y="1371600"/>
             <a:ext cx="3611880" cy="274320"/>
           </a:xfrm>
           <a:prstGeom prst="rect">
@@ -11027,13 +13558,13 @@
       </p:sp>
       <p:sp>
         <p:nvSpPr>
-          <p:cNvPr id="37" name="!!pname"/>
+          <p:cNvPr id="40" name="!!pname"/>
           <p:cNvSpPr txBox="1"/>
           <p:nvPr/>
         </p:nvSpPr>
         <p:spPr>
           <a:xfrm>
-            <a:off x="8092440" y="1417320"/>
+            <a:off x="8092440" y="1645920"/>
             <a:ext cx="3611880" cy="411480"/>
           </a:xfrm>
           <a:prstGeom prst="rect">
@@ -11066,13 +13597,13 @@
       </p:sp>
       <p:sp>
         <p:nvSpPr>
-          <p:cNvPr id="38" name="!!pcap"/>
+          <p:cNvPr id="41" name="!!pcap"/>
           <p:cNvSpPr txBox="1"/>
           <p:nvPr/>
         </p:nvSpPr>
         <p:spPr>
           <a:xfrm>
-            <a:off x="8092440" y="1920240"/>
+            <a:off x="8092440" y="2148840"/>
             <a:ext cx="3611880" cy="1051560"/>
           </a:xfrm>
           <a:prstGeom prst="rect">
@@ -11105,7 +13636,7 @@
       </p:sp>
       <p:pic>
         <p:nvPicPr>
-          <p:cNvPr id="39" name="!!cki0" descr="/home/claude/multi-agent-deck/assets/icons/TbCircleCheck_1D9E75.png">    </p:cNvPr>
+          <p:cNvPr id="42" name="!!cki0" descr="/tmp/deck-icons/TbCircleCheck_1D9E75.png">    </p:cNvPr>
           <p:cNvPicPr>
             <a:picLocks noChangeAspect="1"/>
           </p:cNvPicPr>
@@ -11119,7 +13650,7 @@
         </p:blipFill>
         <p:spPr>
           <a:xfrm>
-            <a:off x="8092440" y="3191256"/>
+            <a:off x="8092440" y="3419856"/>
             <a:ext cx="256032" cy="256032"/>
           </a:xfrm>
           <a:prstGeom prst="rect">
@@ -11129,13 +13660,13 @@
       </p:pic>
       <p:sp>
         <p:nvSpPr>
-          <p:cNvPr id="40" name="!!ckt0"/>
+          <p:cNvPr id="43" name="!!ckt0"/>
           <p:cNvSpPr txBox="1"/>
           <p:nvPr/>
         </p:nvSpPr>
         <p:spPr>
           <a:xfrm>
-            <a:off x="8458200" y="3154680"/>
+            <a:off x="8458200" y="3383280"/>
             <a:ext cx="3246120" cy="329184"/>
           </a:xfrm>
           <a:prstGeom prst="rect">
@@ -11168,7 +13699,7 @@
       </p:sp>
       <p:pic>
         <p:nvPicPr>
-          <p:cNvPr id="41" name="!!cki1" descr="/home/claude/multi-agent-deck/assets/icons/TbCircleCheck_1D9E75.png">    </p:cNvPr>
+          <p:cNvPr id="44" name="!!cki1" descr="/tmp/deck-icons/TbCircleCheck_1D9E75.png">    </p:cNvPr>
           <p:cNvPicPr>
             <a:picLocks noChangeAspect="1"/>
           </p:cNvPicPr>
@@ -11182,7 +13713,7 @@
         </p:blipFill>
         <p:spPr>
           <a:xfrm>
-            <a:off x="8092440" y="3648456"/>
+            <a:off x="8092440" y="3877056"/>
             <a:ext cx="256032" cy="256032"/>
           </a:xfrm>
           <a:prstGeom prst="rect">
@@ -11192,13 +13723,13 @@
       </p:pic>
       <p:sp>
         <p:nvSpPr>
-          <p:cNvPr id="42" name="!!ckt1"/>
+          <p:cNvPr id="45" name="!!ckt1"/>
           <p:cNvSpPr txBox="1"/>
           <p:nvPr/>
         </p:nvSpPr>
         <p:spPr>
           <a:xfrm>
-            <a:off x="8458200" y="3611880"/>
+            <a:off x="8458200" y="3840480"/>
             <a:ext cx="3246120" cy="329184"/>
           </a:xfrm>
           <a:prstGeom prst="rect">
@@ -11231,7 +13762,7 @@
       </p:sp>
       <p:pic>
         <p:nvPicPr>
-          <p:cNvPr id="43" name="!!cki2" descr="/home/claude/multi-agent-deck/assets/icons/TbCircleCheck_1D9E75.png">    </p:cNvPr>
+          <p:cNvPr id="46" name="!!cki2" descr="/tmp/deck-icons/TbCircleCheck_1D9E75.png">    </p:cNvPr>
           <p:cNvPicPr>
             <a:picLocks noChangeAspect="1"/>
           </p:cNvPicPr>
@@ -11245,7 +13776,7 @@
         </p:blipFill>
         <p:spPr>
           <a:xfrm>
-            <a:off x="8092440" y="4105656"/>
+            <a:off x="8092440" y="4334256"/>
             <a:ext cx="256032" cy="256032"/>
           </a:xfrm>
           <a:prstGeom prst="rect">
@@ -11255,13 +13786,13 @@
       </p:pic>
       <p:sp>
         <p:nvSpPr>
-          <p:cNvPr id="44" name="!!ckt2"/>
+          <p:cNvPr id="47" name="!!ckt2"/>
           <p:cNvSpPr txBox="1"/>
           <p:nvPr/>
         </p:nvSpPr>
         <p:spPr>
           <a:xfrm>
-            <a:off x="8458200" y="4069080"/>
+            <a:off x="8458200" y="4297680"/>
             <a:ext cx="3246120" cy="329184"/>
           </a:xfrm>
           <a:prstGeom prst="rect">
@@ -11294,7 +13825,7 @@
       </p:sp>
       <p:pic>
         <p:nvPicPr>
-          <p:cNvPr id="45" name="!!cki3" descr="/home/claude/multi-agent-deck/assets/icons/TbCircleCheck_1D9E75.png">    </p:cNvPr>
+          <p:cNvPr id="48" name="!!cki3" descr="/tmp/deck-icons/TbCircleCheck_1D9E75.png">    </p:cNvPr>
           <p:cNvPicPr>
             <a:picLocks noChangeAspect="1"/>
           </p:cNvPicPr>
@@ -11308,7 +13839,7 @@
         </p:blipFill>
         <p:spPr>
           <a:xfrm>
-            <a:off x="8092440" y="4562856"/>
+            <a:off x="8092440" y="4791456"/>
             <a:ext cx="256032" cy="256032"/>
           </a:xfrm>
           <a:prstGeom prst="rect">
@@ -11318,13 +13849,13 @@
       </p:pic>
       <p:sp>
         <p:nvSpPr>
-          <p:cNvPr id="46" name="!!ckt3"/>
+          <p:cNvPr id="49" name="!!ckt3"/>
           <p:cNvSpPr txBox="1"/>
           <p:nvPr/>
         </p:nvSpPr>
         <p:spPr>
           <a:xfrm>
-            <a:off x="8458200" y="4526280"/>
+            <a:off x="8458200" y="4754880"/>
             <a:ext cx="3246120" cy="329184"/>
           </a:xfrm>
           <a:prstGeom prst="rect">
@@ -11357,7 +13888,7 @@
       </p:sp>
       <p:pic>
         <p:nvPicPr>
-          <p:cNvPr id="47" name="!!cki4" descr="/home/claude/multi-agent-deck/assets/icons/TbCircleCheck_1D9E75.png">    </p:cNvPr>
+          <p:cNvPr id="50" name="!!cki4" descr="/tmp/deck-icons/TbCircleCheck_1D9E75.png">    </p:cNvPr>
           <p:cNvPicPr>
             <a:picLocks noChangeAspect="1"/>
           </p:cNvPicPr>
@@ -11371,7 +13902,7 @@
         </p:blipFill>
         <p:spPr>
           <a:xfrm>
-            <a:off x="8092440" y="5020056"/>
+            <a:off x="8092440" y="5248656"/>
             <a:ext cx="256032" cy="256032"/>
           </a:xfrm>
           <a:prstGeom prst="rect">
@@ -11381,13 +13912,13 @@
       </p:pic>
       <p:sp>
         <p:nvSpPr>
-          <p:cNvPr id="48" name="!!ckt4"/>
+          <p:cNvPr id="51" name="!!ckt4"/>
           <p:cNvSpPr txBox="1"/>
           <p:nvPr/>
         </p:nvSpPr>
         <p:spPr>
           <a:xfrm>
-            <a:off x="8458200" y="4983480"/>
+            <a:off x="8458200" y="5212080"/>
             <a:ext cx="3246120" cy="329184"/>
           </a:xfrm>
           <a:prstGeom prst="rect">
@@ -11420,14 +13951,14 @@
       </p:sp>
       <p:sp>
         <p:nvSpPr>
-          <p:cNvPr id="49" name="!!take5"/>
+          <p:cNvPr id="52" name="!!take5"/>
           <p:cNvSpPr txBox="1"/>
           <p:nvPr/>
         </p:nvSpPr>
         <p:spPr>
           <a:xfrm>
-            <a:off x="548640" y="5897880"/>
-            <a:ext cx="11064240" cy="502920"/>
+            <a:off x="548640" y="5760720"/>
+            <a:ext cx="11064240" cy="457200"/>
           </a:xfrm>
           <a:prstGeom prst="rect">
             <a:avLst/>
@@ -11454,6 +13985,54 @@
               <a:t>This isn't an AI problem. It's a system design problem we've already solved, just not for agents yet.</a:t>
             </a:r>
             <a:endParaRPr lang="en-US" sz="1600" dirty="0"/>
+          </a:p>
+        </p:txBody>
+      </p:sp>
+      <p:sp>
+        <p:nvSpPr>
+          <p:cNvPr id="25" name="Slide Number Placeholder 0"/>
+          <p:cNvSpPr>
+            <a:spLocks noGrp="1"/>
+          </p:cNvSpPr>
+          <p:nvPr>
+            <p:ph type="sldNum" sz="quarter" idx="4294967295"/>
+          </p:nvPr>
+        </p:nvSpPr>
+        <p:spPr>
+          <a:xfrm>
+            <a:off x="5641848" y="6382512"/>
+            <a:ext cx="914400" cy="201168"/>
+          </a:xfrm>
+          <a:prstGeom prst="rect">
+            <a:avLst/>
+          </a:prstGeom>
+          <a:extLst>
+            <a:ext uri="{C572A759-6A51-4108-AA02-DFA0A04FC94B}">
+              <ma14:wrappingTextBoxFlag xmlns:ma14="http://schemas.microsoft.com/office/mac/drawingml/2011/main" val="0"/>
+            </a:ext>
+          </a:extLst>
+        </p:spPr>
+        <p:txBody>
+          <a:bodyPr/>
+          <a:lstStyle>
+            <a:lvl1pPr>
+              <a:defRPr sz="1000">
+                <a:solidFill>
+                  <a:srgbClr val="595959"/>
+                </a:solidFill>
+                <a:latin typeface="Arial"/>
+                <a:ea typeface="Arial"/>
+                <a:cs typeface="Arial"/>
+              </a:defRPr>
+            </a:lvl1pPr>
+          </a:lstStyle>
+          <a:p>
+            <a:pPr algn="ctr"/>
+            <a:fld id="{F7021451-1387-4CA6-816F-3879F97B5CBC}" type="slidenum">
+              <a:rPr b="0" lang="en-US"/>
+              <a:t>39</a:t>
+            </a:fld>
+            <a:endParaRPr lang="en-US"/>
           </a:p>
         </p:txBody>
       </p:sp>
@@ -11503,8 +14082,77 @@
         </p:nvSpPr>
         <p:spPr>
           <a:xfrm>
-            <a:off x="502920" y="274320"/>
-            <a:ext cx="11155680" cy="594360"/>
+            <a:off x="411480" y="201168"/>
+            <a:ext cx="11338560" cy="530352"/>
+          </a:xfrm>
+          <a:prstGeom prst="rect">
+            <a:avLst/>
+          </a:prstGeom>
+          <a:noFill/>
+        </p:spPr>
+        <p:txBody>
+          <a:bodyPr wrap="square" lIns="0" rIns="0" tIns="0" bIns="0" anchor="b">
+            <a:spAutoFit/>
+          </a:bodyPr>
+          <a:lstStyle/>
+          <a:p>
+            <a:r>
+              <a:rPr sz="2600" b="1" i="0">
+                <a:solidFill>
+                  <a:srgbClr val="1A1A1A"/>
+                </a:solidFill>
+                <a:latin typeface="Calibri"/>
+              </a:rPr>
+              <a:t>Why Single Agents Fail · One Ticket</a:t>
+            </a:r>
+          </a:p>
+        </p:txBody>
+      </p:sp>
+      <p:cxnSp>
+        <p:nvCxnSpPr>
+          <p:cNvPr id="3" name="Connector 2"/>
+          <p:cNvCxnSpPr/>
+          <p:nvPr/>
+        </p:nvCxnSpPr>
+        <p:spPr>
+          <a:xfrm>
+            <a:off x="411480" y="804672"/>
+            <a:ext cx="11365992" cy="0"/>
+          </a:xfrm>
+          <a:prstGeom prst="line">
+            <a:avLst/>
+          </a:prstGeom>
+          <a:ln w="9525">
+            <a:solidFill>
+              <a:srgbClr val="7F7F7F"/>
+            </a:solidFill>
+          </a:ln>
+        </p:spPr>
+        <p:style>
+          <a:lnRef idx="2">
+            <a:schemeClr val="accent1"/>
+          </a:lnRef>
+          <a:fillRef idx="0">
+            <a:schemeClr val="accent1"/>
+          </a:fillRef>
+          <a:effectRef idx="1">
+            <a:schemeClr val="accent1"/>
+          </a:effectRef>
+          <a:fontRef idx="minor">
+            <a:schemeClr val="tx1"/>
+          </a:fontRef>
+        </p:style>
+      </p:cxnSp>
+      <p:sp>
+        <p:nvSpPr>
+          <p:cNvPr id="4" name="TextBox 3"/>
+          <p:cNvSpPr txBox="1"/>
+          <p:nvPr/>
+        </p:nvSpPr>
+        <p:spPr>
+          <a:xfrm>
+            <a:off x="411480" y="886968"/>
+            <a:ext cx="11338560" cy="438912"/>
           </a:xfrm>
           <a:prstGeom prst="rect">
             <a:avLst/>
@@ -11518,27 +14166,97 @@
           <a:lstStyle/>
           <a:p>
             <a:r>
-              <a:rPr sz="3000" b="1" i="0">
-                <a:solidFill>
-                  <a:srgbClr val="2C2C2A"/>
-                </a:solidFill>
-                <a:latin typeface="Calibri"/>
-              </a:rPr>
-              <a:t>Why Single Agents Fail · Happy Path</a:t>
-            </a:r>
-          </a:p>
-        </p:txBody>
-      </p:sp>
-      <p:sp>
-        <p:nvSpPr>
-          <p:cNvPr id="3" name="Rounded Rectangle 2"/>
+              <a:rPr sz="1400" b="0" i="0">
+                <a:solidFill>
+                  <a:srgbClr val="404040"/>
+                </a:solidFill>
+                <a:latin typeface="Arial"/>
+              </a:rPr>
+              <a:t>Agents suffer from overload too. With one BAU ticket, the agent stays focused: right query, right fix, sign-off.</a:t>
+            </a:r>
+          </a:p>
+        </p:txBody>
+      </p:sp>
+      <p:sp>
+        <p:nvSpPr>
+          <p:cNvPr id="5" name="TextBox 4"/>
+          <p:cNvSpPr txBox="1"/>
+          <p:nvPr/>
+        </p:nvSpPr>
+        <p:spPr>
+          <a:xfrm>
+            <a:off x="5641848" y="6382512"/>
+            <a:ext cx="914400" cy="201168"/>
+          </a:xfrm>
+          <a:prstGeom prst="rect">
+            <a:avLst/>
+          </a:prstGeom>
+          <a:noFill/>
+        </p:spPr>
+        <p:txBody>
+          <a:bodyPr wrap="square" lIns="0" rIns="0" tIns="0" bIns="0" anchor="t">
+            <a:spAutoFit/>
+          </a:bodyPr>
+          <a:lstStyle/>
+          <a:p>
+            <a:pPr algn="ctr"/>
+            <a:fld id="{B6F15528-21DE-4FAA-801E-634DDDAF4B2B}" type="slidenum">
+              <a:rPr lang="en-US" sz="1000">
+                <a:solidFill>
+                  <a:srgbClr val="595959"/>
+                </a:solidFill>
+                <a:latin typeface="Arial"/>
+              </a:rPr>
+              <a:t>‹#›</a:t>
+            </a:fld>
+          </a:p>
+        </p:txBody>
+      </p:sp>
+      <p:sp>
+        <p:nvSpPr>
+          <p:cNvPr id="6" name="TextBox 5"/>
+          <p:cNvSpPr txBox="1"/>
+          <p:nvPr/>
+        </p:nvSpPr>
+        <p:spPr>
+          <a:xfrm>
+            <a:off x="5184648" y="6556248"/>
+            <a:ext cx="1828800" cy="201168"/>
+          </a:xfrm>
+          <a:prstGeom prst="rect">
+            <a:avLst/>
+          </a:prstGeom>
+          <a:noFill/>
+        </p:spPr>
+        <p:txBody>
+          <a:bodyPr wrap="square" lIns="0" rIns="0" tIns="0" bIns="0" anchor="t">
+            <a:spAutoFit/>
+          </a:bodyPr>
+          <a:lstStyle/>
+          <a:p>
+            <a:pPr algn="ctr"/>
+            <a:r>
+              <a:rPr sz="800" b="0" i="0">
+                <a:solidFill>
+                  <a:srgbClr val="7F7F7F"/>
+                </a:solidFill>
+                <a:latin typeface="Arial"/>
+              </a:rPr>
+              <a:t>RESTRICTED</a:t>
+            </a:r>
+          </a:p>
+        </p:txBody>
+      </p:sp>
+      <p:sp>
+        <p:nvSpPr>
+          <p:cNvPr id="7" name="Rounded Rectangle 6"/>
           <p:cNvSpPr/>
           <p:nvPr/>
         </p:nvSpPr>
         <p:spPr>
           <a:xfrm>
-            <a:off x="1070551" y="950976"/>
-            <a:ext cx="10050897" cy="4956048"/>
+            <a:off x="792314" y="1389888"/>
+            <a:ext cx="10607371" cy="4453128"/>
           </a:xfrm>
           <a:prstGeom prst="roundRect">
             <a:avLst>
@@ -11579,7 +14297,7 @@
       </p:sp>
       <p:pic>
         <p:nvPicPr>
-          <p:cNvPr id="4" name="Picture 3" descr="2-why-single-agents-fail-happy-path.gif"/>
+          <p:cNvPr id="8" name="Picture 7" descr="2-why-single-agents-fail-happy-path.gif"/>
           <p:cNvPicPr>
             <a:picLocks noChangeAspect="1"/>
           </p:cNvPicPr>
@@ -11593,8 +14311,8 @@
         </p:blipFill>
         <p:spPr>
           <a:xfrm>
-            <a:off x="1125415" y="1005840"/>
-            <a:ext cx="9941169" cy="4846320"/>
+            <a:off x="847178" y="1444752"/>
+            <a:ext cx="10497643" cy="4343400"/>
           </a:xfrm>
           <a:prstGeom prst="rect">
             <a:avLst/>
@@ -11603,13 +14321,13 @@
       </p:pic>
       <p:sp>
         <p:nvSpPr>
-          <p:cNvPr id="5" name="Rounded Rectangle 4"/>
+          <p:cNvPr id="9" name="Rounded Rectangle 8"/>
           <p:cNvSpPr/>
           <p:nvPr/>
         </p:nvSpPr>
         <p:spPr>
           <a:xfrm>
-            <a:off x="1125415" y="6035040"/>
+            <a:off x="847178" y="5934456"/>
             <a:ext cx="1737360" cy="310896"/>
           </a:xfrm>
           <a:prstGeom prst="roundRect">
@@ -11661,14 +14379,14 @@
       </p:sp>
       <p:sp>
         <p:nvSpPr>
-          <p:cNvPr id="6" name="TextBox 5"/>
+          <p:cNvPr id="10" name="TextBox 9"/>
           <p:cNvSpPr txBox="1"/>
           <p:nvPr/>
         </p:nvSpPr>
         <p:spPr>
           <a:xfrm>
-            <a:off x="3045655" y="6016752"/>
-            <a:ext cx="8020929" cy="365760"/>
+            <a:off x="2767418" y="5916168"/>
+            <a:ext cx="8577403" cy="365760"/>
           </a:xfrm>
           <a:prstGeom prst="rect">
             <a:avLst/>
@@ -11727,8 +14445,77 @@
         </p:nvSpPr>
         <p:spPr>
           <a:xfrm>
-            <a:off x="502920" y="274320"/>
-            <a:ext cx="11155680" cy="594360"/>
+            <a:off x="411480" y="201168"/>
+            <a:ext cx="11338560" cy="530352"/>
+          </a:xfrm>
+          <a:prstGeom prst="rect">
+            <a:avLst/>
+          </a:prstGeom>
+          <a:noFill/>
+        </p:spPr>
+        <p:txBody>
+          <a:bodyPr wrap="square" lIns="0" rIns="0" tIns="0" bIns="0" anchor="b">
+            <a:spAutoFit/>
+          </a:bodyPr>
+          <a:lstStyle/>
+          <a:p>
+            <a:r>
+              <a:rPr sz="2600" b="1" i="0">
+                <a:solidFill>
+                  <a:srgbClr val="1A1A1A"/>
+                </a:solidFill>
+                <a:latin typeface="Calibri"/>
+              </a:rPr>
+              <a:t>Why Single Agents Fail · Three Tickets</a:t>
+            </a:r>
+          </a:p>
+        </p:txBody>
+      </p:sp>
+      <p:cxnSp>
+        <p:nvCxnSpPr>
+          <p:cNvPr id="3" name="Connector 2"/>
+          <p:cNvCxnSpPr/>
+          <p:nvPr/>
+        </p:nvCxnSpPr>
+        <p:spPr>
+          <a:xfrm>
+            <a:off x="411480" y="804672"/>
+            <a:ext cx="11365992" cy="0"/>
+          </a:xfrm>
+          <a:prstGeom prst="line">
+            <a:avLst/>
+          </a:prstGeom>
+          <a:ln w="9525">
+            <a:solidFill>
+              <a:srgbClr val="7F7F7F"/>
+            </a:solidFill>
+          </a:ln>
+        </p:spPr>
+        <p:style>
+          <a:lnRef idx="2">
+            <a:schemeClr val="accent1"/>
+          </a:lnRef>
+          <a:fillRef idx="0">
+            <a:schemeClr val="accent1"/>
+          </a:fillRef>
+          <a:effectRef idx="1">
+            <a:schemeClr val="accent1"/>
+          </a:effectRef>
+          <a:fontRef idx="minor">
+            <a:schemeClr val="tx1"/>
+          </a:fontRef>
+        </p:style>
+      </p:cxnSp>
+      <p:sp>
+        <p:nvSpPr>
+          <p:cNvPr id="4" name="TextBox 3"/>
+          <p:cNvSpPr txBox="1"/>
+          <p:nvPr/>
+        </p:nvSpPr>
+        <p:spPr>
+          <a:xfrm>
+            <a:off x="411480" y="886968"/>
+            <a:ext cx="11338560" cy="438912"/>
           </a:xfrm>
           <a:prstGeom prst="rect">
             <a:avLst/>
@@ -11742,27 +14529,97 @@
           <a:lstStyle/>
           <a:p>
             <a:r>
-              <a:rPr sz="3000" b="1" i="0">
-                <a:solidFill>
-                  <a:srgbClr val="2C2C2A"/>
-                </a:solidFill>
-                <a:latin typeface="Calibri"/>
-              </a:rPr>
-              <a:t>Why Single Agents Fail · Chaotic Path</a:t>
-            </a:r>
-          </a:p>
-        </p:txBody>
-      </p:sp>
-      <p:sp>
-        <p:nvSpPr>
-          <p:cNvPr id="3" name="Rounded Rectangle 2"/>
+              <a:rPr sz="1400" b="0" i="0">
+                <a:solidFill>
+                  <a:srgbClr val="404040"/>
+                </a:solidFill>
+                <a:latin typeface="Arial"/>
+              </a:rPr>
+              <a:t>Give the same agent three tickets in one session and its decisions get weaker: mixed-up data, repeated retries, a test edited until it passes.</a:t>
+            </a:r>
+          </a:p>
+        </p:txBody>
+      </p:sp>
+      <p:sp>
+        <p:nvSpPr>
+          <p:cNvPr id="5" name="TextBox 4"/>
+          <p:cNvSpPr txBox="1"/>
+          <p:nvPr/>
+        </p:nvSpPr>
+        <p:spPr>
+          <a:xfrm>
+            <a:off x="5641848" y="6382512"/>
+            <a:ext cx="914400" cy="201168"/>
+          </a:xfrm>
+          <a:prstGeom prst="rect">
+            <a:avLst/>
+          </a:prstGeom>
+          <a:noFill/>
+        </p:spPr>
+        <p:txBody>
+          <a:bodyPr wrap="square" lIns="0" rIns="0" tIns="0" bIns="0" anchor="t">
+            <a:spAutoFit/>
+          </a:bodyPr>
+          <a:lstStyle/>
+          <a:p>
+            <a:pPr algn="ctr"/>
+            <a:fld id="{B6F15528-21DE-4FAA-801E-634DDDAF4B2B}" type="slidenum">
+              <a:rPr lang="en-US" sz="1000">
+                <a:solidFill>
+                  <a:srgbClr val="595959"/>
+                </a:solidFill>
+                <a:latin typeface="Arial"/>
+              </a:rPr>
+              <a:t>‹#›</a:t>
+            </a:fld>
+          </a:p>
+        </p:txBody>
+      </p:sp>
+      <p:sp>
+        <p:nvSpPr>
+          <p:cNvPr id="6" name="TextBox 5"/>
+          <p:cNvSpPr txBox="1"/>
+          <p:nvPr/>
+        </p:nvSpPr>
+        <p:spPr>
+          <a:xfrm>
+            <a:off x="5184648" y="6556248"/>
+            <a:ext cx="1828800" cy="201168"/>
+          </a:xfrm>
+          <a:prstGeom prst="rect">
+            <a:avLst/>
+          </a:prstGeom>
+          <a:noFill/>
+        </p:spPr>
+        <p:txBody>
+          <a:bodyPr wrap="square" lIns="0" rIns="0" tIns="0" bIns="0" anchor="t">
+            <a:spAutoFit/>
+          </a:bodyPr>
+          <a:lstStyle/>
+          <a:p>
+            <a:pPr algn="ctr"/>
+            <a:r>
+              <a:rPr sz="800" b="0" i="0">
+                <a:solidFill>
+                  <a:srgbClr val="7F7F7F"/>
+                </a:solidFill>
+                <a:latin typeface="Arial"/>
+              </a:rPr>
+              <a:t>RESTRICTED</a:t>
+            </a:r>
+          </a:p>
+        </p:txBody>
+      </p:sp>
+      <p:sp>
+        <p:nvSpPr>
+          <p:cNvPr id="7" name="Rounded Rectangle 6"/>
           <p:cNvSpPr/>
           <p:nvPr/>
         </p:nvSpPr>
         <p:spPr>
           <a:xfrm>
-            <a:off x="1070551" y="950976"/>
-            <a:ext cx="10050897" cy="4956048"/>
+            <a:off x="792314" y="1389888"/>
+            <a:ext cx="10607371" cy="4453128"/>
           </a:xfrm>
           <a:prstGeom prst="roundRect">
             <a:avLst>
@@ -11803,7 +14660,7 @@
       </p:sp>
       <p:pic>
         <p:nvPicPr>
-          <p:cNvPr id="4" name="Picture 3" descr="2-why-single-agents-fail-chaotic-path.gif"/>
+          <p:cNvPr id="8" name="Picture 7" descr="2-why-single-agents-fail-chaotic-path.gif"/>
           <p:cNvPicPr>
             <a:picLocks noChangeAspect="1"/>
           </p:cNvPicPr>
@@ -11817,8 +14674,8 @@
         </p:blipFill>
         <p:spPr>
           <a:xfrm>
-            <a:off x="1125415" y="1005840"/>
-            <a:ext cx="9941169" cy="4846320"/>
+            <a:off x="847178" y="1444752"/>
+            <a:ext cx="10497643" cy="4343400"/>
           </a:xfrm>
           <a:prstGeom prst="rect">
             <a:avLst/>
@@ -11827,13 +14684,13 @@
       </p:pic>
       <p:sp>
         <p:nvSpPr>
-          <p:cNvPr id="5" name="Rounded Rectangle 4"/>
+          <p:cNvPr id="9" name="Rounded Rectangle 8"/>
           <p:cNvSpPr/>
           <p:nvPr/>
         </p:nvSpPr>
         <p:spPr>
           <a:xfrm>
-            <a:off x="1125415" y="6035040"/>
+            <a:off x="847178" y="5934456"/>
             <a:ext cx="1737360" cy="310896"/>
           </a:xfrm>
           <a:prstGeom prst="roundRect">
@@ -11885,14 +14742,14 @@
       </p:sp>
       <p:sp>
         <p:nvSpPr>
-          <p:cNvPr id="6" name="TextBox 5"/>
+          <p:cNvPr id="10" name="TextBox 9"/>
           <p:cNvSpPr txBox="1"/>
           <p:nvPr/>
         </p:nvSpPr>
         <p:spPr>
           <a:xfrm>
-            <a:off x="3045655" y="6016752"/>
-            <a:ext cx="8020929" cy="365760"/>
+            <a:off x="2767418" y="5916168"/>
+            <a:ext cx="8577403" cy="365760"/>
           </a:xfrm>
           <a:prstGeom prst="rect">
             <a:avLst/>
@@ -11951,8 +14808,77 @@
         </p:nvSpPr>
         <p:spPr>
           <a:xfrm>
-            <a:off x="502920" y="274320"/>
-            <a:ext cx="11155680" cy="594360"/>
+            <a:off x="411480" y="201168"/>
+            <a:ext cx="11338560" cy="530352"/>
+          </a:xfrm>
+          <a:prstGeom prst="rect">
+            <a:avLst/>
+          </a:prstGeom>
+          <a:noFill/>
+        </p:spPr>
+        <p:txBody>
+          <a:bodyPr wrap="square" lIns="0" rIns="0" tIns="0" bIns="0" anchor="b">
+            <a:spAutoFit/>
+          </a:bodyPr>
+          <a:lstStyle/>
+          <a:p>
+            <a:r>
+              <a:rPr sz="2600" b="1" i="0">
+                <a:solidFill>
+                  <a:srgbClr val="1A1A1A"/>
+                </a:solidFill>
+                <a:latin typeface="Calibri"/>
+              </a:rPr>
+              <a:t>The Core Idea of Multi-Agent Systems</a:t>
+            </a:r>
+          </a:p>
+        </p:txBody>
+      </p:sp>
+      <p:cxnSp>
+        <p:nvCxnSpPr>
+          <p:cNvPr id="3" name="Connector 2"/>
+          <p:cNvCxnSpPr/>
+          <p:nvPr/>
+        </p:nvCxnSpPr>
+        <p:spPr>
+          <a:xfrm>
+            <a:off x="411480" y="804672"/>
+            <a:ext cx="11365992" cy="0"/>
+          </a:xfrm>
+          <a:prstGeom prst="line">
+            <a:avLst/>
+          </a:prstGeom>
+          <a:ln w="9525">
+            <a:solidFill>
+              <a:srgbClr val="7F7F7F"/>
+            </a:solidFill>
+          </a:ln>
+        </p:spPr>
+        <p:style>
+          <a:lnRef idx="2">
+            <a:schemeClr val="accent1"/>
+          </a:lnRef>
+          <a:fillRef idx="0">
+            <a:schemeClr val="accent1"/>
+          </a:fillRef>
+          <a:effectRef idx="1">
+            <a:schemeClr val="accent1"/>
+          </a:effectRef>
+          <a:fontRef idx="minor">
+            <a:schemeClr val="tx1"/>
+          </a:fontRef>
+        </p:style>
+      </p:cxnSp>
+      <p:sp>
+        <p:nvSpPr>
+          <p:cNvPr id="4" name="TextBox 3"/>
+          <p:cNvSpPr txBox="1"/>
+          <p:nvPr/>
+        </p:nvSpPr>
+        <p:spPr>
+          <a:xfrm>
+            <a:off x="411480" y="886968"/>
+            <a:ext cx="11338560" cy="438912"/>
           </a:xfrm>
           <a:prstGeom prst="rect">
             <a:avLst/>
@@ -11966,27 +14892,97 @@
           <a:lstStyle/>
           <a:p>
             <a:r>
-              <a:rPr sz="3000" b="1" i="0">
-                <a:solidFill>
-                  <a:srgbClr val="2C2C2A"/>
-                </a:solidFill>
-                <a:latin typeface="Calibri"/>
-              </a:rPr>
-              <a:t>The Core Idea of Multi-Agent Systems</a:t>
-            </a:r>
-          </a:p>
-        </p:txBody>
-      </p:sp>
-      <p:sp>
-        <p:nvSpPr>
-          <p:cNvPr id="3" name="Rounded Rectangle 2"/>
+              <a:rPr sz="1400" b="0" i="0">
+                <a:solidFill>
+                  <a:srgbClr val="404040"/>
+                </a:solidFill>
+                <a:latin typeface="Arial"/>
+              </a:rPr>
+              <a:t>Give each agent one job and connect them with clear hand-offs. The shape can change (supervisor, pipeline, swarm); the building blocks stay the same.</a:t>
+            </a:r>
+          </a:p>
+        </p:txBody>
+      </p:sp>
+      <p:sp>
+        <p:nvSpPr>
+          <p:cNvPr id="5" name="TextBox 4"/>
+          <p:cNvSpPr txBox="1"/>
+          <p:nvPr/>
+        </p:nvSpPr>
+        <p:spPr>
+          <a:xfrm>
+            <a:off x="5641848" y="6382512"/>
+            <a:ext cx="914400" cy="201168"/>
+          </a:xfrm>
+          <a:prstGeom prst="rect">
+            <a:avLst/>
+          </a:prstGeom>
+          <a:noFill/>
+        </p:spPr>
+        <p:txBody>
+          <a:bodyPr wrap="square" lIns="0" rIns="0" tIns="0" bIns="0" anchor="t">
+            <a:spAutoFit/>
+          </a:bodyPr>
+          <a:lstStyle/>
+          <a:p>
+            <a:pPr algn="ctr"/>
+            <a:fld id="{B6F15528-21DE-4FAA-801E-634DDDAF4B2B}" type="slidenum">
+              <a:rPr lang="en-US" sz="1000">
+                <a:solidFill>
+                  <a:srgbClr val="595959"/>
+                </a:solidFill>
+                <a:latin typeface="Arial"/>
+              </a:rPr>
+              <a:t>‹#›</a:t>
+            </a:fld>
+          </a:p>
+        </p:txBody>
+      </p:sp>
+      <p:sp>
+        <p:nvSpPr>
+          <p:cNvPr id="6" name="TextBox 5"/>
+          <p:cNvSpPr txBox="1"/>
+          <p:nvPr/>
+        </p:nvSpPr>
+        <p:spPr>
+          <a:xfrm>
+            <a:off x="5184648" y="6556248"/>
+            <a:ext cx="1828800" cy="201168"/>
+          </a:xfrm>
+          <a:prstGeom prst="rect">
+            <a:avLst/>
+          </a:prstGeom>
+          <a:noFill/>
+        </p:spPr>
+        <p:txBody>
+          <a:bodyPr wrap="square" lIns="0" rIns="0" tIns="0" bIns="0" anchor="t">
+            <a:spAutoFit/>
+          </a:bodyPr>
+          <a:lstStyle/>
+          <a:p>
+            <a:pPr algn="ctr"/>
+            <a:r>
+              <a:rPr sz="800" b="0" i="0">
+                <a:solidFill>
+                  <a:srgbClr val="7F7F7F"/>
+                </a:solidFill>
+                <a:latin typeface="Arial"/>
+              </a:rPr>
+              <a:t>RESTRICTED</a:t>
+            </a:r>
+          </a:p>
+        </p:txBody>
+      </p:sp>
+      <p:sp>
+        <p:nvSpPr>
+          <p:cNvPr id="7" name="Rounded Rectangle 6"/>
           <p:cNvSpPr/>
           <p:nvPr/>
         </p:nvSpPr>
         <p:spPr>
           <a:xfrm>
-            <a:off x="1070551" y="950976"/>
-            <a:ext cx="10050897" cy="4956048"/>
+            <a:off x="792314" y="1389888"/>
+            <a:ext cx="10607371" cy="4453128"/>
           </a:xfrm>
           <a:prstGeom prst="roundRect">
             <a:avLst>
@@ -12027,7 +15023,7 @@
       </p:sp>
       <p:pic>
         <p:nvPicPr>
-          <p:cNvPr id="4" name="Picture 3" descr="6-core-idea.gif"/>
+          <p:cNvPr id="8" name="Picture 7" descr="6-core-idea.gif"/>
           <p:cNvPicPr>
             <a:picLocks noChangeAspect="1"/>
           </p:cNvPicPr>
@@ -12041,8 +15037,8 @@
         </p:blipFill>
         <p:spPr>
           <a:xfrm>
-            <a:off x="1125415" y="1005840"/>
-            <a:ext cx="9941169" cy="4846320"/>
+            <a:off x="847178" y="1444752"/>
+            <a:ext cx="10497643" cy="4343400"/>
           </a:xfrm>
           <a:prstGeom prst="rect">
             <a:avLst/>
@@ -12051,13 +15047,13 @@
       </p:pic>
       <p:sp>
         <p:nvSpPr>
-          <p:cNvPr id="5" name="Rounded Rectangle 4"/>
+          <p:cNvPr id="9" name="Rounded Rectangle 8"/>
           <p:cNvSpPr/>
           <p:nvPr/>
         </p:nvSpPr>
         <p:spPr>
           <a:xfrm>
-            <a:off x="1125415" y="6035040"/>
+            <a:off x="847178" y="5934456"/>
             <a:ext cx="1737360" cy="310896"/>
           </a:xfrm>
           <a:prstGeom prst="roundRect">
@@ -12109,14 +15105,14 @@
       </p:sp>
       <p:sp>
         <p:nvSpPr>
-          <p:cNvPr id="6" name="TextBox 5"/>
+          <p:cNvPr id="10" name="TextBox 9"/>
           <p:cNvSpPr txBox="1"/>
           <p:nvPr/>
         </p:nvSpPr>
         <p:spPr>
           <a:xfrm>
-            <a:off x="3045655" y="6016752"/>
-            <a:ext cx="8020929" cy="365760"/>
+            <a:off x="2767418" y="5916168"/>
+            <a:ext cx="8577403" cy="365760"/>
           </a:xfrm>
           <a:prstGeom prst="rect">
             <a:avLst/>
